--- a/Ritsumori cup2026/others/スケジュール.pptx
+++ b/Ritsumori cup2026/others/スケジュール.pptx
@@ -6,6 +6,9 @@
   </p:sldMasterIdLst>
   <p:sldIdLst>
     <p:sldId id="256" r:id="rId2"/>
+    <p:sldId id="257" r:id="rId3"/>
+    <p:sldId id="258" r:id="rId4"/>
+    <p:sldId id="259" r:id="rId5"/>
   </p:sldIdLst>
   <p:sldSz cx="12192000" cy="6858000"/>
   <p:notesSz cx="6858000" cy="9144000"/>
@@ -259,7 +262,7 @@
           <a:p>
             <a:fld id="{0A336206-C7DA-463F-A73C-BCC6DF555C88}" type="datetimeFigureOut">
               <a:rPr kumimoji="1" lang="ja-JP" altLang="en-US" smtClean="0"/>
-              <a:t>2026/2/16</a:t>
+              <a:t>2026/4/5</a:t>
             </a:fld>
             <a:endParaRPr kumimoji="1" lang="ja-JP" altLang="en-US"/>
           </a:p>
@@ -489,7 +492,7 @@
           <a:p>
             <a:fld id="{0A336206-C7DA-463F-A73C-BCC6DF555C88}" type="datetimeFigureOut">
               <a:rPr kumimoji="1" lang="ja-JP" altLang="en-US" smtClean="0"/>
-              <a:t>2026/2/16</a:t>
+              <a:t>2026/4/5</a:t>
             </a:fld>
             <a:endParaRPr kumimoji="1" lang="ja-JP" altLang="en-US"/>
           </a:p>
@@ -729,7 +732,7 @@
           <a:p>
             <a:fld id="{0A336206-C7DA-463F-A73C-BCC6DF555C88}" type="datetimeFigureOut">
               <a:rPr kumimoji="1" lang="ja-JP" altLang="en-US" smtClean="0"/>
-              <a:t>2026/2/16</a:t>
+              <a:t>2026/4/5</a:t>
             </a:fld>
             <a:endParaRPr kumimoji="1" lang="ja-JP" altLang="en-US"/>
           </a:p>
@@ -959,7 +962,7 @@
           <a:p>
             <a:fld id="{0A336206-C7DA-463F-A73C-BCC6DF555C88}" type="datetimeFigureOut">
               <a:rPr kumimoji="1" lang="ja-JP" altLang="en-US" smtClean="0"/>
-              <a:t>2026/2/16</a:t>
+              <a:t>2026/4/5</a:t>
             </a:fld>
             <a:endParaRPr kumimoji="1" lang="ja-JP" altLang="en-US"/>
           </a:p>
@@ -1234,7 +1237,7 @@
           <a:p>
             <a:fld id="{0A336206-C7DA-463F-A73C-BCC6DF555C88}" type="datetimeFigureOut">
               <a:rPr kumimoji="1" lang="ja-JP" altLang="en-US" smtClean="0"/>
-              <a:t>2026/2/16</a:t>
+              <a:t>2026/4/5</a:t>
             </a:fld>
             <a:endParaRPr kumimoji="1" lang="ja-JP" altLang="en-US"/>
           </a:p>
@@ -1563,7 +1566,7 @@
           <a:p>
             <a:fld id="{0A336206-C7DA-463F-A73C-BCC6DF555C88}" type="datetimeFigureOut">
               <a:rPr kumimoji="1" lang="ja-JP" altLang="en-US" smtClean="0"/>
-              <a:t>2026/2/16</a:t>
+              <a:t>2026/4/5</a:t>
             </a:fld>
             <a:endParaRPr kumimoji="1" lang="ja-JP" altLang="en-US"/>
           </a:p>
@@ -2039,7 +2042,7 @@
           <a:p>
             <a:fld id="{0A336206-C7DA-463F-A73C-BCC6DF555C88}" type="datetimeFigureOut">
               <a:rPr kumimoji="1" lang="ja-JP" altLang="en-US" smtClean="0"/>
-              <a:t>2026/2/16</a:t>
+              <a:t>2026/4/5</a:t>
             </a:fld>
             <a:endParaRPr kumimoji="1" lang="ja-JP" altLang="en-US"/>
           </a:p>
@@ -2180,7 +2183,7 @@
           <a:p>
             <a:fld id="{0A336206-C7DA-463F-A73C-BCC6DF555C88}" type="datetimeFigureOut">
               <a:rPr kumimoji="1" lang="ja-JP" altLang="en-US" smtClean="0"/>
-              <a:t>2026/2/16</a:t>
+              <a:t>2026/4/5</a:t>
             </a:fld>
             <a:endParaRPr kumimoji="1" lang="ja-JP" altLang="en-US"/>
           </a:p>
@@ -2293,7 +2296,7 @@
           <a:p>
             <a:fld id="{0A336206-C7DA-463F-A73C-BCC6DF555C88}" type="datetimeFigureOut">
               <a:rPr kumimoji="1" lang="ja-JP" altLang="en-US" smtClean="0"/>
-              <a:t>2026/2/16</a:t>
+              <a:t>2026/4/5</a:t>
             </a:fld>
             <a:endParaRPr kumimoji="1" lang="ja-JP" altLang="en-US"/>
           </a:p>
@@ -2636,7 +2639,7 @@
           <a:p>
             <a:fld id="{0A336206-C7DA-463F-A73C-BCC6DF555C88}" type="datetimeFigureOut">
               <a:rPr kumimoji="1" lang="ja-JP" altLang="en-US" smtClean="0"/>
-              <a:t>2026/2/16</a:t>
+              <a:t>2026/4/5</a:t>
             </a:fld>
             <a:endParaRPr kumimoji="1" lang="ja-JP" altLang="en-US"/>
           </a:p>
@@ -2924,7 +2927,7 @@
           <a:p>
             <a:fld id="{0A336206-C7DA-463F-A73C-BCC6DF555C88}" type="datetimeFigureOut">
               <a:rPr kumimoji="1" lang="ja-JP" altLang="en-US" smtClean="0"/>
-              <a:t>2026/2/16</a:t>
+              <a:t>2026/4/5</a:t>
             </a:fld>
             <a:endParaRPr kumimoji="1" lang="ja-JP" altLang="en-US"/>
           </a:p>
@@ -3197,7 +3200,7 @@
           <a:p>
             <a:fld id="{0A336206-C7DA-463F-A73C-BCC6DF555C88}" type="datetimeFigureOut">
               <a:rPr kumimoji="1" lang="ja-JP" altLang="en-US" smtClean="0"/>
-              <a:t>2026/2/16</a:t>
+              <a:t>2026/4/5</a:t>
             </a:fld>
             <a:endParaRPr kumimoji="1" lang="ja-JP" altLang="en-US"/>
           </a:p>
@@ -5063,7 +5066,7 @@
                     <a:bodyPr/>
                     <a:lstStyle/>
                     <a:p>
-                      <a:endParaRPr kumimoji="1" lang="ja-JP" altLang="en-US"/>
+                      <a:endParaRPr kumimoji="1" lang="ja-JP" altLang="en-US" dirty="0"/>
                     </a:p>
                   </a:txBody>
                   <a:tcPr>
@@ -5621,13 +5624,14 @@
             </p:cNvPr>
             <p:cNvCxnSpPr>
               <a:cxnSpLocks/>
+              <a:endCxn id="14" idx="1"/>
             </p:cNvCxnSpPr>
             <p:nvPr/>
           </p:nvCxnSpPr>
           <p:spPr>
             <a:xfrm>
               <a:off x="2918127" y="1582420"/>
-              <a:ext cx="811033" cy="0"/>
+              <a:ext cx="811033" cy="1"/>
             </a:xfrm>
             <a:prstGeom prst="line">
               <a:avLst/>
@@ -5787,7 +5791,7 @@
         </p:nvSpPr>
         <p:spPr>
           <a:xfrm>
-            <a:off x="3693160" y="1724843"/>
+            <a:off x="3693157" y="1729695"/>
             <a:ext cx="72000" cy="72000"/>
           </a:xfrm>
           <a:prstGeom prst="ellipse">
@@ -5879,8 +5883,8 @@
         </p:nvCxnSpPr>
         <p:spPr>
           <a:xfrm>
-            <a:off x="3729158" y="1948422"/>
-            <a:ext cx="1080000" cy="0"/>
+            <a:off x="3729157" y="1948422"/>
+            <a:ext cx="1080001" cy="0"/>
           </a:xfrm>
           <a:prstGeom prst="line">
             <a:avLst/>
@@ -6086,8 +6090,8 @@
         </p:nvCxnSpPr>
         <p:spPr>
           <a:xfrm>
-            <a:off x="4809157" y="2598745"/>
-            <a:ext cx="3240000" cy="0"/>
+            <a:off x="4823460" y="2594588"/>
+            <a:ext cx="3225697" cy="4157"/>
           </a:xfrm>
           <a:prstGeom prst="line">
             <a:avLst/>
@@ -6350,6 +6354,7044 @@
     <p:extLst>
       <p:ext uri="{BB962C8B-B14F-4D97-AF65-F5344CB8AC3E}">
         <p14:creationId xmlns:p14="http://schemas.microsoft.com/office/powerpoint/2010/main" val="251154755"/>
+      </p:ext>
+    </p:extLst>
+  </p:cSld>
+  <p:clrMapOvr>
+    <a:masterClrMapping/>
+  </p:clrMapOvr>
+</p:sld>
+</file>
+
+<file path=ppt/slides/slide2.xml><?xml version="1.0" encoding="utf-8"?>
+<p:sld xmlns:a="http://schemas.openxmlformats.org/drawingml/2006/main" xmlns:r="http://schemas.openxmlformats.org/officeDocument/2006/relationships" xmlns:p="http://schemas.openxmlformats.org/presentationml/2006/main">
+  <p:cSld>
+    <p:spTree>
+      <p:nvGrpSpPr>
+        <p:cNvPr id="1" name=""/>
+        <p:cNvGrpSpPr/>
+        <p:nvPr/>
+      </p:nvGrpSpPr>
+      <p:grpSpPr>
+        <a:xfrm>
+          <a:off x="0" y="0"/>
+          <a:ext cx="0" cy="0"/>
+          <a:chOff x="0" y="0"/>
+          <a:chExt cx="0" cy="0"/>
+        </a:xfrm>
+      </p:grpSpPr>
+      <p:graphicFrame>
+        <p:nvGraphicFramePr>
+          <p:cNvPr id="4" name="表 5">
+            <a:extLst>
+              <a:ext uri="{FF2B5EF4-FFF2-40B4-BE49-F238E27FC236}">
+                <a16:creationId xmlns:a16="http://schemas.microsoft.com/office/drawing/2014/main" id="{A0C08363-8112-21ED-2DBA-DF5D7121D79A}"/>
+              </a:ext>
+            </a:extLst>
+          </p:cNvPr>
+          <p:cNvGraphicFramePr>
+            <a:graphicFrameLocks noGrp="1"/>
+          </p:cNvGraphicFramePr>
+          <p:nvPr>
+            <p:extLst>
+              <p:ext uri="{D42A27DB-BD31-4B8C-83A1-F6EECF244321}">
+                <p14:modId xmlns:p14="http://schemas.microsoft.com/office/powerpoint/2010/main" val="3304722058"/>
+              </p:ext>
+            </p:extLst>
+          </p:nvPr>
+        </p:nvGraphicFramePr>
+        <p:xfrm>
+          <a:off x="318053" y="984857"/>
+          <a:ext cx="9152514" cy="2337391"/>
+        </p:xfrm>
+        <a:graphic>
+          <a:graphicData uri="http://schemas.openxmlformats.org/drawingml/2006/table">
+            <a:tbl>
+              <a:tblPr>
+                <a:tableStyleId>{5C22544A-7EE6-4342-B048-85BDC9FD1C3A}</a:tableStyleId>
+              </a:tblPr>
+              <a:tblGrid>
+                <a:gridCol w="1725450">
+                  <a:extLst>
+                    <a:ext uri="{9D8B030D-6E8A-4147-A177-3AD203B41FA5}">
+                      <a16:colId xmlns:a16="http://schemas.microsoft.com/office/drawing/2014/main" val="1831953829"/>
+                    </a:ext>
+                  </a:extLst>
+                </a:gridCol>
+                <a:gridCol w="928383">
+                  <a:extLst>
+                    <a:ext uri="{9D8B030D-6E8A-4147-A177-3AD203B41FA5}">
+                      <a16:colId xmlns:a16="http://schemas.microsoft.com/office/drawing/2014/main" val="3705856040"/>
+                    </a:ext>
+                  </a:extLst>
+                </a:gridCol>
+                <a:gridCol w="928383">
+                  <a:extLst>
+                    <a:ext uri="{9D8B030D-6E8A-4147-A177-3AD203B41FA5}">
+                      <a16:colId xmlns:a16="http://schemas.microsoft.com/office/drawing/2014/main" val="359584382"/>
+                    </a:ext>
+                  </a:extLst>
+                </a:gridCol>
+                <a:gridCol w="928383">
+                  <a:extLst>
+                    <a:ext uri="{9D8B030D-6E8A-4147-A177-3AD203B41FA5}">
+                      <a16:colId xmlns:a16="http://schemas.microsoft.com/office/drawing/2014/main" val="3720535646"/>
+                    </a:ext>
+                  </a:extLst>
+                </a:gridCol>
+                <a:gridCol w="928383">
+                  <a:extLst>
+                    <a:ext uri="{9D8B030D-6E8A-4147-A177-3AD203B41FA5}">
+                      <a16:colId xmlns:a16="http://schemas.microsoft.com/office/drawing/2014/main" val="4163742253"/>
+                    </a:ext>
+                  </a:extLst>
+                </a:gridCol>
+                <a:gridCol w="928383">
+                  <a:extLst>
+                    <a:ext uri="{9D8B030D-6E8A-4147-A177-3AD203B41FA5}">
+                      <a16:colId xmlns:a16="http://schemas.microsoft.com/office/drawing/2014/main" val="2899359654"/>
+                    </a:ext>
+                  </a:extLst>
+                </a:gridCol>
+                <a:gridCol w="928383">
+                  <a:extLst>
+                    <a:ext uri="{9D8B030D-6E8A-4147-A177-3AD203B41FA5}">
+                      <a16:colId xmlns:a16="http://schemas.microsoft.com/office/drawing/2014/main" val="2448632567"/>
+                    </a:ext>
+                  </a:extLst>
+                </a:gridCol>
+                <a:gridCol w="928383">
+                  <a:extLst>
+                    <a:ext uri="{9D8B030D-6E8A-4147-A177-3AD203B41FA5}">
+                      <a16:colId xmlns:a16="http://schemas.microsoft.com/office/drawing/2014/main" val="2725184798"/>
+                    </a:ext>
+                  </a:extLst>
+                </a:gridCol>
+                <a:gridCol w="928383">
+                  <a:extLst>
+                    <a:ext uri="{9D8B030D-6E8A-4147-A177-3AD203B41FA5}">
+                      <a16:colId xmlns:a16="http://schemas.microsoft.com/office/drawing/2014/main" val="836894017"/>
+                    </a:ext>
+                  </a:extLst>
+                </a:gridCol>
+              </a:tblGrid>
+              <a:tr h="494086">
+                <a:tc>
+                  <a:txBody>
+                    <a:bodyPr/>
+                    <a:lstStyle/>
+                    <a:p>
+                      <a:pPr algn="ctr"/>
+                      <a:r>
+                        <a:rPr kumimoji="1" lang="ja-JP" altLang="en-US" dirty="0">
+                          <a:solidFill>
+                            <a:schemeClr val="bg1"/>
+                          </a:solidFill>
+                        </a:rPr>
+                        <a:t>スケジュール</a:t>
+                      </a:r>
+                    </a:p>
+                  </a:txBody>
+                  <a:tcPr>
+                    <a:lnL w="12700" cmpd="sng">
+                      <a:noFill/>
+                    </a:lnL>
+                    <a:lnR w="12700" cmpd="sng">
+                      <a:noFill/>
+                    </a:lnR>
+                    <a:lnT w="12700" cmpd="sng">
+                      <a:noFill/>
+                    </a:lnT>
+                    <a:lnB w="12700" cmpd="sng">
+                      <a:noFill/>
+                    </a:lnB>
+                    <a:lnTlToBr w="12700" cmpd="sng">
+                      <a:noFill/>
+                      <a:prstDash val="solid"/>
+                    </a:lnTlToBr>
+                    <a:lnBlToTr w="12700" cmpd="sng">
+                      <a:noFill/>
+                      <a:prstDash val="solid"/>
+                    </a:lnBlToTr>
+                    <a:solidFill>
+                      <a:srgbClr val="003366"/>
+                    </a:solidFill>
+                  </a:tcPr>
+                </a:tc>
+                <a:tc>
+                  <a:txBody>
+                    <a:bodyPr/>
+                    <a:lstStyle/>
+                    <a:p>
+                      <a:pPr algn="ctr"/>
+                      <a:r>
+                        <a:rPr kumimoji="1" lang="en-US" altLang="ja-JP" dirty="0"/>
+                        <a:t>1</a:t>
+                      </a:r>
+                      <a:r>
+                        <a:rPr kumimoji="1" lang="ja-JP" altLang="en-US" dirty="0"/>
+                        <a:t>月</a:t>
+                      </a:r>
+                    </a:p>
+                  </a:txBody>
+                  <a:tcPr>
+                    <a:lnL w="12700" cmpd="sng">
+                      <a:noFill/>
+                    </a:lnL>
+                    <a:lnR w="12700" cmpd="sng">
+                      <a:noFill/>
+                    </a:lnR>
+                    <a:lnT w="12700" cmpd="sng">
+                      <a:noFill/>
+                    </a:lnT>
+                    <a:lnB w="12700" cap="flat" cmpd="sng" algn="ctr">
+                      <a:solidFill>
+                        <a:schemeClr val="tx1">
+                          <a:lumMod val="50000"/>
+                          <a:lumOff val="50000"/>
+                        </a:schemeClr>
+                      </a:solidFill>
+                      <a:prstDash val="solid"/>
+                      <a:round/>
+                      <a:headEnd type="none" w="med" len="med"/>
+                      <a:tailEnd type="none" w="med" len="med"/>
+                    </a:lnB>
+                    <a:lnTlToBr w="12700" cmpd="sng">
+                      <a:noFill/>
+                      <a:prstDash val="solid"/>
+                    </a:lnTlToBr>
+                    <a:lnBlToTr w="12700" cmpd="sng">
+                      <a:noFill/>
+                      <a:prstDash val="solid"/>
+                    </a:lnBlToTr>
+                    <a:solidFill>
+                      <a:srgbClr val="E78A35"/>
+                    </a:solidFill>
+                  </a:tcPr>
+                </a:tc>
+                <a:tc>
+                  <a:txBody>
+                    <a:bodyPr/>
+                    <a:lstStyle/>
+                    <a:p>
+                      <a:pPr algn="ctr"/>
+                      <a:r>
+                        <a:rPr kumimoji="1" lang="en-US" altLang="ja-JP" dirty="0"/>
+                        <a:t>2</a:t>
+                      </a:r>
+                      <a:r>
+                        <a:rPr kumimoji="1" lang="ja-JP" altLang="en-US" dirty="0"/>
+                        <a:t>月</a:t>
+                      </a:r>
+                    </a:p>
+                  </a:txBody>
+                  <a:tcPr>
+                    <a:lnL w="12700" cmpd="sng">
+                      <a:noFill/>
+                    </a:lnL>
+                    <a:lnR w="12700" cmpd="sng">
+                      <a:noFill/>
+                    </a:lnR>
+                    <a:lnT w="12700" cmpd="sng">
+                      <a:noFill/>
+                    </a:lnT>
+                    <a:lnB w="12700" cap="flat" cmpd="sng" algn="ctr">
+                      <a:solidFill>
+                        <a:schemeClr val="tx1">
+                          <a:lumMod val="50000"/>
+                          <a:lumOff val="50000"/>
+                        </a:schemeClr>
+                      </a:solidFill>
+                      <a:prstDash val="solid"/>
+                      <a:round/>
+                      <a:headEnd type="none" w="med" len="med"/>
+                      <a:tailEnd type="none" w="med" len="med"/>
+                    </a:lnB>
+                    <a:lnTlToBr w="12700" cmpd="sng">
+                      <a:noFill/>
+                      <a:prstDash val="solid"/>
+                    </a:lnTlToBr>
+                    <a:lnBlToTr w="12700" cmpd="sng">
+                      <a:noFill/>
+                      <a:prstDash val="solid"/>
+                    </a:lnBlToTr>
+                    <a:solidFill>
+                      <a:srgbClr val="E78A35"/>
+                    </a:solidFill>
+                  </a:tcPr>
+                </a:tc>
+                <a:tc>
+                  <a:txBody>
+                    <a:bodyPr/>
+                    <a:lstStyle/>
+                    <a:p>
+                      <a:pPr algn="ctr"/>
+                      <a:r>
+                        <a:rPr kumimoji="1" lang="en-US" altLang="ja-JP" dirty="0"/>
+                        <a:t>3</a:t>
+                      </a:r>
+                      <a:r>
+                        <a:rPr kumimoji="1" lang="ja-JP" altLang="en-US" dirty="0"/>
+                        <a:t>月</a:t>
+                      </a:r>
+                    </a:p>
+                  </a:txBody>
+                  <a:tcPr>
+                    <a:lnL w="12700" cmpd="sng">
+                      <a:noFill/>
+                    </a:lnL>
+                    <a:lnR w="12700" cmpd="sng">
+                      <a:noFill/>
+                    </a:lnR>
+                    <a:lnT w="12700" cmpd="sng">
+                      <a:noFill/>
+                    </a:lnT>
+                    <a:lnB w="12700" cap="flat" cmpd="sng" algn="ctr">
+                      <a:solidFill>
+                        <a:schemeClr val="tx1">
+                          <a:lumMod val="50000"/>
+                          <a:lumOff val="50000"/>
+                        </a:schemeClr>
+                      </a:solidFill>
+                      <a:prstDash val="solid"/>
+                      <a:round/>
+                      <a:headEnd type="none" w="med" len="med"/>
+                      <a:tailEnd type="none" w="med" len="med"/>
+                    </a:lnB>
+                    <a:lnTlToBr w="12700" cmpd="sng">
+                      <a:noFill/>
+                      <a:prstDash val="solid"/>
+                    </a:lnTlToBr>
+                    <a:lnBlToTr w="12700" cmpd="sng">
+                      <a:noFill/>
+                      <a:prstDash val="solid"/>
+                    </a:lnBlToTr>
+                    <a:solidFill>
+                      <a:srgbClr val="E78A35"/>
+                    </a:solidFill>
+                  </a:tcPr>
+                </a:tc>
+                <a:tc>
+                  <a:txBody>
+                    <a:bodyPr/>
+                    <a:lstStyle/>
+                    <a:p>
+                      <a:pPr algn="ctr"/>
+                      <a:r>
+                        <a:rPr kumimoji="1" lang="en-US" altLang="ja-JP" dirty="0"/>
+                        <a:t>4</a:t>
+                      </a:r>
+                      <a:r>
+                        <a:rPr kumimoji="1" lang="ja-JP" altLang="en-US" dirty="0"/>
+                        <a:t>月</a:t>
+                      </a:r>
+                    </a:p>
+                  </a:txBody>
+                  <a:tcPr>
+                    <a:lnL w="12700" cmpd="sng">
+                      <a:noFill/>
+                    </a:lnL>
+                    <a:lnR w="12700" cmpd="sng">
+                      <a:noFill/>
+                    </a:lnR>
+                    <a:lnT w="12700" cmpd="sng">
+                      <a:noFill/>
+                    </a:lnT>
+                    <a:lnB w="12700" cap="flat" cmpd="sng" algn="ctr">
+                      <a:solidFill>
+                        <a:schemeClr val="tx1">
+                          <a:lumMod val="50000"/>
+                          <a:lumOff val="50000"/>
+                        </a:schemeClr>
+                      </a:solidFill>
+                      <a:prstDash val="solid"/>
+                      <a:round/>
+                      <a:headEnd type="none" w="med" len="med"/>
+                      <a:tailEnd type="none" w="med" len="med"/>
+                    </a:lnB>
+                    <a:lnTlToBr w="12700" cmpd="sng">
+                      <a:noFill/>
+                      <a:prstDash val="solid"/>
+                    </a:lnTlToBr>
+                    <a:lnBlToTr w="12700" cmpd="sng">
+                      <a:noFill/>
+                      <a:prstDash val="solid"/>
+                    </a:lnBlToTr>
+                    <a:solidFill>
+                      <a:srgbClr val="E78A35"/>
+                    </a:solidFill>
+                  </a:tcPr>
+                </a:tc>
+                <a:tc>
+                  <a:txBody>
+                    <a:bodyPr/>
+                    <a:lstStyle/>
+                    <a:p>
+                      <a:pPr algn="ctr"/>
+                      <a:r>
+                        <a:rPr kumimoji="1" lang="en-US" altLang="ja-JP" dirty="0"/>
+                        <a:t>5</a:t>
+                      </a:r>
+                      <a:r>
+                        <a:rPr kumimoji="1" lang="ja-JP" altLang="en-US" dirty="0"/>
+                        <a:t>月</a:t>
+                      </a:r>
+                    </a:p>
+                  </a:txBody>
+                  <a:tcPr>
+                    <a:lnL w="12700" cmpd="sng">
+                      <a:noFill/>
+                    </a:lnL>
+                    <a:lnR w="12700" cmpd="sng">
+                      <a:noFill/>
+                    </a:lnR>
+                    <a:lnT w="12700" cmpd="sng">
+                      <a:noFill/>
+                    </a:lnT>
+                    <a:lnB w="12700" cap="flat" cmpd="sng" algn="ctr">
+                      <a:solidFill>
+                        <a:schemeClr val="tx1">
+                          <a:lumMod val="50000"/>
+                          <a:lumOff val="50000"/>
+                        </a:schemeClr>
+                      </a:solidFill>
+                      <a:prstDash val="solid"/>
+                      <a:round/>
+                      <a:headEnd type="none" w="med" len="med"/>
+                      <a:tailEnd type="none" w="med" len="med"/>
+                    </a:lnB>
+                    <a:lnTlToBr w="12700" cmpd="sng">
+                      <a:noFill/>
+                      <a:prstDash val="solid"/>
+                    </a:lnTlToBr>
+                    <a:lnBlToTr w="12700" cmpd="sng">
+                      <a:noFill/>
+                      <a:prstDash val="solid"/>
+                    </a:lnBlToTr>
+                    <a:solidFill>
+                      <a:srgbClr val="E78A35"/>
+                    </a:solidFill>
+                  </a:tcPr>
+                </a:tc>
+                <a:tc>
+                  <a:txBody>
+                    <a:bodyPr/>
+                    <a:lstStyle/>
+                    <a:p>
+                      <a:pPr algn="ctr"/>
+                      <a:r>
+                        <a:rPr kumimoji="1" lang="en-US" altLang="ja-JP" dirty="0"/>
+                        <a:t>6</a:t>
+                      </a:r>
+                      <a:r>
+                        <a:rPr kumimoji="1" lang="ja-JP" altLang="en-US" dirty="0"/>
+                        <a:t>月</a:t>
+                      </a:r>
+                    </a:p>
+                  </a:txBody>
+                  <a:tcPr>
+                    <a:lnL w="12700" cmpd="sng">
+                      <a:noFill/>
+                    </a:lnL>
+                    <a:lnR w="12700" cmpd="sng">
+                      <a:noFill/>
+                    </a:lnR>
+                    <a:lnT w="12700" cmpd="sng">
+                      <a:noFill/>
+                    </a:lnT>
+                    <a:lnB w="12700" cap="flat" cmpd="sng" algn="ctr">
+                      <a:solidFill>
+                        <a:schemeClr val="tx1">
+                          <a:lumMod val="50000"/>
+                          <a:lumOff val="50000"/>
+                        </a:schemeClr>
+                      </a:solidFill>
+                      <a:prstDash val="solid"/>
+                      <a:round/>
+                      <a:headEnd type="none" w="med" len="med"/>
+                      <a:tailEnd type="none" w="med" len="med"/>
+                    </a:lnB>
+                    <a:lnTlToBr w="12700" cmpd="sng">
+                      <a:noFill/>
+                      <a:prstDash val="solid"/>
+                    </a:lnTlToBr>
+                    <a:lnBlToTr w="12700" cmpd="sng">
+                      <a:noFill/>
+                      <a:prstDash val="solid"/>
+                    </a:lnBlToTr>
+                    <a:solidFill>
+                      <a:srgbClr val="E78A35"/>
+                    </a:solidFill>
+                  </a:tcPr>
+                </a:tc>
+                <a:tc>
+                  <a:txBody>
+                    <a:bodyPr/>
+                    <a:lstStyle/>
+                    <a:p>
+                      <a:pPr algn="ctr"/>
+                      <a:r>
+                        <a:rPr kumimoji="1" lang="en-US" altLang="ja-JP" dirty="0"/>
+                        <a:t>7</a:t>
+                      </a:r>
+                      <a:r>
+                        <a:rPr kumimoji="1" lang="ja-JP" altLang="en-US" dirty="0"/>
+                        <a:t>月</a:t>
+                      </a:r>
+                    </a:p>
+                  </a:txBody>
+                  <a:tcPr>
+                    <a:lnL w="12700" cmpd="sng">
+                      <a:noFill/>
+                    </a:lnL>
+                    <a:lnR w="12700" cmpd="sng">
+                      <a:noFill/>
+                    </a:lnR>
+                    <a:lnT w="12700" cmpd="sng">
+                      <a:noFill/>
+                    </a:lnT>
+                    <a:lnB w="12700" cap="flat" cmpd="sng" algn="ctr">
+                      <a:solidFill>
+                        <a:schemeClr val="tx1">
+                          <a:lumMod val="50000"/>
+                          <a:lumOff val="50000"/>
+                        </a:schemeClr>
+                      </a:solidFill>
+                      <a:prstDash val="solid"/>
+                      <a:round/>
+                      <a:headEnd type="none" w="med" len="med"/>
+                      <a:tailEnd type="none" w="med" len="med"/>
+                    </a:lnB>
+                    <a:lnTlToBr w="12700" cmpd="sng">
+                      <a:noFill/>
+                      <a:prstDash val="solid"/>
+                    </a:lnTlToBr>
+                    <a:lnBlToTr w="12700" cmpd="sng">
+                      <a:noFill/>
+                      <a:prstDash val="solid"/>
+                    </a:lnBlToTr>
+                    <a:solidFill>
+                      <a:srgbClr val="E78A35"/>
+                    </a:solidFill>
+                  </a:tcPr>
+                </a:tc>
+                <a:tc>
+                  <a:txBody>
+                    <a:bodyPr/>
+                    <a:lstStyle/>
+                    <a:p>
+                      <a:pPr algn="ctr"/>
+                      <a:r>
+                        <a:rPr kumimoji="1" lang="en-US" altLang="ja-JP" dirty="0"/>
+                        <a:t>8</a:t>
+                      </a:r>
+                      <a:r>
+                        <a:rPr kumimoji="1" lang="ja-JP" altLang="en-US" dirty="0"/>
+                        <a:t>月</a:t>
+                      </a:r>
+                    </a:p>
+                  </a:txBody>
+                  <a:tcPr>
+                    <a:lnL w="12700" cmpd="sng">
+                      <a:noFill/>
+                    </a:lnL>
+                    <a:lnR w="12700" cmpd="sng">
+                      <a:noFill/>
+                    </a:lnR>
+                    <a:lnT w="12700" cmpd="sng">
+                      <a:noFill/>
+                    </a:lnT>
+                    <a:lnB w="12700" cap="flat" cmpd="sng" algn="ctr">
+                      <a:solidFill>
+                        <a:schemeClr val="tx1">
+                          <a:lumMod val="50000"/>
+                          <a:lumOff val="50000"/>
+                        </a:schemeClr>
+                      </a:solidFill>
+                      <a:prstDash val="solid"/>
+                      <a:round/>
+                      <a:headEnd type="none" w="med" len="med"/>
+                      <a:tailEnd type="none" w="med" len="med"/>
+                    </a:lnB>
+                    <a:lnTlToBr w="12700" cmpd="sng">
+                      <a:noFill/>
+                      <a:prstDash val="solid"/>
+                    </a:lnTlToBr>
+                    <a:lnBlToTr w="12700" cmpd="sng">
+                      <a:noFill/>
+                      <a:prstDash val="solid"/>
+                    </a:lnBlToTr>
+                    <a:solidFill>
+                      <a:srgbClr val="E78A35"/>
+                    </a:solidFill>
+                  </a:tcPr>
+                </a:tc>
+                <a:extLst>
+                  <a:ext uri="{0D108BD9-81ED-4DB2-BD59-A6C34878D82A}">
+                    <a16:rowId xmlns:a16="http://schemas.microsoft.com/office/drawing/2014/main" val="2787763738"/>
+                  </a:ext>
+                </a:extLst>
+              </a:tr>
+              <a:tr h="614435">
+                <a:tc>
+                  <a:txBody>
+                    <a:bodyPr/>
+                    <a:lstStyle/>
+                    <a:p>
+                      <a:pPr algn="ctr"/>
+                      <a:r>
+                        <a:rPr kumimoji="1" lang="ja-JP" altLang="en-US" dirty="0">
+                          <a:solidFill>
+                            <a:schemeClr val="bg1"/>
+                          </a:solidFill>
+                        </a:rPr>
+                        <a:t>基板設計</a:t>
+                      </a:r>
+                    </a:p>
+                  </a:txBody>
+                  <a:tcPr>
+                    <a:lnL w="12700" cmpd="sng">
+                      <a:noFill/>
+                    </a:lnL>
+                    <a:lnR w="12700" cap="flat" cmpd="sng" algn="ctr">
+                      <a:solidFill>
+                        <a:schemeClr val="tx1">
+                          <a:lumMod val="50000"/>
+                          <a:lumOff val="50000"/>
+                        </a:schemeClr>
+                      </a:solidFill>
+                      <a:prstDash val="solid"/>
+                      <a:round/>
+                      <a:headEnd type="none" w="med" len="med"/>
+                      <a:tailEnd type="none" w="med" len="med"/>
+                    </a:lnR>
+                    <a:lnT w="12700" cmpd="sng">
+                      <a:noFill/>
+                    </a:lnT>
+                    <a:lnB w="12700" cmpd="sng">
+                      <a:noFill/>
+                    </a:lnB>
+                    <a:lnTlToBr w="12700" cmpd="sng">
+                      <a:noFill/>
+                      <a:prstDash val="solid"/>
+                    </a:lnTlToBr>
+                    <a:lnBlToTr w="12700" cmpd="sng">
+                      <a:noFill/>
+                      <a:prstDash val="solid"/>
+                    </a:lnBlToTr>
+                    <a:solidFill>
+                      <a:srgbClr val="EBAE15"/>
+                    </a:solidFill>
+                  </a:tcPr>
+                </a:tc>
+                <a:tc>
+                  <a:txBody>
+                    <a:bodyPr/>
+                    <a:lstStyle/>
+                    <a:p>
+                      <a:endParaRPr kumimoji="1" lang="ja-JP" altLang="en-US" dirty="0"/>
+                    </a:p>
+                  </a:txBody>
+                  <a:tcPr>
+                    <a:lnL w="12700" cap="flat" cmpd="sng" algn="ctr">
+                      <a:solidFill>
+                        <a:schemeClr val="tx1">
+                          <a:lumMod val="50000"/>
+                          <a:lumOff val="50000"/>
+                        </a:schemeClr>
+                      </a:solidFill>
+                      <a:prstDash val="solid"/>
+                      <a:round/>
+                      <a:headEnd type="none" w="med" len="med"/>
+                      <a:tailEnd type="none" w="med" len="med"/>
+                    </a:lnL>
+                    <a:lnR w="12700" cap="flat" cmpd="sng" algn="ctr">
+                      <a:solidFill>
+                        <a:schemeClr val="tx1">
+                          <a:lumMod val="50000"/>
+                          <a:lumOff val="50000"/>
+                        </a:schemeClr>
+                      </a:solidFill>
+                      <a:prstDash val="solid"/>
+                      <a:round/>
+                      <a:headEnd type="none" w="med" len="med"/>
+                      <a:tailEnd type="none" w="med" len="med"/>
+                    </a:lnR>
+                    <a:lnT w="12700" cap="flat" cmpd="sng" algn="ctr">
+                      <a:solidFill>
+                        <a:schemeClr val="tx1">
+                          <a:lumMod val="50000"/>
+                          <a:lumOff val="50000"/>
+                        </a:schemeClr>
+                      </a:solidFill>
+                      <a:prstDash val="solid"/>
+                      <a:round/>
+                      <a:headEnd type="none" w="med" len="med"/>
+                      <a:tailEnd type="none" w="med" len="med"/>
+                    </a:lnT>
+                    <a:lnB w="12700" cap="flat" cmpd="sng" algn="ctr">
+                      <a:solidFill>
+                        <a:schemeClr val="tx1">
+                          <a:lumMod val="50000"/>
+                          <a:lumOff val="50000"/>
+                        </a:schemeClr>
+                      </a:solidFill>
+                      <a:prstDash val="solid"/>
+                      <a:round/>
+                      <a:headEnd type="none" w="med" len="med"/>
+                      <a:tailEnd type="none" w="med" len="med"/>
+                    </a:lnB>
+                    <a:lnTlToBr w="12700" cmpd="sng">
+                      <a:noFill/>
+                      <a:prstDash val="solid"/>
+                    </a:lnTlToBr>
+                    <a:lnBlToTr w="12700" cmpd="sng">
+                      <a:noFill/>
+                      <a:prstDash val="solid"/>
+                    </a:lnBlToTr>
+                    <a:solidFill>
+                      <a:schemeClr val="bg1"/>
+                    </a:solidFill>
+                  </a:tcPr>
+                </a:tc>
+                <a:tc>
+                  <a:txBody>
+                    <a:bodyPr/>
+                    <a:lstStyle/>
+                    <a:p>
+                      <a:endParaRPr kumimoji="1" lang="ja-JP" altLang="en-US" dirty="0"/>
+                    </a:p>
+                  </a:txBody>
+                  <a:tcPr>
+                    <a:lnL w="12700" cap="flat" cmpd="sng" algn="ctr">
+                      <a:solidFill>
+                        <a:schemeClr val="tx1">
+                          <a:lumMod val="50000"/>
+                          <a:lumOff val="50000"/>
+                        </a:schemeClr>
+                      </a:solidFill>
+                      <a:prstDash val="solid"/>
+                      <a:round/>
+                      <a:headEnd type="none" w="med" len="med"/>
+                      <a:tailEnd type="none" w="med" len="med"/>
+                    </a:lnL>
+                    <a:lnR w="12700" cap="flat" cmpd="sng" algn="ctr">
+                      <a:solidFill>
+                        <a:schemeClr val="tx1">
+                          <a:lumMod val="50000"/>
+                          <a:lumOff val="50000"/>
+                        </a:schemeClr>
+                      </a:solidFill>
+                      <a:prstDash val="solid"/>
+                      <a:round/>
+                      <a:headEnd type="none" w="med" len="med"/>
+                      <a:tailEnd type="none" w="med" len="med"/>
+                    </a:lnR>
+                    <a:lnT w="12700" cap="flat" cmpd="sng" algn="ctr">
+                      <a:solidFill>
+                        <a:schemeClr val="tx1">
+                          <a:lumMod val="50000"/>
+                          <a:lumOff val="50000"/>
+                        </a:schemeClr>
+                      </a:solidFill>
+                      <a:prstDash val="solid"/>
+                      <a:round/>
+                      <a:headEnd type="none" w="med" len="med"/>
+                      <a:tailEnd type="none" w="med" len="med"/>
+                    </a:lnT>
+                    <a:lnB w="12700" cap="flat" cmpd="sng" algn="ctr">
+                      <a:solidFill>
+                        <a:schemeClr val="tx1">
+                          <a:lumMod val="50000"/>
+                          <a:lumOff val="50000"/>
+                        </a:schemeClr>
+                      </a:solidFill>
+                      <a:prstDash val="solid"/>
+                      <a:round/>
+                      <a:headEnd type="none" w="med" len="med"/>
+                      <a:tailEnd type="none" w="med" len="med"/>
+                    </a:lnB>
+                    <a:lnTlToBr w="12700" cmpd="sng">
+                      <a:noFill/>
+                      <a:prstDash val="solid"/>
+                    </a:lnTlToBr>
+                    <a:lnBlToTr w="12700" cmpd="sng">
+                      <a:noFill/>
+                      <a:prstDash val="solid"/>
+                    </a:lnBlToTr>
+                    <a:solidFill>
+                      <a:schemeClr val="bg1"/>
+                    </a:solidFill>
+                  </a:tcPr>
+                </a:tc>
+                <a:tc>
+                  <a:txBody>
+                    <a:bodyPr/>
+                    <a:lstStyle/>
+                    <a:p>
+                      <a:endParaRPr kumimoji="1" lang="ja-JP" altLang="en-US" dirty="0"/>
+                    </a:p>
+                  </a:txBody>
+                  <a:tcPr>
+                    <a:lnL w="12700" cap="flat" cmpd="sng" algn="ctr">
+                      <a:solidFill>
+                        <a:schemeClr val="tx1">
+                          <a:lumMod val="50000"/>
+                          <a:lumOff val="50000"/>
+                        </a:schemeClr>
+                      </a:solidFill>
+                      <a:prstDash val="solid"/>
+                      <a:round/>
+                      <a:headEnd type="none" w="med" len="med"/>
+                      <a:tailEnd type="none" w="med" len="med"/>
+                    </a:lnL>
+                    <a:lnR w="12700" cap="flat" cmpd="sng" algn="ctr">
+                      <a:solidFill>
+                        <a:schemeClr val="tx1">
+                          <a:lumMod val="50000"/>
+                          <a:lumOff val="50000"/>
+                        </a:schemeClr>
+                      </a:solidFill>
+                      <a:prstDash val="solid"/>
+                      <a:round/>
+                      <a:headEnd type="none" w="med" len="med"/>
+                      <a:tailEnd type="none" w="med" len="med"/>
+                    </a:lnR>
+                    <a:lnT w="12700" cap="flat" cmpd="sng" algn="ctr">
+                      <a:solidFill>
+                        <a:schemeClr val="tx1">
+                          <a:lumMod val="50000"/>
+                          <a:lumOff val="50000"/>
+                        </a:schemeClr>
+                      </a:solidFill>
+                      <a:prstDash val="solid"/>
+                      <a:round/>
+                      <a:headEnd type="none" w="med" len="med"/>
+                      <a:tailEnd type="none" w="med" len="med"/>
+                    </a:lnT>
+                    <a:lnB w="12700" cap="flat" cmpd="sng" algn="ctr">
+                      <a:solidFill>
+                        <a:schemeClr val="tx1">
+                          <a:lumMod val="50000"/>
+                          <a:lumOff val="50000"/>
+                        </a:schemeClr>
+                      </a:solidFill>
+                      <a:prstDash val="solid"/>
+                      <a:round/>
+                      <a:headEnd type="none" w="med" len="med"/>
+                      <a:tailEnd type="none" w="med" len="med"/>
+                    </a:lnB>
+                    <a:lnTlToBr w="12700" cmpd="sng">
+                      <a:noFill/>
+                      <a:prstDash val="solid"/>
+                    </a:lnTlToBr>
+                    <a:lnBlToTr w="12700" cmpd="sng">
+                      <a:noFill/>
+                      <a:prstDash val="solid"/>
+                    </a:lnBlToTr>
+                    <a:solidFill>
+                      <a:schemeClr val="bg1"/>
+                    </a:solidFill>
+                  </a:tcPr>
+                </a:tc>
+                <a:tc>
+                  <a:txBody>
+                    <a:bodyPr/>
+                    <a:lstStyle/>
+                    <a:p>
+                      <a:endParaRPr kumimoji="1" lang="ja-JP" altLang="en-US" dirty="0"/>
+                    </a:p>
+                  </a:txBody>
+                  <a:tcPr>
+                    <a:lnL w="12700" cap="flat" cmpd="sng" algn="ctr">
+                      <a:solidFill>
+                        <a:schemeClr val="tx1">
+                          <a:lumMod val="50000"/>
+                          <a:lumOff val="50000"/>
+                        </a:schemeClr>
+                      </a:solidFill>
+                      <a:prstDash val="solid"/>
+                      <a:round/>
+                      <a:headEnd type="none" w="med" len="med"/>
+                      <a:tailEnd type="none" w="med" len="med"/>
+                    </a:lnL>
+                    <a:lnR w="12700" cap="flat" cmpd="sng" algn="ctr">
+                      <a:solidFill>
+                        <a:schemeClr val="tx1">
+                          <a:lumMod val="50000"/>
+                          <a:lumOff val="50000"/>
+                        </a:schemeClr>
+                      </a:solidFill>
+                      <a:prstDash val="solid"/>
+                      <a:round/>
+                      <a:headEnd type="none" w="med" len="med"/>
+                      <a:tailEnd type="none" w="med" len="med"/>
+                    </a:lnR>
+                    <a:lnT w="12700" cap="flat" cmpd="sng" algn="ctr">
+                      <a:solidFill>
+                        <a:schemeClr val="tx1">
+                          <a:lumMod val="50000"/>
+                          <a:lumOff val="50000"/>
+                        </a:schemeClr>
+                      </a:solidFill>
+                      <a:prstDash val="solid"/>
+                      <a:round/>
+                      <a:headEnd type="none" w="med" len="med"/>
+                      <a:tailEnd type="none" w="med" len="med"/>
+                    </a:lnT>
+                    <a:lnB w="12700" cap="flat" cmpd="sng" algn="ctr">
+                      <a:solidFill>
+                        <a:schemeClr val="tx1">
+                          <a:lumMod val="50000"/>
+                          <a:lumOff val="50000"/>
+                        </a:schemeClr>
+                      </a:solidFill>
+                      <a:prstDash val="solid"/>
+                      <a:round/>
+                      <a:headEnd type="none" w="med" len="med"/>
+                      <a:tailEnd type="none" w="med" len="med"/>
+                    </a:lnB>
+                    <a:lnTlToBr w="12700" cmpd="sng">
+                      <a:noFill/>
+                      <a:prstDash val="solid"/>
+                    </a:lnTlToBr>
+                    <a:lnBlToTr w="12700" cmpd="sng">
+                      <a:noFill/>
+                      <a:prstDash val="solid"/>
+                    </a:lnBlToTr>
+                    <a:solidFill>
+                      <a:schemeClr val="bg1"/>
+                    </a:solidFill>
+                  </a:tcPr>
+                </a:tc>
+                <a:tc>
+                  <a:txBody>
+                    <a:bodyPr/>
+                    <a:lstStyle/>
+                    <a:p>
+                      <a:endParaRPr kumimoji="1" lang="ja-JP" altLang="en-US" dirty="0"/>
+                    </a:p>
+                  </a:txBody>
+                  <a:tcPr>
+                    <a:lnL w="12700" cap="flat" cmpd="sng" algn="ctr">
+                      <a:solidFill>
+                        <a:schemeClr val="tx1">
+                          <a:lumMod val="50000"/>
+                          <a:lumOff val="50000"/>
+                        </a:schemeClr>
+                      </a:solidFill>
+                      <a:prstDash val="solid"/>
+                      <a:round/>
+                      <a:headEnd type="none" w="med" len="med"/>
+                      <a:tailEnd type="none" w="med" len="med"/>
+                    </a:lnL>
+                    <a:lnR w="12700" cap="flat" cmpd="sng" algn="ctr">
+                      <a:solidFill>
+                        <a:schemeClr val="tx1">
+                          <a:lumMod val="50000"/>
+                          <a:lumOff val="50000"/>
+                        </a:schemeClr>
+                      </a:solidFill>
+                      <a:prstDash val="solid"/>
+                      <a:round/>
+                      <a:headEnd type="none" w="med" len="med"/>
+                      <a:tailEnd type="none" w="med" len="med"/>
+                    </a:lnR>
+                    <a:lnT w="12700" cap="flat" cmpd="sng" algn="ctr">
+                      <a:solidFill>
+                        <a:schemeClr val="tx1">
+                          <a:lumMod val="50000"/>
+                          <a:lumOff val="50000"/>
+                        </a:schemeClr>
+                      </a:solidFill>
+                      <a:prstDash val="solid"/>
+                      <a:round/>
+                      <a:headEnd type="none" w="med" len="med"/>
+                      <a:tailEnd type="none" w="med" len="med"/>
+                    </a:lnT>
+                    <a:lnB w="12700" cap="flat" cmpd="sng" algn="ctr">
+                      <a:solidFill>
+                        <a:schemeClr val="tx1">
+                          <a:lumMod val="50000"/>
+                          <a:lumOff val="50000"/>
+                        </a:schemeClr>
+                      </a:solidFill>
+                      <a:prstDash val="solid"/>
+                      <a:round/>
+                      <a:headEnd type="none" w="med" len="med"/>
+                      <a:tailEnd type="none" w="med" len="med"/>
+                    </a:lnB>
+                    <a:lnTlToBr w="12700" cmpd="sng">
+                      <a:noFill/>
+                      <a:prstDash val="solid"/>
+                    </a:lnTlToBr>
+                    <a:lnBlToTr w="12700" cmpd="sng">
+                      <a:noFill/>
+                      <a:prstDash val="solid"/>
+                    </a:lnBlToTr>
+                    <a:solidFill>
+                      <a:schemeClr val="bg1"/>
+                    </a:solidFill>
+                  </a:tcPr>
+                </a:tc>
+                <a:tc>
+                  <a:txBody>
+                    <a:bodyPr/>
+                    <a:lstStyle/>
+                    <a:p>
+                      <a:endParaRPr kumimoji="1" lang="ja-JP" altLang="en-US" dirty="0"/>
+                    </a:p>
+                  </a:txBody>
+                  <a:tcPr>
+                    <a:lnL w="12700" cap="flat" cmpd="sng" algn="ctr">
+                      <a:solidFill>
+                        <a:schemeClr val="tx1">
+                          <a:lumMod val="50000"/>
+                          <a:lumOff val="50000"/>
+                        </a:schemeClr>
+                      </a:solidFill>
+                      <a:prstDash val="solid"/>
+                      <a:round/>
+                      <a:headEnd type="none" w="med" len="med"/>
+                      <a:tailEnd type="none" w="med" len="med"/>
+                    </a:lnL>
+                    <a:lnR w="12700" cap="flat" cmpd="sng" algn="ctr">
+                      <a:solidFill>
+                        <a:schemeClr val="tx1">
+                          <a:lumMod val="50000"/>
+                          <a:lumOff val="50000"/>
+                        </a:schemeClr>
+                      </a:solidFill>
+                      <a:prstDash val="solid"/>
+                      <a:round/>
+                      <a:headEnd type="none" w="med" len="med"/>
+                      <a:tailEnd type="none" w="med" len="med"/>
+                    </a:lnR>
+                    <a:lnT w="12700" cap="flat" cmpd="sng" algn="ctr">
+                      <a:solidFill>
+                        <a:schemeClr val="tx1">
+                          <a:lumMod val="50000"/>
+                          <a:lumOff val="50000"/>
+                        </a:schemeClr>
+                      </a:solidFill>
+                      <a:prstDash val="solid"/>
+                      <a:round/>
+                      <a:headEnd type="none" w="med" len="med"/>
+                      <a:tailEnd type="none" w="med" len="med"/>
+                    </a:lnT>
+                    <a:lnB w="12700" cap="flat" cmpd="sng" algn="ctr">
+                      <a:solidFill>
+                        <a:schemeClr val="tx1">
+                          <a:lumMod val="50000"/>
+                          <a:lumOff val="50000"/>
+                        </a:schemeClr>
+                      </a:solidFill>
+                      <a:prstDash val="solid"/>
+                      <a:round/>
+                      <a:headEnd type="none" w="med" len="med"/>
+                      <a:tailEnd type="none" w="med" len="med"/>
+                    </a:lnB>
+                    <a:lnTlToBr w="12700" cmpd="sng">
+                      <a:noFill/>
+                      <a:prstDash val="solid"/>
+                    </a:lnTlToBr>
+                    <a:lnBlToTr w="12700" cmpd="sng">
+                      <a:noFill/>
+                      <a:prstDash val="solid"/>
+                    </a:lnBlToTr>
+                    <a:solidFill>
+                      <a:schemeClr val="bg1"/>
+                    </a:solidFill>
+                  </a:tcPr>
+                </a:tc>
+                <a:tc>
+                  <a:txBody>
+                    <a:bodyPr/>
+                    <a:lstStyle/>
+                    <a:p>
+                      <a:endParaRPr kumimoji="1" lang="ja-JP" altLang="en-US" dirty="0"/>
+                    </a:p>
+                  </a:txBody>
+                  <a:tcPr>
+                    <a:lnL w="12700" cap="flat" cmpd="sng" algn="ctr">
+                      <a:solidFill>
+                        <a:schemeClr val="tx1">
+                          <a:lumMod val="50000"/>
+                          <a:lumOff val="50000"/>
+                        </a:schemeClr>
+                      </a:solidFill>
+                      <a:prstDash val="solid"/>
+                      <a:round/>
+                      <a:headEnd type="none" w="med" len="med"/>
+                      <a:tailEnd type="none" w="med" len="med"/>
+                    </a:lnL>
+                    <a:lnR w="12700" cap="flat" cmpd="sng" algn="ctr">
+                      <a:solidFill>
+                        <a:schemeClr val="tx1">
+                          <a:lumMod val="50000"/>
+                          <a:lumOff val="50000"/>
+                        </a:schemeClr>
+                      </a:solidFill>
+                      <a:prstDash val="solid"/>
+                      <a:round/>
+                      <a:headEnd type="none" w="med" len="med"/>
+                      <a:tailEnd type="none" w="med" len="med"/>
+                    </a:lnR>
+                    <a:lnT w="12700" cap="flat" cmpd="sng" algn="ctr">
+                      <a:solidFill>
+                        <a:schemeClr val="tx1">
+                          <a:lumMod val="50000"/>
+                          <a:lumOff val="50000"/>
+                        </a:schemeClr>
+                      </a:solidFill>
+                      <a:prstDash val="solid"/>
+                      <a:round/>
+                      <a:headEnd type="none" w="med" len="med"/>
+                      <a:tailEnd type="none" w="med" len="med"/>
+                    </a:lnT>
+                    <a:lnB w="12700" cap="flat" cmpd="sng" algn="ctr">
+                      <a:solidFill>
+                        <a:schemeClr val="tx1">
+                          <a:lumMod val="50000"/>
+                          <a:lumOff val="50000"/>
+                        </a:schemeClr>
+                      </a:solidFill>
+                      <a:prstDash val="solid"/>
+                      <a:round/>
+                      <a:headEnd type="none" w="med" len="med"/>
+                      <a:tailEnd type="none" w="med" len="med"/>
+                    </a:lnB>
+                    <a:lnTlToBr w="12700" cmpd="sng">
+                      <a:noFill/>
+                      <a:prstDash val="solid"/>
+                    </a:lnTlToBr>
+                    <a:lnBlToTr w="12700" cmpd="sng">
+                      <a:noFill/>
+                      <a:prstDash val="solid"/>
+                    </a:lnBlToTr>
+                    <a:solidFill>
+                      <a:schemeClr val="bg1"/>
+                    </a:solidFill>
+                  </a:tcPr>
+                </a:tc>
+                <a:tc>
+                  <a:txBody>
+                    <a:bodyPr/>
+                    <a:lstStyle/>
+                    <a:p>
+                      <a:endParaRPr kumimoji="1" lang="ja-JP" altLang="en-US" dirty="0"/>
+                    </a:p>
+                  </a:txBody>
+                  <a:tcPr>
+                    <a:lnL w="12700" cap="flat" cmpd="sng" algn="ctr">
+                      <a:solidFill>
+                        <a:schemeClr val="tx1">
+                          <a:lumMod val="50000"/>
+                          <a:lumOff val="50000"/>
+                        </a:schemeClr>
+                      </a:solidFill>
+                      <a:prstDash val="solid"/>
+                      <a:round/>
+                      <a:headEnd type="none" w="med" len="med"/>
+                      <a:tailEnd type="none" w="med" len="med"/>
+                    </a:lnL>
+                    <a:lnR w="12700" cap="flat" cmpd="sng" algn="ctr">
+                      <a:solidFill>
+                        <a:schemeClr val="tx1">
+                          <a:lumMod val="50000"/>
+                          <a:lumOff val="50000"/>
+                        </a:schemeClr>
+                      </a:solidFill>
+                      <a:prstDash val="solid"/>
+                      <a:round/>
+                      <a:headEnd type="none" w="med" len="med"/>
+                      <a:tailEnd type="none" w="med" len="med"/>
+                    </a:lnR>
+                    <a:lnT w="12700" cap="flat" cmpd="sng" algn="ctr">
+                      <a:solidFill>
+                        <a:schemeClr val="tx1">
+                          <a:lumMod val="50000"/>
+                          <a:lumOff val="50000"/>
+                        </a:schemeClr>
+                      </a:solidFill>
+                      <a:prstDash val="solid"/>
+                      <a:round/>
+                      <a:headEnd type="none" w="med" len="med"/>
+                      <a:tailEnd type="none" w="med" len="med"/>
+                    </a:lnT>
+                    <a:lnB w="12700" cap="flat" cmpd="sng" algn="ctr">
+                      <a:solidFill>
+                        <a:schemeClr val="tx1">
+                          <a:lumMod val="50000"/>
+                          <a:lumOff val="50000"/>
+                        </a:schemeClr>
+                      </a:solidFill>
+                      <a:prstDash val="solid"/>
+                      <a:round/>
+                      <a:headEnd type="none" w="med" len="med"/>
+                      <a:tailEnd type="none" w="med" len="med"/>
+                    </a:lnB>
+                    <a:lnTlToBr w="12700" cmpd="sng">
+                      <a:noFill/>
+                      <a:prstDash val="solid"/>
+                    </a:lnTlToBr>
+                    <a:lnBlToTr w="12700" cmpd="sng">
+                      <a:noFill/>
+                      <a:prstDash val="solid"/>
+                    </a:lnBlToTr>
+                    <a:solidFill>
+                      <a:schemeClr val="bg1"/>
+                    </a:solidFill>
+                  </a:tcPr>
+                </a:tc>
+                <a:extLst>
+                  <a:ext uri="{0D108BD9-81ED-4DB2-BD59-A6C34878D82A}">
+                    <a16:rowId xmlns:a16="http://schemas.microsoft.com/office/drawing/2014/main" val="1339874035"/>
+                  </a:ext>
+                </a:extLst>
+              </a:tr>
+              <a:tr h="614435">
+                <a:tc>
+                  <a:txBody>
+                    <a:bodyPr/>
+                    <a:lstStyle/>
+                    <a:p>
+                      <a:pPr algn="ctr"/>
+                      <a:r>
+                        <a:rPr kumimoji="1" lang="ja-JP" altLang="en-US" dirty="0">
+                          <a:solidFill>
+                            <a:schemeClr val="bg1"/>
+                          </a:solidFill>
+                        </a:rPr>
+                        <a:t>機体設計</a:t>
+                      </a:r>
+                    </a:p>
+                  </a:txBody>
+                  <a:tcPr>
+                    <a:lnL w="12700" cmpd="sng">
+                      <a:noFill/>
+                    </a:lnL>
+                    <a:lnR w="12700" cap="flat" cmpd="sng" algn="ctr">
+                      <a:solidFill>
+                        <a:schemeClr val="tx1">
+                          <a:lumMod val="50000"/>
+                          <a:lumOff val="50000"/>
+                        </a:schemeClr>
+                      </a:solidFill>
+                      <a:prstDash val="solid"/>
+                      <a:round/>
+                      <a:headEnd type="none" w="med" len="med"/>
+                      <a:tailEnd type="none" w="med" len="med"/>
+                    </a:lnR>
+                    <a:lnT w="12700" cmpd="sng">
+                      <a:noFill/>
+                    </a:lnT>
+                    <a:lnB w="12700" cmpd="sng">
+                      <a:noFill/>
+                    </a:lnB>
+                    <a:lnTlToBr w="12700" cmpd="sng">
+                      <a:noFill/>
+                      <a:prstDash val="solid"/>
+                    </a:lnTlToBr>
+                    <a:lnBlToTr w="12700" cmpd="sng">
+                      <a:noFill/>
+                      <a:prstDash val="solid"/>
+                    </a:lnBlToTr>
+                    <a:solidFill>
+                      <a:srgbClr val="006699"/>
+                    </a:solidFill>
+                  </a:tcPr>
+                </a:tc>
+                <a:tc>
+                  <a:txBody>
+                    <a:bodyPr/>
+                    <a:lstStyle/>
+                    <a:p>
+                      <a:endParaRPr kumimoji="1" lang="ja-JP" altLang="en-US" dirty="0"/>
+                    </a:p>
+                  </a:txBody>
+                  <a:tcPr>
+                    <a:lnL w="12700" cap="flat" cmpd="sng" algn="ctr">
+                      <a:solidFill>
+                        <a:schemeClr val="tx1">
+                          <a:lumMod val="50000"/>
+                          <a:lumOff val="50000"/>
+                        </a:schemeClr>
+                      </a:solidFill>
+                      <a:prstDash val="solid"/>
+                      <a:round/>
+                      <a:headEnd type="none" w="med" len="med"/>
+                      <a:tailEnd type="none" w="med" len="med"/>
+                    </a:lnL>
+                    <a:lnR w="12700" cap="flat" cmpd="sng" algn="ctr">
+                      <a:solidFill>
+                        <a:schemeClr val="tx1">
+                          <a:lumMod val="50000"/>
+                          <a:lumOff val="50000"/>
+                        </a:schemeClr>
+                      </a:solidFill>
+                      <a:prstDash val="solid"/>
+                      <a:round/>
+                      <a:headEnd type="none" w="med" len="med"/>
+                      <a:tailEnd type="none" w="med" len="med"/>
+                    </a:lnR>
+                    <a:lnT w="12700" cap="flat" cmpd="sng" algn="ctr">
+                      <a:solidFill>
+                        <a:schemeClr val="tx1">
+                          <a:lumMod val="50000"/>
+                          <a:lumOff val="50000"/>
+                        </a:schemeClr>
+                      </a:solidFill>
+                      <a:prstDash val="solid"/>
+                      <a:round/>
+                      <a:headEnd type="none" w="med" len="med"/>
+                      <a:tailEnd type="none" w="med" len="med"/>
+                    </a:lnT>
+                    <a:lnB w="12700" cap="flat" cmpd="sng" algn="ctr">
+                      <a:solidFill>
+                        <a:schemeClr val="tx1">
+                          <a:lumMod val="50000"/>
+                          <a:lumOff val="50000"/>
+                        </a:schemeClr>
+                      </a:solidFill>
+                      <a:prstDash val="solid"/>
+                      <a:round/>
+                      <a:headEnd type="none" w="med" len="med"/>
+                      <a:tailEnd type="none" w="med" len="med"/>
+                    </a:lnB>
+                    <a:lnTlToBr w="12700" cmpd="sng">
+                      <a:noFill/>
+                      <a:prstDash val="solid"/>
+                    </a:lnTlToBr>
+                    <a:lnBlToTr w="12700" cmpd="sng">
+                      <a:noFill/>
+                      <a:prstDash val="solid"/>
+                    </a:lnBlToTr>
+                    <a:solidFill>
+                      <a:schemeClr val="bg1"/>
+                    </a:solidFill>
+                  </a:tcPr>
+                </a:tc>
+                <a:tc>
+                  <a:txBody>
+                    <a:bodyPr/>
+                    <a:lstStyle/>
+                    <a:p>
+                      <a:endParaRPr kumimoji="1" lang="ja-JP" altLang="en-US" dirty="0"/>
+                    </a:p>
+                  </a:txBody>
+                  <a:tcPr>
+                    <a:lnL w="12700" cap="flat" cmpd="sng" algn="ctr">
+                      <a:solidFill>
+                        <a:schemeClr val="tx1">
+                          <a:lumMod val="50000"/>
+                          <a:lumOff val="50000"/>
+                        </a:schemeClr>
+                      </a:solidFill>
+                      <a:prstDash val="solid"/>
+                      <a:round/>
+                      <a:headEnd type="none" w="med" len="med"/>
+                      <a:tailEnd type="none" w="med" len="med"/>
+                    </a:lnL>
+                    <a:lnR w="12700" cap="flat" cmpd="sng" algn="ctr">
+                      <a:solidFill>
+                        <a:schemeClr val="tx1">
+                          <a:lumMod val="50000"/>
+                          <a:lumOff val="50000"/>
+                        </a:schemeClr>
+                      </a:solidFill>
+                      <a:prstDash val="solid"/>
+                      <a:round/>
+                      <a:headEnd type="none" w="med" len="med"/>
+                      <a:tailEnd type="none" w="med" len="med"/>
+                    </a:lnR>
+                    <a:lnT w="12700" cap="flat" cmpd="sng" algn="ctr">
+                      <a:solidFill>
+                        <a:schemeClr val="tx1">
+                          <a:lumMod val="50000"/>
+                          <a:lumOff val="50000"/>
+                        </a:schemeClr>
+                      </a:solidFill>
+                      <a:prstDash val="solid"/>
+                      <a:round/>
+                      <a:headEnd type="none" w="med" len="med"/>
+                      <a:tailEnd type="none" w="med" len="med"/>
+                    </a:lnT>
+                    <a:lnB w="12700" cap="flat" cmpd="sng" algn="ctr">
+                      <a:solidFill>
+                        <a:schemeClr val="tx1">
+                          <a:lumMod val="50000"/>
+                          <a:lumOff val="50000"/>
+                        </a:schemeClr>
+                      </a:solidFill>
+                      <a:prstDash val="solid"/>
+                      <a:round/>
+                      <a:headEnd type="none" w="med" len="med"/>
+                      <a:tailEnd type="none" w="med" len="med"/>
+                    </a:lnB>
+                    <a:lnTlToBr w="12700" cmpd="sng">
+                      <a:noFill/>
+                      <a:prstDash val="solid"/>
+                    </a:lnTlToBr>
+                    <a:lnBlToTr w="12700" cmpd="sng">
+                      <a:noFill/>
+                      <a:prstDash val="solid"/>
+                    </a:lnBlToTr>
+                    <a:solidFill>
+                      <a:schemeClr val="bg1"/>
+                    </a:solidFill>
+                  </a:tcPr>
+                </a:tc>
+                <a:tc>
+                  <a:txBody>
+                    <a:bodyPr/>
+                    <a:lstStyle/>
+                    <a:p>
+                      <a:endParaRPr kumimoji="1" lang="ja-JP" altLang="en-US" dirty="0"/>
+                    </a:p>
+                  </a:txBody>
+                  <a:tcPr>
+                    <a:lnL w="12700" cap="flat" cmpd="sng" algn="ctr">
+                      <a:solidFill>
+                        <a:schemeClr val="tx1">
+                          <a:lumMod val="50000"/>
+                          <a:lumOff val="50000"/>
+                        </a:schemeClr>
+                      </a:solidFill>
+                      <a:prstDash val="solid"/>
+                      <a:round/>
+                      <a:headEnd type="none" w="med" len="med"/>
+                      <a:tailEnd type="none" w="med" len="med"/>
+                    </a:lnL>
+                    <a:lnR w="12700" cap="flat" cmpd="sng" algn="ctr">
+                      <a:solidFill>
+                        <a:schemeClr val="tx1">
+                          <a:lumMod val="50000"/>
+                          <a:lumOff val="50000"/>
+                        </a:schemeClr>
+                      </a:solidFill>
+                      <a:prstDash val="solid"/>
+                      <a:round/>
+                      <a:headEnd type="none" w="med" len="med"/>
+                      <a:tailEnd type="none" w="med" len="med"/>
+                    </a:lnR>
+                    <a:lnT w="12700" cap="flat" cmpd="sng" algn="ctr">
+                      <a:solidFill>
+                        <a:schemeClr val="tx1">
+                          <a:lumMod val="50000"/>
+                          <a:lumOff val="50000"/>
+                        </a:schemeClr>
+                      </a:solidFill>
+                      <a:prstDash val="solid"/>
+                      <a:round/>
+                      <a:headEnd type="none" w="med" len="med"/>
+                      <a:tailEnd type="none" w="med" len="med"/>
+                    </a:lnT>
+                    <a:lnB w="12700" cap="flat" cmpd="sng" algn="ctr">
+                      <a:solidFill>
+                        <a:schemeClr val="tx1">
+                          <a:lumMod val="50000"/>
+                          <a:lumOff val="50000"/>
+                        </a:schemeClr>
+                      </a:solidFill>
+                      <a:prstDash val="solid"/>
+                      <a:round/>
+                      <a:headEnd type="none" w="med" len="med"/>
+                      <a:tailEnd type="none" w="med" len="med"/>
+                    </a:lnB>
+                    <a:lnTlToBr w="12700" cmpd="sng">
+                      <a:noFill/>
+                      <a:prstDash val="solid"/>
+                    </a:lnTlToBr>
+                    <a:lnBlToTr w="12700" cmpd="sng">
+                      <a:noFill/>
+                      <a:prstDash val="solid"/>
+                    </a:lnBlToTr>
+                    <a:solidFill>
+                      <a:schemeClr val="bg1"/>
+                    </a:solidFill>
+                  </a:tcPr>
+                </a:tc>
+                <a:tc>
+                  <a:txBody>
+                    <a:bodyPr/>
+                    <a:lstStyle/>
+                    <a:p>
+                      <a:endParaRPr kumimoji="1" lang="ja-JP" altLang="en-US" dirty="0"/>
+                    </a:p>
+                  </a:txBody>
+                  <a:tcPr>
+                    <a:lnL w="12700" cap="flat" cmpd="sng" algn="ctr">
+                      <a:solidFill>
+                        <a:schemeClr val="tx1">
+                          <a:lumMod val="50000"/>
+                          <a:lumOff val="50000"/>
+                        </a:schemeClr>
+                      </a:solidFill>
+                      <a:prstDash val="solid"/>
+                      <a:round/>
+                      <a:headEnd type="none" w="med" len="med"/>
+                      <a:tailEnd type="none" w="med" len="med"/>
+                    </a:lnL>
+                    <a:lnR w="12700" cap="flat" cmpd="sng" algn="ctr">
+                      <a:solidFill>
+                        <a:schemeClr val="tx1">
+                          <a:lumMod val="50000"/>
+                          <a:lumOff val="50000"/>
+                        </a:schemeClr>
+                      </a:solidFill>
+                      <a:prstDash val="solid"/>
+                      <a:round/>
+                      <a:headEnd type="none" w="med" len="med"/>
+                      <a:tailEnd type="none" w="med" len="med"/>
+                    </a:lnR>
+                    <a:lnT w="12700" cap="flat" cmpd="sng" algn="ctr">
+                      <a:solidFill>
+                        <a:schemeClr val="tx1">
+                          <a:lumMod val="50000"/>
+                          <a:lumOff val="50000"/>
+                        </a:schemeClr>
+                      </a:solidFill>
+                      <a:prstDash val="solid"/>
+                      <a:round/>
+                      <a:headEnd type="none" w="med" len="med"/>
+                      <a:tailEnd type="none" w="med" len="med"/>
+                    </a:lnT>
+                    <a:lnB w="12700" cap="flat" cmpd="sng" algn="ctr">
+                      <a:solidFill>
+                        <a:schemeClr val="tx1">
+                          <a:lumMod val="50000"/>
+                          <a:lumOff val="50000"/>
+                        </a:schemeClr>
+                      </a:solidFill>
+                      <a:prstDash val="solid"/>
+                      <a:round/>
+                      <a:headEnd type="none" w="med" len="med"/>
+                      <a:tailEnd type="none" w="med" len="med"/>
+                    </a:lnB>
+                    <a:lnTlToBr w="12700" cmpd="sng">
+                      <a:noFill/>
+                      <a:prstDash val="solid"/>
+                    </a:lnTlToBr>
+                    <a:lnBlToTr w="12700" cmpd="sng">
+                      <a:noFill/>
+                      <a:prstDash val="solid"/>
+                    </a:lnBlToTr>
+                    <a:solidFill>
+                      <a:schemeClr val="bg1"/>
+                    </a:solidFill>
+                  </a:tcPr>
+                </a:tc>
+                <a:tc>
+                  <a:txBody>
+                    <a:bodyPr/>
+                    <a:lstStyle/>
+                    <a:p>
+                      <a:endParaRPr kumimoji="1" lang="ja-JP" altLang="en-US" dirty="0"/>
+                    </a:p>
+                  </a:txBody>
+                  <a:tcPr>
+                    <a:lnL w="12700" cap="flat" cmpd="sng" algn="ctr">
+                      <a:solidFill>
+                        <a:schemeClr val="tx1">
+                          <a:lumMod val="50000"/>
+                          <a:lumOff val="50000"/>
+                        </a:schemeClr>
+                      </a:solidFill>
+                      <a:prstDash val="solid"/>
+                      <a:round/>
+                      <a:headEnd type="none" w="med" len="med"/>
+                      <a:tailEnd type="none" w="med" len="med"/>
+                    </a:lnL>
+                    <a:lnR w="12700" cap="flat" cmpd="sng" algn="ctr">
+                      <a:solidFill>
+                        <a:schemeClr val="tx1">
+                          <a:lumMod val="50000"/>
+                          <a:lumOff val="50000"/>
+                        </a:schemeClr>
+                      </a:solidFill>
+                      <a:prstDash val="solid"/>
+                      <a:round/>
+                      <a:headEnd type="none" w="med" len="med"/>
+                      <a:tailEnd type="none" w="med" len="med"/>
+                    </a:lnR>
+                    <a:lnT w="12700" cap="flat" cmpd="sng" algn="ctr">
+                      <a:solidFill>
+                        <a:schemeClr val="tx1">
+                          <a:lumMod val="50000"/>
+                          <a:lumOff val="50000"/>
+                        </a:schemeClr>
+                      </a:solidFill>
+                      <a:prstDash val="solid"/>
+                      <a:round/>
+                      <a:headEnd type="none" w="med" len="med"/>
+                      <a:tailEnd type="none" w="med" len="med"/>
+                    </a:lnT>
+                    <a:lnB w="12700" cap="flat" cmpd="sng" algn="ctr">
+                      <a:solidFill>
+                        <a:schemeClr val="tx1">
+                          <a:lumMod val="50000"/>
+                          <a:lumOff val="50000"/>
+                        </a:schemeClr>
+                      </a:solidFill>
+                      <a:prstDash val="solid"/>
+                      <a:round/>
+                      <a:headEnd type="none" w="med" len="med"/>
+                      <a:tailEnd type="none" w="med" len="med"/>
+                    </a:lnB>
+                    <a:lnTlToBr w="12700" cmpd="sng">
+                      <a:noFill/>
+                      <a:prstDash val="solid"/>
+                    </a:lnTlToBr>
+                    <a:lnBlToTr w="12700" cmpd="sng">
+                      <a:noFill/>
+                      <a:prstDash val="solid"/>
+                    </a:lnBlToTr>
+                    <a:solidFill>
+                      <a:schemeClr val="bg1"/>
+                    </a:solidFill>
+                  </a:tcPr>
+                </a:tc>
+                <a:tc>
+                  <a:txBody>
+                    <a:bodyPr/>
+                    <a:lstStyle/>
+                    <a:p>
+                      <a:endParaRPr kumimoji="1" lang="ja-JP" altLang="en-US"/>
+                    </a:p>
+                  </a:txBody>
+                  <a:tcPr>
+                    <a:lnL w="12700" cap="flat" cmpd="sng" algn="ctr">
+                      <a:solidFill>
+                        <a:schemeClr val="tx1">
+                          <a:lumMod val="50000"/>
+                          <a:lumOff val="50000"/>
+                        </a:schemeClr>
+                      </a:solidFill>
+                      <a:prstDash val="solid"/>
+                      <a:round/>
+                      <a:headEnd type="none" w="med" len="med"/>
+                      <a:tailEnd type="none" w="med" len="med"/>
+                    </a:lnL>
+                    <a:lnR w="12700" cap="flat" cmpd="sng" algn="ctr">
+                      <a:solidFill>
+                        <a:schemeClr val="tx1">
+                          <a:lumMod val="50000"/>
+                          <a:lumOff val="50000"/>
+                        </a:schemeClr>
+                      </a:solidFill>
+                      <a:prstDash val="solid"/>
+                      <a:round/>
+                      <a:headEnd type="none" w="med" len="med"/>
+                      <a:tailEnd type="none" w="med" len="med"/>
+                    </a:lnR>
+                    <a:lnT w="12700" cap="flat" cmpd="sng" algn="ctr">
+                      <a:solidFill>
+                        <a:schemeClr val="tx1">
+                          <a:lumMod val="50000"/>
+                          <a:lumOff val="50000"/>
+                        </a:schemeClr>
+                      </a:solidFill>
+                      <a:prstDash val="solid"/>
+                      <a:round/>
+                      <a:headEnd type="none" w="med" len="med"/>
+                      <a:tailEnd type="none" w="med" len="med"/>
+                    </a:lnT>
+                    <a:lnB w="12700" cap="flat" cmpd="sng" algn="ctr">
+                      <a:solidFill>
+                        <a:schemeClr val="tx1">
+                          <a:lumMod val="50000"/>
+                          <a:lumOff val="50000"/>
+                        </a:schemeClr>
+                      </a:solidFill>
+                      <a:prstDash val="solid"/>
+                      <a:round/>
+                      <a:headEnd type="none" w="med" len="med"/>
+                      <a:tailEnd type="none" w="med" len="med"/>
+                    </a:lnB>
+                    <a:lnTlToBr w="12700" cmpd="sng">
+                      <a:noFill/>
+                      <a:prstDash val="solid"/>
+                    </a:lnTlToBr>
+                    <a:lnBlToTr w="12700" cmpd="sng">
+                      <a:noFill/>
+                      <a:prstDash val="solid"/>
+                    </a:lnBlToTr>
+                    <a:solidFill>
+                      <a:schemeClr val="bg1"/>
+                    </a:solidFill>
+                  </a:tcPr>
+                </a:tc>
+                <a:tc>
+                  <a:txBody>
+                    <a:bodyPr/>
+                    <a:lstStyle/>
+                    <a:p>
+                      <a:endParaRPr kumimoji="1" lang="ja-JP" altLang="en-US"/>
+                    </a:p>
+                  </a:txBody>
+                  <a:tcPr>
+                    <a:lnL w="12700" cap="flat" cmpd="sng" algn="ctr">
+                      <a:solidFill>
+                        <a:schemeClr val="tx1">
+                          <a:lumMod val="50000"/>
+                          <a:lumOff val="50000"/>
+                        </a:schemeClr>
+                      </a:solidFill>
+                      <a:prstDash val="solid"/>
+                      <a:round/>
+                      <a:headEnd type="none" w="med" len="med"/>
+                      <a:tailEnd type="none" w="med" len="med"/>
+                    </a:lnL>
+                    <a:lnR w="12700" cap="flat" cmpd="sng" algn="ctr">
+                      <a:solidFill>
+                        <a:schemeClr val="tx1">
+                          <a:lumMod val="50000"/>
+                          <a:lumOff val="50000"/>
+                        </a:schemeClr>
+                      </a:solidFill>
+                      <a:prstDash val="solid"/>
+                      <a:round/>
+                      <a:headEnd type="none" w="med" len="med"/>
+                      <a:tailEnd type="none" w="med" len="med"/>
+                    </a:lnR>
+                    <a:lnT w="12700" cap="flat" cmpd="sng" algn="ctr">
+                      <a:solidFill>
+                        <a:schemeClr val="tx1">
+                          <a:lumMod val="50000"/>
+                          <a:lumOff val="50000"/>
+                        </a:schemeClr>
+                      </a:solidFill>
+                      <a:prstDash val="solid"/>
+                      <a:round/>
+                      <a:headEnd type="none" w="med" len="med"/>
+                      <a:tailEnd type="none" w="med" len="med"/>
+                    </a:lnT>
+                    <a:lnB w="12700" cap="flat" cmpd="sng" algn="ctr">
+                      <a:solidFill>
+                        <a:schemeClr val="tx1">
+                          <a:lumMod val="50000"/>
+                          <a:lumOff val="50000"/>
+                        </a:schemeClr>
+                      </a:solidFill>
+                      <a:prstDash val="solid"/>
+                      <a:round/>
+                      <a:headEnd type="none" w="med" len="med"/>
+                      <a:tailEnd type="none" w="med" len="med"/>
+                    </a:lnB>
+                    <a:lnTlToBr w="12700" cmpd="sng">
+                      <a:noFill/>
+                      <a:prstDash val="solid"/>
+                    </a:lnTlToBr>
+                    <a:lnBlToTr w="12700" cmpd="sng">
+                      <a:noFill/>
+                      <a:prstDash val="solid"/>
+                    </a:lnBlToTr>
+                    <a:solidFill>
+                      <a:schemeClr val="bg1"/>
+                    </a:solidFill>
+                  </a:tcPr>
+                </a:tc>
+                <a:tc>
+                  <a:txBody>
+                    <a:bodyPr/>
+                    <a:lstStyle/>
+                    <a:p>
+                      <a:endParaRPr kumimoji="1" lang="ja-JP" altLang="en-US" dirty="0"/>
+                    </a:p>
+                  </a:txBody>
+                  <a:tcPr>
+                    <a:lnL w="12700" cap="flat" cmpd="sng" algn="ctr">
+                      <a:solidFill>
+                        <a:schemeClr val="tx1">
+                          <a:lumMod val="50000"/>
+                          <a:lumOff val="50000"/>
+                        </a:schemeClr>
+                      </a:solidFill>
+                      <a:prstDash val="solid"/>
+                      <a:round/>
+                      <a:headEnd type="none" w="med" len="med"/>
+                      <a:tailEnd type="none" w="med" len="med"/>
+                    </a:lnL>
+                    <a:lnR w="12700" cap="flat" cmpd="sng" algn="ctr">
+                      <a:solidFill>
+                        <a:schemeClr val="tx1">
+                          <a:lumMod val="50000"/>
+                          <a:lumOff val="50000"/>
+                        </a:schemeClr>
+                      </a:solidFill>
+                      <a:prstDash val="solid"/>
+                      <a:round/>
+                      <a:headEnd type="none" w="med" len="med"/>
+                      <a:tailEnd type="none" w="med" len="med"/>
+                    </a:lnR>
+                    <a:lnT w="12700" cap="flat" cmpd="sng" algn="ctr">
+                      <a:solidFill>
+                        <a:schemeClr val="tx1">
+                          <a:lumMod val="50000"/>
+                          <a:lumOff val="50000"/>
+                        </a:schemeClr>
+                      </a:solidFill>
+                      <a:prstDash val="solid"/>
+                      <a:round/>
+                      <a:headEnd type="none" w="med" len="med"/>
+                      <a:tailEnd type="none" w="med" len="med"/>
+                    </a:lnT>
+                    <a:lnB w="12700" cap="flat" cmpd="sng" algn="ctr">
+                      <a:solidFill>
+                        <a:schemeClr val="tx1">
+                          <a:lumMod val="50000"/>
+                          <a:lumOff val="50000"/>
+                        </a:schemeClr>
+                      </a:solidFill>
+                      <a:prstDash val="solid"/>
+                      <a:round/>
+                      <a:headEnd type="none" w="med" len="med"/>
+                      <a:tailEnd type="none" w="med" len="med"/>
+                    </a:lnB>
+                    <a:lnTlToBr w="12700" cmpd="sng">
+                      <a:noFill/>
+                      <a:prstDash val="solid"/>
+                    </a:lnTlToBr>
+                    <a:lnBlToTr w="12700" cmpd="sng">
+                      <a:noFill/>
+                      <a:prstDash val="solid"/>
+                    </a:lnBlToTr>
+                    <a:solidFill>
+                      <a:schemeClr val="bg1"/>
+                    </a:solidFill>
+                  </a:tcPr>
+                </a:tc>
+                <a:extLst>
+                  <a:ext uri="{0D108BD9-81ED-4DB2-BD59-A6C34878D82A}">
+                    <a16:rowId xmlns:a16="http://schemas.microsoft.com/office/drawing/2014/main" val="1387061734"/>
+                  </a:ext>
+                </a:extLst>
+              </a:tr>
+              <a:tr h="614435">
+                <a:tc>
+                  <a:txBody>
+                    <a:bodyPr/>
+                    <a:lstStyle/>
+                    <a:p>
+                      <a:pPr algn="ctr"/>
+                      <a:r>
+                        <a:rPr kumimoji="1" lang="ja-JP" altLang="en-US" dirty="0">
+                          <a:solidFill>
+                            <a:schemeClr val="bg1"/>
+                          </a:solidFill>
+                        </a:rPr>
+                        <a:t>プログラム</a:t>
+                      </a:r>
+                    </a:p>
+                  </a:txBody>
+                  <a:tcPr>
+                    <a:lnL w="12700" cmpd="sng">
+                      <a:noFill/>
+                    </a:lnL>
+                    <a:lnR w="12700" cap="flat" cmpd="sng" algn="ctr">
+                      <a:solidFill>
+                        <a:schemeClr val="tx1">
+                          <a:lumMod val="50000"/>
+                          <a:lumOff val="50000"/>
+                        </a:schemeClr>
+                      </a:solidFill>
+                      <a:prstDash val="solid"/>
+                      <a:round/>
+                      <a:headEnd type="none" w="med" len="med"/>
+                      <a:tailEnd type="none" w="med" len="med"/>
+                    </a:lnR>
+                    <a:lnT w="12700" cmpd="sng">
+                      <a:noFill/>
+                    </a:lnT>
+                    <a:lnB w="12700" cmpd="sng">
+                      <a:noFill/>
+                    </a:lnB>
+                    <a:lnTlToBr w="12700" cmpd="sng">
+                      <a:noFill/>
+                      <a:prstDash val="solid"/>
+                    </a:lnTlToBr>
+                    <a:lnBlToTr w="12700" cmpd="sng">
+                      <a:noFill/>
+                      <a:prstDash val="solid"/>
+                    </a:lnBlToTr>
+                    <a:solidFill>
+                      <a:srgbClr val="AA0AB2"/>
+                    </a:solidFill>
+                  </a:tcPr>
+                </a:tc>
+                <a:tc>
+                  <a:txBody>
+                    <a:bodyPr/>
+                    <a:lstStyle/>
+                    <a:p>
+                      <a:endParaRPr kumimoji="1" lang="ja-JP" altLang="en-US" dirty="0"/>
+                    </a:p>
+                  </a:txBody>
+                  <a:tcPr>
+                    <a:lnL w="12700" cap="flat" cmpd="sng" algn="ctr">
+                      <a:solidFill>
+                        <a:schemeClr val="tx1">
+                          <a:lumMod val="50000"/>
+                          <a:lumOff val="50000"/>
+                        </a:schemeClr>
+                      </a:solidFill>
+                      <a:prstDash val="solid"/>
+                      <a:round/>
+                      <a:headEnd type="none" w="med" len="med"/>
+                      <a:tailEnd type="none" w="med" len="med"/>
+                    </a:lnL>
+                    <a:lnR w="12700" cap="flat" cmpd="sng" algn="ctr">
+                      <a:solidFill>
+                        <a:schemeClr val="tx1">
+                          <a:lumMod val="50000"/>
+                          <a:lumOff val="50000"/>
+                        </a:schemeClr>
+                      </a:solidFill>
+                      <a:prstDash val="solid"/>
+                      <a:round/>
+                      <a:headEnd type="none" w="med" len="med"/>
+                      <a:tailEnd type="none" w="med" len="med"/>
+                    </a:lnR>
+                    <a:lnT w="12700" cap="flat" cmpd="sng" algn="ctr">
+                      <a:solidFill>
+                        <a:schemeClr val="tx1">
+                          <a:lumMod val="50000"/>
+                          <a:lumOff val="50000"/>
+                        </a:schemeClr>
+                      </a:solidFill>
+                      <a:prstDash val="solid"/>
+                      <a:round/>
+                      <a:headEnd type="none" w="med" len="med"/>
+                      <a:tailEnd type="none" w="med" len="med"/>
+                    </a:lnT>
+                    <a:lnB w="12700" cap="flat" cmpd="sng" algn="ctr">
+                      <a:solidFill>
+                        <a:schemeClr val="tx1">
+                          <a:lumMod val="50000"/>
+                          <a:lumOff val="50000"/>
+                        </a:schemeClr>
+                      </a:solidFill>
+                      <a:prstDash val="solid"/>
+                      <a:round/>
+                      <a:headEnd type="none" w="med" len="med"/>
+                      <a:tailEnd type="none" w="med" len="med"/>
+                    </a:lnB>
+                    <a:lnTlToBr w="12700" cmpd="sng">
+                      <a:noFill/>
+                      <a:prstDash val="solid"/>
+                    </a:lnTlToBr>
+                    <a:lnBlToTr w="12700" cmpd="sng">
+                      <a:noFill/>
+                      <a:prstDash val="solid"/>
+                    </a:lnBlToTr>
+                    <a:solidFill>
+                      <a:schemeClr val="bg1"/>
+                    </a:solidFill>
+                  </a:tcPr>
+                </a:tc>
+                <a:tc>
+                  <a:txBody>
+                    <a:bodyPr/>
+                    <a:lstStyle/>
+                    <a:p>
+                      <a:endParaRPr kumimoji="1" lang="ja-JP" altLang="en-US" dirty="0"/>
+                    </a:p>
+                  </a:txBody>
+                  <a:tcPr>
+                    <a:lnL w="12700" cap="flat" cmpd="sng" algn="ctr">
+                      <a:solidFill>
+                        <a:schemeClr val="tx1">
+                          <a:lumMod val="50000"/>
+                          <a:lumOff val="50000"/>
+                        </a:schemeClr>
+                      </a:solidFill>
+                      <a:prstDash val="solid"/>
+                      <a:round/>
+                      <a:headEnd type="none" w="med" len="med"/>
+                      <a:tailEnd type="none" w="med" len="med"/>
+                    </a:lnL>
+                    <a:lnR w="12700" cap="flat" cmpd="sng" algn="ctr">
+                      <a:solidFill>
+                        <a:schemeClr val="tx1">
+                          <a:lumMod val="50000"/>
+                          <a:lumOff val="50000"/>
+                        </a:schemeClr>
+                      </a:solidFill>
+                      <a:prstDash val="solid"/>
+                      <a:round/>
+                      <a:headEnd type="none" w="med" len="med"/>
+                      <a:tailEnd type="none" w="med" len="med"/>
+                    </a:lnR>
+                    <a:lnT w="12700" cap="flat" cmpd="sng" algn="ctr">
+                      <a:solidFill>
+                        <a:schemeClr val="tx1">
+                          <a:lumMod val="50000"/>
+                          <a:lumOff val="50000"/>
+                        </a:schemeClr>
+                      </a:solidFill>
+                      <a:prstDash val="solid"/>
+                      <a:round/>
+                      <a:headEnd type="none" w="med" len="med"/>
+                      <a:tailEnd type="none" w="med" len="med"/>
+                    </a:lnT>
+                    <a:lnB w="12700" cap="flat" cmpd="sng" algn="ctr">
+                      <a:solidFill>
+                        <a:schemeClr val="tx1">
+                          <a:lumMod val="50000"/>
+                          <a:lumOff val="50000"/>
+                        </a:schemeClr>
+                      </a:solidFill>
+                      <a:prstDash val="solid"/>
+                      <a:round/>
+                      <a:headEnd type="none" w="med" len="med"/>
+                      <a:tailEnd type="none" w="med" len="med"/>
+                    </a:lnB>
+                    <a:lnTlToBr w="12700" cmpd="sng">
+                      <a:noFill/>
+                      <a:prstDash val="solid"/>
+                    </a:lnTlToBr>
+                    <a:lnBlToTr w="12700" cmpd="sng">
+                      <a:noFill/>
+                      <a:prstDash val="solid"/>
+                    </a:lnBlToTr>
+                    <a:solidFill>
+                      <a:schemeClr val="bg1"/>
+                    </a:solidFill>
+                  </a:tcPr>
+                </a:tc>
+                <a:tc>
+                  <a:txBody>
+                    <a:bodyPr/>
+                    <a:lstStyle/>
+                    <a:p>
+                      <a:endParaRPr kumimoji="1" lang="ja-JP" altLang="en-US" dirty="0"/>
+                    </a:p>
+                  </a:txBody>
+                  <a:tcPr>
+                    <a:lnL w="12700" cap="flat" cmpd="sng" algn="ctr">
+                      <a:solidFill>
+                        <a:schemeClr val="tx1">
+                          <a:lumMod val="50000"/>
+                          <a:lumOff val="50000"/>
+                        </a:schemeClr>
+                      </a:solidFill>
+                      <a:prstDash val="solid"/>
+                      <a:round/>
+                      <a:headEnd type="none" w="med" len="med"/>
+                      <a:tailEnd type="none" w="med" len="med"/>
+                    </a:lnL>
+                    <a:lnR w="12700" cap="flat" cmpd="sng" algn="ctr">
+                      <a:solidFill>
+                        <a:schemeClr val="tx1">
+                          <a:lumMod val="50000"/>
+                          <a:lumOff val="50000"/>
+                        </a:schemeClr>
+                      </a:solidFill>
+                      <a:prstDash val="solid"/>
+                      <a:round/>
+                      <a:headEnd type="none" w="med" len="med"/>
+                      <a:tailEnd type="none" w="med" len="med"/>
+                    </a:lnR>
+                    <a:lnT w="12700" cap="flat" cmpd="sng" algn="ctr">
+                      <a:solidFill>
+                        <a:schemeClr val="tx1">
+                          <a:lumMod val="50000"/>
+                          <a:lumOff val="50000"/>
+                        </a:schemeClr>
+                      </a:solidFill>
+                      <a:prstDash val="solid"/>
+                      <a:round/>
+                      <a:headEnd type="none" w="med" len="med"/>
+                      <a:tailEnd type="none" w="med" len="med"/>
+                    </a:lnT>
+                    <a:lnB w="12700" cap="flat" cmpd="sng" algn="ctr">
+                      <a:solidFill>
+                        <a:schemeClr val="tx1">
+                          <a:lumMod val="50000"/>
+                          <a:lumOff val="50000"/>
+                        </a:schemeClr>
+                      </a:solidFill>
+                      <a:prstDash val="solid"/>
+                      <a:round/>
+                      <a:headEnd type="none" w="med" len="med"/>
+                      <a:tailEnd type="none" w="med" len="med"/>
+                    </a:lnB>
+                    <a:lnTlToBr w="12700" cmpd="sng">
+                      <a:noFill/>
+                      <a:prstDash val="solid"/>
+                    </a:lnTlToBr>
+                    <a:lnBlToTr w="12700" cmpd="sng">
+                      <a:noFill/>
+                      <a:prstDash val="solid"/>
+                    </a:lnBlToTr>
+                    <a:solidFill>
+                      <a:schemeClr val="bg1"/>
+                    </a:solidFill>
+                  </a:tcPr>
+                </a:tc>
+                <a:tc>
+                  <a:txBody>
+                    <a:bodyPr/>
+                    <a:lstStyle/>
+                    <a:p>
+                      <a:endParaRPr kumimoji="1" lang="ja-JP" altLang="en-US" dirty="0"/>
+                    </a:p>
+                  </a:txBody>
+                  <a:tcPr>
+                    <a:lnL w="12700" cap="flat" cmpd="sng" algn="ctr">
+                      <a:solidFill>
+                        <a:schemeClr val="tx1">
+                          <a:lumMod val="50000"/>
+                          <a:lumOff val="50000"/>
+                        </a:schemeClr>
+                      </a:solidFill>
+                      <a:prstDash val="solid"/>
+                      <a:round/>
+                      <a:headEnd type="none" w="med" len="med"/>
+                      <a:tailEnd type="none" w="med" len="med"/>
+                    </a:lnL>
+                    <a:lnR w="12700" cap="flat" cmpd="sng" algn="ctr">
+                      <a:solidFill>
+                        <a:schemeClr val="tx1">
+                          <a:lumMod val="50000"/>
+                          <a:lumOff val="50000"/>
+                        </a:schemeClr>
+                      </a:solidFill>
+                      <a:prstDash val="solid"/>
+                      <a:round/>
+                      <a:headEnd type="none" w="med" len="med"/>
+                      <a:tailEnd type="none" w="med" len="med"/>
+                    </a:lnR>
+                    <a:lnT w="12700" cap="flat" cmpd="sng" algn="ctr">
+                      <a:solidFill>
+                        <a:schemeClr val="tx1">
+                          <a:lumMod val="50000"/>
+                          <a:lumOff val="50000"/>
+                        </a:schemeClr>
+                      </a:solidFill>
+                      <a:prstDash val="solid"/>
+                      <a:round/>
+                      <a:headEnd type="none" w="med" len="med"/>
+                      <a:tailEnd type="none" w="med" len="med"/>
+                    </a:lnT>
+                    <a:lnB w="12700" cap="flat" cmpd="sng" algn="ctr">
+                      <a:solidFill>
+                        <a:schemeClr val="tx1">
+                          <a:lumMod val="50000"/>
+                          <a:lumOff val="50000"/>
+                        </a:schemeClr>
+                      </a:solidFill>
+                      <a:prstDash val="solid"/>
+                      <a:round/>
+                      <a:headEnd type="none" w="med" len="med"/>
+                      <a:tailEnd type="none" w="med" len="med"/>
+                    </a:lnB>
+                    <a:lnTlToBr w="12700" cmpd="sng">
+                      <a:noFill/>
+                      <a:prstDash val="solid"/>
+                    </a:lnTlToBr>
+                    <a:lnBlToTr w="12700" cmpd="sng">
+                      <a:noFill/>
+                      <a:prstDash val="solid"/>
+                    </a:lnBlToTr>
+                    <a:solidFill>
+                      <a:schemeClr val="bg1"/>
+                    </a:solidFill>
+                  </a:tcPr>
+                </a:tc>
+                <a:tc>
+                  <a:txBody>
+                    <a:bodyPr/>
+                    <a:lstStyle/>
+                    <a:p>
+                      <a:endParaRPr kumimoji="1" lang="ja-JP" altLang="en-US" dirty="0"/>
+                    </a:p>
+                  </a:txBody>
+                  <a:tcPr>
+                    <a:lnL w="12700" cap="flat" cmpd="sng" algn="ctr">
+                      <a:solidFill>
+                        <a:schemeClr val="tx1">
+                          <a:lumMod val="50000"/>
+                          <a:lumOff val="50000"/>
+                        </a:schemeClr>
+                      </a:solidFill>
+                      <a:prstDash val="solid"/>
+                      <a:round/>
+                      <a:headEnd type="none" w="med" len="med"/>
+                      <a:tailEnd type="none" w="med" len="med"/>
+                    </a:lnL>
+                    <a:lnR w="12700" cap="flat" cmpd="sng" algn="ctr">
+                      <a:solidFill>
+                        <a:schemeClr val="tx1">
+                          <a:lumMod val="50000"/>
+                          <a:lumOff val="50000"/>
+                        </a:schemeClr>
+                      </a:solidFill>
+                      <a:prstDash val="solid"/>
+                      <a:round/>
+                      <a:headEnd type="none" w="med" len="med"/>
+                      <a:tailEnd type="none" w="med" len="med"/>
+                    </a:lnR>
+                    <a:lnT w="12700" cap="flat" cmpd="sng" algn="ctr">
+                      <a:solidFill>
+                        <a:schemeClr val="tx1">
+                          <a:lumMod val="50000"/>
+                          <a:lumOff val="50000"/>
+                        </a:schemeClr>
+                      </a:solidFill>
+                      <a:prstDash val="solid"/>
+                      <a:round/>
+                      <a:headEnd type="none" w="med" len="med"/>
+                      <a:tailEnd type="none" w="med" len="med"/>
+                    </a:lnT>
+                    <a:lnB w="12700" cap="flat" cmpd="sng" algn="ctr">
+                      <a:solidFill>
+                        <a:schemeClr val="tx1">
+                          <a:lumMod val="50000"/>
+                          <a:lumOff val="50000"/>
+                        </a:schemeClr>
+                      </a:solidFill>
+                      <a:prstDash val="solid"/>
+                      <a:round/>
+                      <a:headEnd type="none" w="med" len="med"/>
+                      <a:tailEnd type="none" w="med" len="med"/>
+                    </a:lnB>
+                    <a:lnTlToBr w="12700" cmpd="sng">
+                      <a:noFill/>
+                      <a:prstDash val="solid"/>
+                    </a:lnTlToBr>
+                    <a:lnBlToTr w="12700" cmpd="sng">
+                      <a:noFill/>
+                      <a:prstDash val="solid"/>
+                    </a:lnBlToTr>
+                    <a:solidFill>
+                      <a:schemeClr val="bg1"/>
+                    </a:solidFill>
+                  </a:tcPr>
+                </a:tc>
+                <a:tc>
+                  <a:txBody>
+                    <a:bodyPr/>
+                    <a:lstStyle/>
+                    <a:p>
+                      <a:endParaRPr kumimoji="1" lang="ja-JP" altLang="en-US" dirty="0"/>
+                    </a:p>
+                  </a:txBody>
+                  <a:tcPr>
+                    <a:lnL w="12700" cap="flat" cmpd="sng" algn="ctr">
+                      <a:solidFill>
+                        <a:schemeClr val="tx1">
+                          <a:lumMod val="50000"/>
+                          <a:lumOff val="50000"/>
+                        </a:schemeClr>
+                      </a:solidFill>
+                      <a:prstDash val="solid"/>
+                      <a:round/>
+                      <a:headEnd type="none" w="med" len="med"/>
+                      <a:tailEnd type="none" w="med" len="med"/>
+                    </a:lnL>
+                    <a:lnR w="12700" cap="flat" cmpd="sng" algn="ctr">
+                      <a:solidFill>
+                        <a:schemeClr val="tx1">
+                          <a:lumMod val="50000"/>
+                          <a:lumOff val="50000"/>
+                        </a:schemeClr>
+                      </a:solidFill>
+                      <a:prstDash val="solid"/>
+                      <a:round/>
+                      <a:headEnd type="none" w="med" len="med"/>
+                      <a:tailEnd type="none" w="med" len="med"/>
+                    </a:lnR>
+                    <a:lnT w="12700" cap="flat" cmpd="sng" algn="ctr">
+                      <a:solidFill>
+                        <a:schemeClr val="tx1">
+                          <a:lumMod val="50000"/>
+                          <a:lumOff val="50000"/>
+                        </a:schemeClr>
+                      </a:solidFill>
+                      <a:prstDash val="solid"/>
+                      <a:round/>
+                      <a:headEnd type="none" w="med" len="med"/>
+                      <a:tailEnd type="none" w="med" len="med"/>
+                    </a:lnT>
+                    <a:lnB w="12700" cap="flat" cmpd="sng" algn="ctr">
+                      <a:solidFill>
+                        <a:schemeClr val="tx1">
+                          <a:lumMod val="50000"/>
+                          <a:lumOff val="50000"/>
+                        </a:schemeClr>
+                      </a:solidFill>
+                      <a:prstDash val="solid"/>
+                      <a:round/>
+                      <a:headEnd type="none" w="med" len="med"/>
+                      <a:tailEnd type="none" w="med" len="med"/>
+                    </a:lnB>
+                    <a:lnTlToBr w="12700" cmpd="sng">
+                      <a:noFill/>
+                      <a:prstDash val="solid"/>
+                    </a:lnTlToBr>
+                    <a:lnBlToTr w="12700" cmpd="sng">
+                      <a:noFill/>
+                      <a:prstDash val="solid"/>
+                    </a:lnBlToTr>
+                    <a:solidFill>
+                      <a:schemeClr val="bg1"/>
+                    </a:solidFill>
+                  </a:tcPr>
+                </a:tc>
+                <a:tc>
+                  <a:txBody>
+                    <a:bodyPr/>
+                    <a:lstStyle/>
+                    <a:p>
+                      <a:endParaRPr kumimoji="1" lang="ja-JP" altLang="en-US" dirty="0"/>
+                    </a:p>
+                  </a:txBody>
+                  <a:tcPr>
+                    <a:lnL w="12700" cap="flat" cmpd="sng" algn="ctr">
+                      <a:solidFill>
+                        <a:schemeClr val="tx1">
+                          <a:lumMod val="50000"/>
+                          <a:lumOff val="50000"/>
+                        </a:schemeClr>
+                      </a:solidFill>
+                      <a:prstDash val="solid"/>
+                      <a:round/>
+                      <a:headEnd type="none" w="med" len="med"/>
+                      <a:tailEnd type="none" w="med" len="med"/>
+                    </a:lnL>
+                    <a:lnR w="12700" cap="flat" cmpd="sng" algn="ctr">
+                      <a:solidFill>
+                        <a:schemeClr val="tx1">
+                          <a:lumMod val="50000"/>
+                          <a:lumOff val="50000"/>
+                        </a:schemeClr>
+                      </a:solidFill>
+                      <a:prstDash val="solid"/>
+                      <a:round/>
+                      <a:headEnd type="none" w="med" len="med"/>
+                      <a:tailEnd type="none" w="med" len="med"/>
+                    </a:lnR>
+                    <a:lnT w="12700" cap="flat" cmpd="sng" algn="ctr">
+                      <a:solidFill>
+                        <a:schemeClr val="tx1">
+                          <a:lumMod val="50000"/>
+                          <a:lumOff val="50000"/>
+                        </a:schemeClr>
+                      </a:solidFill>
+                      <a:prstDash val="solid"/>
+                      <a:round/>
+                      <a:headEnd type="none" w="med" len="med"/>
+                      <a:tailEnd type="none" w="med" len="med"/>
+                    </a:lnT>
+                    <a:lnB w="12700" cap="flat" cmpd="sng" algn="ctr">
+                      <a:solidFill>
+                        <a:schemeClr val="tx1">
+                          <a:lumMod val="50000"/>
+                          <a:lumOff val="50000"/>
+                        </a:schemeClr>
+                      </a:solidFill>
+                      <a:prstDash val="solid"/>
+                      <a:round/>
+                      <a:headEnd type="none" w="med" len="med"/>
+                      <a:tailEnd type="none" w="med" len="med"/>
+                    </a:lnB>
+                    <a:lnTlToBr w="12700" cmpd="sng">
+                      <a:noFill/>
+                      <a:prstDash val="solid"/>
+                    </a:lnTlToBr>
+                    <a:lnBlToTr w="12700" cmpd="sng">
+                      <a:noFill/>
+                      <a:prstDash val="solid"/>
+                    </a:lnBlToTr>
+                    <a:solidFill>
+                      <a:schemeClr val="bg1"/>
+                    </a:solidFill>
+                  </a:tcPr>
+                </a:tc>
+                <a:tc>
+                  <a:txBody>
+                    <a:bodyPr/>
+                    <a:lstStyle/>
+                    <a:p>
+                      <a:endParaRPr kumimoji="1" lang="ja-JP" altLang="en-US" dirty="0"/>
+                    </a:p>
+                  </a:txBody>
+                  <a:tcPr>
+                    <a:lnL w="12700" cap="flat" cmpd="sng" algn="ctr">
+                      <a:solidFill>
+                        <a:schemeClr val="tx1">
+                          <a:lumMod val="50000"/>
+                          <a:lumOff val="50000"/>
+                        </a:schemeClr>
+                      </a:solidFill>
+                      <a:prstDash val="solid"/>
+                      <a:round/>
+                      <a:headEnd type="none" w="med" len="med"/>
+                      <a:tailEnd type="none" w="med" len="med"/>
+                    </a:lnL>
+                    <a:lnR w="12700" cap="flat" cmpd="sng" algn="ctr">
+                      <a:solidFill>
+                        <a:schemeClr val="tx1">
+                          <a:lumMod val="50000"/>
+                          <a:lumOff val="50000"/>
+                        </a:schemeClr>
+                      </a:solidFill>
+                      <a:prstDash val="solid"/>
+                      <a:round/>
+                      <a:headEnd type="none" w="med" len="med"/>
+                      <a:tailEnd type="none" w="med" len="med"/>
+                    </a:lnR>
+                    <a:lnT w="12700" cap="flat" cmpd="sng" algn="ctr">
+                      <a:solidFill>
+                        <a:schemeClr val="tx1">
+                          <a:lumMod val="50000"/>
+                          <a:lumOff val="50000"/>
+                        </a:schemeClr>
+                      </a:solidFill>
+                      <a:prstDash val="solid"/>
+                      <a:round/>
+                      <a:headEnd type="none" w="med" len="med"/>
+                      <a:tailEnd type="none" w="med" len="med"/>
+                    </a:lnT>
+                    <a:lnB w="12700" cap="flat" cmpd="sng" algn="ctr">
+                      <a:solidFill>
+                        <a:schemeClr val="tx1">
+                          <a:lumMod val="50000"/>
+                          <a:lumOff val="50000"/>
+                        </a:schemeClr>
+                      </a:solidFill>
+                      <a:prstDash val="solid"/>
+                      <a:round/>
+                      <a:headEnd type="none" w="med" len="med"/>
+                      <a:tailEnd type="none" w="med" len="med"/>
+                    </a:lnB>
+                    <a:lnTlToBr w="12700" cmpd="sng">
+                      <a:noFill/>
+                      <a:prstDash val="solid"/>
+                    </a:lnTlToBr>
+                    <a:lnBlToTr w="12700" cmpd="sng">
+                      <a:noFill/>
+                      <a:prstDash val="solid"/>
+                    </a:lnBlToTr>
+                    <a:solidFill>
+                      <a:schemeClr val="bg1"/>
+                    </a:solidFill>
+                  </a:tcPr>
+                </a:tc>
+                <a:extLst>
+                  <a:ext uri="{0D108BD9-81ED-4DB2-BD59-A6C34878D82A}">
+                    <a16:rowId xmlns:a16="http://schemas.microsoft.com/office/drawing/2014/main" val="2975965372"/>
+                  </a:ext>
+                </a:extLst>
+              </a:tr>
+            </a:tbl>
+          </a:graphicData>
+        </a:graphic>
+      </p:graphicFrame>
+      <p:cxnSp>
+        <p:nvCxnSpPr>
+          <p:cNvPr id="9" name="直線コネクタ 8">
+            <a:extLst>
+              <a:ext uri="{FF2B5EF4-FFF2-40B4-BE49-F238E27FC236}">
+                <a16:creationId xmlns:a16="http://schemas.microsoft.com/office/drawing/2014/main" id="{8E15DF13-D2BA-6D77-936F-FA9BEA947D4E}"/>
+              </a:ext>
+            </a:extLst>
+          </p:cNvPr>
+          <p:cNvCxnSpPr>
+            <a:cxnSpLocks/>
+          </p:cNvCxnSpPr>
+          <p:nvPr/>
+        </p:nvCxnSpPr>
+        <p:spPr>
+          <a:xfrm>
+            <a:off x="2721433" y="2214702"/>
+            <a:ext cx="1276694" cy="0"/>
+          </a:xfrm>
+          <a:prstGeom prst="line">
+            <a:avLst/>
+          </a:prstGeom>
+          <a:ln w="25400">
+            <a:solidFill>
+              <a:srgbClr val="006699"/>
+            </a:solidFill>
+            <a:headEnd type="oval"/>
+            <a:tailEnd type="oval"/>
+          </a:ln>
+        </p:spPr>
+        <p:style>
+          <a:lnRef idx="1">
+            <a:schemeClr val="accent1"/>
+          </a:lnRef>
+          <a:fillRef idx="0">
+            <a:schemeClr val="accent1"/>
+          </a:fillRef>
+          <a:effectRef idx="0">
+            <a:schemeClr val="accent1"/>
+          </a:effectRef>
+          <a:fontRef idx="minor">
+            <a:schemeClr val="tx1"/>
+          </a:fontRef>
+        </p:style>
+      </p:cxnSp>
+      <p:sp>
+        <p:nvSpPr>
+          <p:cNvPr id="10" name="テキスト ボックス 9">
+            <a:extLst>
+              <a:ext uri="{FF2B5EF4-FFF2-40B4-BE49-F238E27FC236}">
+                <a16:creationId xmlns:a16="http://schemas.microsoft.com/office/drawing/2014/main" id="{902E6503-FD41-C9C7-F93E-46221290D730}"/>
+              </a:ext>
+            </a:extLst>
+          </p:cNvPr>
+          <p:cNvSpPr txBox="1"/>
+          <p:nvPr/>
+        </p:nvSpPr>
+        <p:spPr>
+          <a:xfrm>
+            <a:off x="3998127" y="2089225"/>
+            <a:ext cx="826174" cy="246221"/>
+          </a:xfrm>
+          <a:prstGeom prst="rect">
+            <a:avLst/>
+          </a:prstGeom>
+          <a:noFill/>
+        </p:spPr>
+        <p:txBody>
+          <a:bodyPr wrap="square" rtlCol="0">
+            <a:spAutoFit/>
+          </a:bodyPr>
+          <a:lstStyle/>
+          <a:p>
+            <a:r>
+              <a:rPr lang="ja-JP" altLang="en-US" sz="1000" dirty="0"/>
+              <a:t>データ作成</a:t>
+            </a:r>
+            <a:endParaRPr kumimoji="1" lang="ja-JP" altLang="en-US" sz="1000" dirty="0"/>
+          </a:p>
+        </p:txBody>
+      </p:sp>
+      <p:cxnSp>
+        <p:nvCxnSpPr>
+          <p:cNvPr id="11" name="直線コネクタ 10">
+            <a:extLst>
+              <a:ext uri="{FF2B5EF4-FFF2-40B4-BE49-F238E27FC236}">
+                <a16:creationId xmlns:a16="http://schemas.microsoft.com/office/drawing/2014/main" id="{BB6643C9-B684-3203-5B9C-A8558B4C9656}"/>
+              </a:ext>
+            </a:extLst>
+          </p:cNvPr>
+          <p:cNvCxnSpPr>
+            <a:cxnSpLocks/>
+          </p:cNvCxnSpPr>
+          <p:nvPr/>
+        </p:nvCxnSpPr>
+        <p:spPr>
+          <a:xfrm>
+            <a:off x="2721433" y="2807970"/>
+            <a:ext cx="2973247" cy="0"/>
+          </a:xfrm>
+          <a:prstGeom prst="line">
+            <a:avLst/>
+          </a:prstGeom>
+          <a:ln w="25400">
+            <a:solidFill>
+              <a:srgbClr val="AA0AB2"/>
+            </a:solidFill>
+            <a:headEnd type="oval"/>
+            <a:tailEnd type="oval"/>
+          </a:ln>
+        </p:spPr>
+        <p:style>
+          <a:lnRef idx="1">
+            <a:schemeClr val="accent1"/>
+          </a:lnRef>
+          <a:fillRef idx="0">
+            <a:schemeClr val="accent1"/>
+          </a:fillRef>
+          <a:effectRef idx="0">
+            <a:schemeClr val="accent1"/>
+          </a:effectRef>
+          <a:fontRef idx="minor">
+            <a:schemeClr val="tx1"/>
+          </a:fontRef>
+        </p:style>
+      </p:cxnSp>
+      <p:sp>
+        <p:nvSpPr>
+          <p:cNvPr id="12" name="テキスト ボックス 11">
+            <a:extLst>
+              <a:ext uri="{FF2B5EF4-FFF2-40B4-BE49-F238E27FC236}">
+                <a16:creationId xmlns:a16="http://schemas.microsoft.com/office/drawing/2014/main" id="{E527134D-FE9C-AEE1-E746-4F50D9753194}"/>
+              </a:ext>
+            </a:extLst>
+          </p:cNvPr>
+          <p:cNvSpPr txBox="1"/>
+          <p:nvPr/>
+        </p:nvSpPr>
+        <p:spPr>
+          <a:xfrm>
+            <a:off x="3429374" y="2831588"/>
+            <a:ext cx="1137506" cy="246221"/>
+          </a:xfrm>
+          <a:prstGeom prst="rect">
+            <a:avLst/>
+          </a:prstGeom>
+          <a:noFill/>
+        </p:spPr>
+        <p:txBody>
+          <a:bodyPr wrap="square" rtlCol="0">
+            <a:spAutoFit/>
+          </a:bodyPr>
+          <a:lstStyle/>
+          <a:p>
+            <a:r>
+              <a:rPr lang="ja-JP" altLang="en-US" sz="1000" dirty="0"/>
+              <a:t>プログラム勉強</a:t>
+            </a:r>
+            <a:endParaRPr kumimoji="1" lang="ja-JP" altLang="en-US" sz="1000" dirty="0"/>
+          </a:p>
+        </p:txBody>
+      </p:sp>
+      <p:sp>
+        <p:nvSpPr>
+          <p:cNvPr id="14" name="テキスト ボックス 13">
+            <a:extLst>
+              <a:ext uri="{FF2B5EF4-FFF2-40B4-BE49-F238E27FC236}">
+                <a16:creationId xmlns:a16="http://schemas.microsoft.com/office/drawing/2014/main" id="{1AC4413A-80FE-D915-3C82-67E41F94B8C4}"/>
+              </a:ext>
+            </a:extLst>
+          </p:cNvPr>
+          <p:cNvSpPr txBox="1"/>
+          <p:nvPr/>
+        </p:nvSpPr>
+        <p:spPr>
+          <a:xfrm>
+            <a:off x="4830764" y="1661918"/>
+            <a:ext cx="704211" cy="246221"/>
+          </a:xfrm>
+          <a:prstGeom prst="rect">
+            <a:avLst/>
+          </a:prstGeom>
+          <a:noFill/>
+        </p:spPr>
+        <p:txBody>
+          <a:bodyPr wrap="square" rtlCol="0">
+            <a:spAutoFit/>
+          </a:bodyPr>
+          <a:lstStyle/>
+          <a:p>
+            <a:r>
+              <a:rPr kumimoji="1" lang="ja-JP" altLang="en-US" sz="1000" dirty="0"/>
+              <a:t>基板発注</a:t>
+            </a:r>
+            <a:endParaRPr kumimoji="1" lang="en-US" altLang="ja-JP" sz="1000" dirty="0"/>
+          </a:p>
+        </p:txBody>
+      </p:sp>
+      <p:grpSp>
+        <p:nvGrpSpPr>
+          <p:cNvPr id="5" name="グループ化 4">
+            <a:extLst>
+              <a:ext uri="{FF2B5EF4-FFF2-40B4-BE49-F238E27FC236}">
+                <a16:creationId xmlns:a16="http://schemas.microsoft.com/office/drawing/2014/main" id="{33BCD7EC-80B6-AB9A-9845-C64B2EC28E0D}"/>
+              </a:ext>
+            </a:extLst>
+          </p:cNvPr>
+          <p:cNvGrpSpPr/>
+          <p:nvPr/>
+        </p:nvGrpSpPr>
+        <p:grpSpPr>
+          <a:xfrm>
+            <a:off x="2721433" y="1475314"/>
+            <a:ext cx="2885319" cy="246221"/>
+            <a:chOff x="2918127" y="1456178"/>
+            <a:chExt cx="2885319" cy="246221"/>
+          </a:xfrm>
+        </p:grpSpPr>
+        <p:cxnSp>
+          <p:nvCxnSpPr>
+            <p:cNvPr id="6" name="直線コネクタ 5">
+              <a:extLst>
+                <a:ext uri="{FF2B5EF4-FFF2-40B4-BE49-F238E27FC236}">
+                  <a16:creationId xmlns:a16="http://schemas.microsoft.com/office/drawing/2014/main" id="{8A9F5C86-DD8D-36BE-9BF8-7CE0D630B8B4}"/>
+                </a:ext>
+              </a:extLst>
+            </p:cNvPr>
+            <p:cNvCxnSpPr>
+              <a:cxnSpLocks/>
+            </p:cNvCxnSpPr>
+            <p:nvPr/>
+          </p:nvCxnSpPr>
+          <p:spPr>
+            <a:xfrm>
+              <a:off x="2918127" y="1582420"/>
+              <a:ext cx="1953437" cy="0"/>
+            </a:xfrm>
+            <a:prstGeom prst="line">
+              <a:avLst/>
+            </a:prstGeom>
+            <a:ln w="25400">
+              <a:solidFill>
+                <a:srgbClr val="EBAE15"/>
+              </a:solidFill>
+              <a:headEnd type="oval"/>
+              <a:tailEnd type="oval"/>
+            </a:ln>
+          </p:spPr>
+          <p:style>
+            <a:lnRef idx="1">
+              <a:schemeClr val="accent1"/>
+            </a:lnRef>
+            <a:fillRef idx="0">
+              <a:schemeClr val="accent1"/>
+            </a:fillRef>
+            <a:effectRef idx="0">
+              <a:schemeClr val="accent1"/>
+            </a:effectRef>
+            <a:fontRef idx="minor">
+              <a:schemeClr val="tx1"/>
+            </a:fontRef>
+          </p:style>
+        </p:cxnSp>
+        <p:sp>
+          <p:nvSpPr>
+            <p:cNvPr id="7" name="テキスト ボックス 6">
+              <a:extLst>
+                <a:ext uri="{FF2B5EF4-FFF2-40B4-BE49-F238E27FC236}">
+                  <a16:creationId xmlns:a16="http://schemas.microsoft.com/office/drawing/2014/main" id="{CFE38C85-D562-7BD3-8B05-C2C82CD8EFC7}"/>
+                </a:ext>
+              </a:extLst>
+            </p:cNvPr>
+            <p:cNvSpPr txBox="1"/>
+            <p:nvPr/>
+          </p:nvSpPr>
+          <p:spPr>
+            <a:xfrm>
+              <a:off x="4951872" y="1456178"/>
+              <a:ext cx="851574" cy="246221"/>
+            </a:xfrm>
+            <a:prstGeom prst="rect">
+              <a:avLst/>
+            </a:prstGeom>
+            <a:noFill/>
+          </p:spPr>
+          <p:txBody>
+            <a:bodyPr wrap="square" rtlCol="0">
+              <a:spAutoFit/>
+            </a:bodyPr>
+            <a:lstStyle/>
+            <a:p>
+              <a:r>
+                <a:rPr lang="ja-JP" altLang="en-US" sz="1000" dirty="0"/>
+                <a:t>データ作成</a:t>
+              </a:r>
+              <a:endParaRPr kumimoji="1" lang="ja-JP" altLang="en-US" sz="1000" dirty="0"/>
+            </a:p>
+          </p:txBody>
+        </p:sp>
+      </p:grpSp>
+      <p:sp>
+        <p:nvSpPr>
+          <p:cNvPr id="13" name="楕円 12">
+            <a:extLst>
+              <a:ext uri="{FF2B5EF4-FFF2-40B4-BE49-F238E27FC236}">
+                <a16:creationId xmlns:a16="http://schemas.microsoft.com/office/drawing/2014/main" id="{5B47EDC7-73CD-77CC-C8F4-43FDC09B3BC9}"/>
+              </a:ext>
+            </a:extLst>
+          </p:cNvPr>
+          <p:cNvSpPr/>
+          <p:nvPr/>
+        </p:nvSpPr>
+        <p:spPr>
+          <a:xfrm>
+            <a:off x="4638870" y="1748948"/>
+            <a:ext cx="72000" cy="72000"/>
+          </a:xfrm>
+          <a:prstGeom prst="ellipse">
+            <a:avLst/>
+          </a:prstGeom>
+          <a:solidFill>
+            <a:srgbClr val="EBAE15"/>
+          </a:solidFill>
+          <a:ln w="3175">
+            <a:solidFill>
+              <a:srgbClr val="EBAE15"/>
+            </a:solidFill>
+          </a:ln>
+        </p:spPr>
+        <p:style>
+          <a:lnRef idx="2">
+            <a:schemeClr val="accent1">
+              <a:shade val="50000"/>
+            </a:schemeClr>
+          </a:lnRef>
+          <a:fillRef idx="1">
+            <a:schemeClr val="accent1"/>
+          </a:fillRef>
+          <a:effectRef idx="0">
+            <a:schemeClr val="accent1"/>
+          </a:effectRef>
+          <a:fontRef idx="minor">
+            <a:schemeClr val="lt1"/>
+          </a:fontRef>
+        </p:style>
+        <p:txBody>
+          <a:bodyPr rtlCol="0" anchor="ctr"/>
+          <a:lstStyle/>
+          <a:p>
+            <a:pPr algn="ctr"/>
+            <a:endParaRPr kumimoji="1" lang="ja-JP" altLang="en-US" dirty="0"/>
+          </a:p>
+        </p:txBody>
+      </p:sp>
+      <p:cxnSp>
+        <p:nvCxnSpPr>
+          <p:cNvPr id="15" name="直線コネクタ 14">
+            <a:extLst>
+              <a:ext uri="{FF2B5EF4-FFF2-40B4-BE49-F238E27FC236}">
+                <a16:creationId xmlns:a16="http://schemas.microsoft.com/office/drawing/2014/main" id="{3F1BD9F5-CB76-3872-3E1C-4496C2D5E670}"/>
+              </a:ext>
+            </a:extLst>
+          </p:cNvPr>
+          <p:cNvCxnSpPr>
+            <a:cxnSpLocks/>
+          </p:cNvCxnSpPr>
+          <p:nvPr/>
+        </p:nvCxnSpPr>
+        <p:spPr>
+          <a:xfrm>
+            <a:off x="4674870" y="1968501"/>
+            <a:ext cx="1016000" cy="0"/>
+          </a:xfrm>
+          <a:prstGeom prst="line">
+            <a:avLst/>
+          </a:prstGeom>
+          <a:ln w="25400">
+            <a:solidFill>
+              <a:srgbClr val="EBAE15"/>
+            </a:solidFill>
+            <a:headEnd type="oval"/>
+            <a:tailEnd type="oval"/>
+          </a:ln>
+        </p:spPr>
+        <p:style>
+          <a:lnRef idx="1">
+            <a:schemeClr val="accent1"/>
+          </a:lnRef>
+          <a:fillRef idx="0">
+            <a:schemeClr val="accent1"/>
+          </a:fillRef>
+          <a:effectRef idx="0">
+            <a:schemeClr val="accent1"/>
+          </a:effectRef>
+          <a:fontRef idx="minor">
+            <a:schemeClr val="tx1"/>
+          </a:fontRef>
+        </p:style>
+      </p:cxnSp>
+      <p:sp>
+        <p:nvSpPr>
+          <p:cNvPr id="16" name="テキスト ボックス 15">
+            <a:extLst>
+              <a:ext uri="{FF2B5EF4-FFF2-40B4-BE49-F238E27FC236}">
+                <a16:creationId xmlns:a16="http://schemas.microsoft.com/office/drawing/2014/main" id="{BC965BD9-3095-003D-05F6-717F822359DE}"/>
+              </a:ext>
+            </a:extLst>
+          </p:cNvPr>
+          <p:cNvSpPr txBox="1"/>
+          <p:nvPr/>
+        </p:nvSpPr>
+        <p:spPr>
+          <a:xfrm>
+            <a:off x="5690870" y="1840197"/>
+            <a:ext cx="951352" cy="246221"/>
+          </a:xfrm>
+          <a:prstGeom prst="rect">
+            <a:avLst/>
+          </a:prstGeom>
+          <a:noFill/>
+        </p:spPr>
+        <p:txBody>
+          <a:bodyPr wrap="square" rtlCol="0">
+            <a:spAutoFit/>
+          </a:bodyPr>
+          <a:lstStyle/>
+          <a:p>
+            <a:r>
+              <a:rPr lang="ja-JP" altLang="en-US" sz="1000" dirty="0"/>
+              <a:t>動作チェック</a:t>
+            </a:r>
+            <a:endParaRPr kumimoji="1" lang="en-US" altLang="ja-JP" sz="1000" dirty="0"/>
+          </a:p>
+        </p:txBody>
+      </p:sp>
+      <p:cxnSp>
+        <p:nvCxnSpPr>
+          <p:cNvPr id="17" name="直線コネクタ 16">
+            <a:extLst>
+              <a:ext uri="{FF2B5EF4-FFF2-40B4-BE49-F238E27FC236}">
+                <a16:creationId xmlns:a16="http://schemas.microsoft.com/office/drawing/2014/main" id="{84D444E7-3BA5-D638-D4D9-2395ACBED6E0}"/>
+              </a:ext>
+            </a:extLst>
+          </p:cNvPr>
+          <p:cNvCxnSpPr>
+            <a:cxnSpLocks/>
+          </p:cNvCxnSpPr>
+          <p:nvPr/>
+        </p:nvCxnSpPr>
+        <p:spPr>
+          <a:xfrm>
+            <a:off x="5694680" y="1601556"/>
+            <a:ext cx="3553200" cy="0"/>
+          </a:xfrm>
+          <a:prstGeom prst="line">
+            <a:avLst/>
+          </a:prstGeom>
+          <a:ln w="25400">
+            <a:solidFill>
+              <a:srgbClr val="EBAE15"/>
+            </a:solidFill>
+            <a:headEnd type="oval"/>
+            <a:tailEnd type="oval"/>
+          </a:ln>
+        </p:spPr>
+        <p:style>
+          <a:lnRef idx="1">
+            <a:schemeClr val="accent1"/>
+          </a:lnRef>
+          <a:fillRef idx="0">
+            <a:schemeClr val="accent1"/>
+          </a:fillRef>
+          <a:effectRef idx="0">
+            <a:schemeClr val="accent1"/>
+          </a:effectRef>
+          <a:fontRef idx="minor">
+            <a:schemeClr val="tx1"/>
+          </a:fontRef>
+        </p:style>
+      </p:cxnSp>
+      <p:cxnSp>
+        <p:nvCxnSpPr>
+          <p:cNvPr id="18" name="直線コネクタ 17">
+            <a:extLst>
+              <a:ext uri="{FF2B5EF4-FFF2-40B4-BE49-F238E27FC236}">
+                <a16:creationId xmlns:a16="http://schemas.microsoft.com/office/drawing/2014/main" id="{68FFC090-2367-1B16-18A5-F91C9CA89181}"/>
+              </a:ext>
+            </a:extLst>
+          </p:cNvPr>
+          <p:cNvCxnSpPr>
+            <a:cxnSpLocks/>
+          </p:cNvCxnSpPr>
+          <p:nvPr/>
+        </p:nvCxnSpPr>
+        <p:spPr>
+          <a:xfrm>
+            <a:off x="3998127" y="2406772"/>
+            <a:ext cx="1694339" cy="0"/>
+          </a:xfrm>
+          <a:prstGeom prst="line">
+            <a:avLst/>
+          </a:prstGeom>
+          <a:ln w="25400">
+            <a:solidFill>
+              <a:srgbClr val="006699"/>
+            </a:solidFill>
+            <a:headEnd type="oval"/>
+            <a:tailEnd type="oval"/>
+          </a:ln>
+        </p:spPr>
+        <p:style>
+          <a:lnRef idx="1">
+            <a:schemeClr val="accent1"/>
+          </a:lnRef>
+          <a:fillRef idx="0">
+            <a:schemeClr val="accent1"/>
+          </a:fillRef>
+          <a:effectRef idx="0">
+            <a:schemeClr val="accent1"/>
+          </a:effectRef>
+          <a:fontRef idx="minor">
+            <a:schemeClr val="tx1"/>
+          </a:fontRef>
+        </p:style>
+      </p:cxnSp>
+      <p:sp>
+        <p:nvSpPr>
+          <p:cNvPr id="19" name="テキスト ボックス 18">
+            <a:extLst>
+              <a:ext uri="{FF2B5EF4-FFF2-40B4-BE49-F238E27FC236}">
+                <a16:creationId xmlns:a16="http://schemas.microsoft.com/office/drawing/2014/main" id="{2C1D8703-DB00-8917-A632-5A8EA01BAD88}"/>
+              </a:ext>
+            </a:extLst>
+          </p:cNvPr>
+          <p:cNvSpPr txBox="1"/>
+          <p:nvPr/>
+        </p:nvSpPr>
+        <p:spPr>
+          <a:xfrm>
+            <a:off x="5690870" y="2283804"/>
+            <a:ext cx="700808" cy="246221"/>
+          </a:xfrm>
+          <a:prstGeom prst="rect">
+            <a:avLst/>
+          </a:prstGeom>
+          <a:noFill/>
+        </p:spPr>
+        <p:txBody>
+          <a:bodyPr wrap="square" rtlCol="0">
+            <a:spAutoFit/>
+          </a:bodyPr>
+          <a:lstStyle/>
+          <a:p>
+            <a:r>
+              <a:rPr kumimoji="1" lang="ja-JP" altLang="en-US" sz="1000" dirty="0"/>
+              <a:t>組み立て</a:t>
+            </a:r>
+            <a:endParaRPr kumimoji="1" lang="en-US" altLang="ja-JP" sz="1000" dirty="0"/>
+          </a:p>
+        </p:txBody>
+      </p:sp>
+      <p:cxnSp>
+        <p:nvCxnSpPr>
+          <p:cNvPr id="20" name="直線コネクタ 19">
+            <a:extLst>
+              <a:ext uri="{FF2B5EF4-FFF2-40B4-BE49-F238E27FC236}">
+                <a16:creationId xmlns:a16="http://schemas.microsoft.com/office/drawing/2014/main" id="{1FB46D52-354B-103A-55F1-F1DA894EFA2C}"/>
+              </a:ext>
+            </a:extLst>
+          </p:cNvPr>
+          <p:cNvCxnSpPr>
+            <a:cxnSpLocks/>
+          </p:cNvCxnSpPr>
+          <p:nvPr/>
+        </p:nvCxnSpPr>
+        <p:spPr>
+          <a:xfrm>
+            <a:off x="5699759" y="2598745"/>
+            <a:ext cx="3549600" cy="0"/>
+          </a:xfrm>
+          <a:prstGeom prst="line">
+            <a:avLst/>
+          </a:prstGeom>
+          <a:ln w="25400">
+            <a:solidFill>
+              <a:srgbClr val="006699"/>
+            </a:solidFill>
+            <a:headEnd type="oval"/>
+            <a:tailEnd type="oval"/>
+          </a:ln>
+        </p:spPr>
+        <p:style>
+          <a:lnRef idx="1">
+            <a:schemeClr val="accent1"/>
+          </a:lnRef>
+          <a:fillRef idx="0">
+            <a:schemeClr val="accent1"/>
+          </a:fillRef>
+          <a:effectRef idx="0">
+            <a:schemeClr val="accent1"/>
+          </a:effectRef>
+          <a:fontRef idx="minor">
+            <a:schemeClr val="tx1"/>
+          </a:fontRef>
+        </p:style>
+      </p:cxnSp>
+      <p:cxnSp>
+        <p:nvCxnSpPr>
+          <p:cNvPr id="21" name="直線コネクタ 20">
+            <a:extLst>
+              <a:ext uri="{FF2B5EF4-FFF2-40B4-BE49-F238E27FC236}">
+                <a16:creationId xmlns:a16="http://schemas.microsoft.com/office/drawing/2014/main" id="{BF9CC2BA-FD50-E0C2-C10A-14794DB68846}"/>
+              </a:ext>
+            </a:extLst>
+          </p:cNvPr>
+          <p:cNvCxnSpPr>
+            <a:cxnSpLocks/>
+          </p:cNvCxnSpPr>
+          <p:nvPr/>
+        </p:nvCxnSpPr>
+        <p:spPr>
+          <a:xfrm>
+            <a:off x="5694680" y="2954698"/>
+            <a:ext cx="1094477" cy="0"/>
+          </a:xfrm>
+          <a:prstGeom prst="line">
+            <a:avLst/>
+          </a:prstGeom>
+          <a:ln w="25400">
+            <a:solidFill>
+              <a:srgbClr val="AA0AB2"/>
+            </a:solidFill>
+            <a:headEnd type="oval"/>
+            <a:tailEnd type="oval"/>
+          </a:ln>
+        </p:spPr>
+        <p:style>
+          <a:lnRef idx="1">
+            <a:schemeClr val="accent1"/>
+          </a:lnRef>
+          <a:fillRef idx="0">
+            <a:schemeClr val="accent1"/>
+          </a:fillRef>
+          <a:effectRef idx="0">
+            <a:schemeClr val="accent1"/>
+          </a:effectRef>
+          <a:fontRef idx="minor">
+            <a:schemeClr val="tx1"/>
+          </a:fontRef>
+        </p:style>
+      </p:cxnSp>
+      <p:cxnSp>
+        <p:nvCxnSpPr>
+          <p:cNvPr id="22" name="直線コネクタ 21">
+            <a:extLst>
+              <a:ext uri="{FF2B5EF4-FFF2-40B4-BE49-F238E27FC236}">
+                <a16:creationId xmlns:a16="http://schemas.microsoft.com/office/drawing/2014/main" id="{4E3E7B05-2C20-1C2E-0310-28818A218EBB}"/>
+              </a:ext>
+            </a:extLst>
+          </p:cNvPr>
+          <p:cNvCxnSpPr>
+            <a:cxnSpLocks/>
+          </p:cNvCxnSpPr>
+          <p:nvPr/>
+        </p:nvCxnSpPr>
+        <p:spPr>
+          <a:xfrm>
+            <a:off x="6789157" y="3123723"/>
+            <a:ext cx="2456443" cy="0"/>
+          </a:xfrm>
+          <a:prstGeom prst="line">
+            <a:avLst/>
+          </a:prstGeom>
+          <a:ln w="25400">
+            <a:solidFill>
+              <a:srgbClr val="AA0AB2"/>
+            </a:solidFill>
+            <a:headEnd type="oval"/>
+            <a:tailEnd type="oval"/>
+          </a:ln>
+        </p:spPr>
+        <p:style>
+          <a:lnRef idx="1">
+            <a:schemeClr val="accent1"/>
+          </a:lnRef>
+          <a:fillRef idx="0">
+            <a:schemeClr val="accent1"/>
+          </a:fillRef>
+          <a:effectRef idx="0">
+            <a:schemeClr val="accent1"/>
+          </a:effectRef>
+          <a:fontRef idx="minor">
+            <a:schemeClr val="tx1"/>
+          </a:fontRef>
+        </p:style>
+      </p:cxnSp>
+      <p:sp>
+        <p:nvSpPr>
+          <p:cNvPr id="23" name="テキスト ボックス 22">
+            <a:extLst>
+              <a:ext uri="{FF2B5EF4-FFF2-40B4-BE49-F238E27FC236}">
+                <a16:creationId xmlns:a16="http://schemas.microsoft.com/office/drawing/2014/main" id="{5DC7459F-929F-2B8F-0341-428285BCD9F5}"/>
+              </a:ext>
+            </a:extLst>
+          </p:cNvPr>
+          <p:cNvSpPr txBox="1"/>
+          <p:nvPr/>
+        </p:nvSpPr>
+        <p:spPr>
+          <a:xfrm>
+            <a:off x="5672655" y="2967248"/>
+            <a:ext cx="1137506" cy="246221"/>
+          </a:xfrm>
+          <a:prstGeom prst="rect">
+            <a:avLst/>
+          </a:prstGeom>
+          <a:noFill/>
+        </p:spPr>
+        <p:txBody>
+          <a:bodyPr wrap="square" rtlCol="0">
+            <a:spAutoFit/>
+          </a:bodyPr>
+          <a:lstStyle/>
+          <a:p>
+            <a:r>
+              <a:rPr lang="ja-JP" altLang="en-US" sz="1000" dirty="0"/>
+              <a:t>プログラム作成</a:t>
+            </a:r>
+            <a:endParaRPr kumimoji="1" lang="ja-JP" altLang="en-US" sz="1000" dirty="0"/>
+          </a:p>
+        </p:txBody>
+      </p:sp>
+      <p:sp>
+        <p:nvSpPr>
+          <p:cNvPr id="24" name="テキスト ボックス 23">
+            <a:extLst>
+              <a:ext uri="{FF2B5EF4-FFF2-40B4-BE49-F238E27FC236}">
+                <a16:creationId xmlns:a16="http://schemas.microsoft.com/office/drawing/2014/main" id="{21C7A242-1BF4-E45B-85F9-5958B374602E}"/>
+              </a:ext>
+            </a:extLst>
+          </p:cNvPr>
+          <p:cNvSpPr txBox="1"/>
+          <p:nvPr/>
+        </p:nvSpPr>
+        <p:spPr>
+          <a:xfrm>
+            <a:off x="8803834" y="2877502"/>
+            <a:ext cx="441765" cy="246221"/>
+          </a:xfrm>
+          <a:prstGeom prst="rect">
+            <a:avLst/>
+          </a:prstGeom>
+          <a:noFill/>
+        </p:spPr>
+        <p:txBody>
+          <a:bodyPr wrap="square" rtlCol="0">
+            <a:spAutoFit/>
+          </a:bodyPr>
+          <a:lstStyle/>
+          <a:p>
+            <a:r>
+              <a:rPr kumimoji="1" lang="ja-JP" altLang="en-US" sz="1000" dirty="0"/>
+              <a:t>調整</a:t>
+            </a:r>
+          </a:p>
+        </p:txBody>
+      </p:sp>
+      <p:sp>
+        <p:nvSpPr>
+          <p:cNvPr id="25" name="テキスト ボックス 24">
+            <a:extLst>
+              <a:ext uri="{FF2B5EF4-FFF2-40B4-BE49-F238E27FC236}">
+                <a16:creationId xmlns:a16="http://schemas.microsoft.com/office/drawing/2014/main" id="{391072DD-7323-4AA1-EEBD-EE5D029FA986}"/>
+              </a:ext>
+            </a:extLst>
+          </p:cNvPr>
+          <p:cNvSpPr txBox="1"/>
+          <p:nvPr/>
+        </p:nvSpPr>
+        <p:spPr>
+          <a:xfrm>
+            <a:off x="8803835" y="2352524"/>
+            <a:ext cx="441765" cy="246221"/>
+          </a:xfrm>
+          <a:prstGeom prst="rect">
+            <a:avLst/>
+          </a:prstGeom>
+          <a:noFill/>
+        </p:spPr>
+        <p:txBody>
+          <a:bodyPr wrap="square" rtlCol="0">
+            <a:spAutoFit/>
+          </a:bodyPr>
+          <a:lstStyle/>
+          <a:p>
+            <a:r>
+              <a:rPr kumimoji="1" lang="ja-JP" altLang="en-US" sz="1000" dirty="0"/>
+              <a:t>調整</a:t>
+            </a:r>
+          </a:p>
+        </p:txBody>
+      </p:sp>
+      <p:sp>
+        <p:nvSpPr>
+          <p:cNvPr id="26" name="テキスト ボックス 25">
+            <a:extLst>
+              <a:ext uri="{FF2B5EF4-FFF2-40B4-BE49-F238E27FC236}">
+                <a16:creationId xmlns:a16="http://schemas.microsoft.com/office/drawing/2014/main" id="{29E39EC6-D1E3-1C99-8B51-9EBC7DF91212}"/>
+              </a:ext>
+            </a:extLst>
+          </p:cNvPr>
+          <p:cNvSpPr txBox="1"/>
+          <p:nvPr/>
+        </p:nvSpPr>
+        <p:spPr>
+          <a:xfrm>
+            <a:off x="8803835" y="1604813"/>
+            <a:ext cx="441765" cy="246221"/>
+          </a:xfrm>
+          <a:prstGeom prst="rect">
+            <a:avLst/>
+          </a:prstGeom>
+          <a:noFill/>
+        </p:spPr>
+        <p:txBody>
+          <a:bodyPr wrap="square" rtlCol="0">
+            <a:spAutoFit/>
+          </a:bodyPr>
+          <a:lstStyle/>
+          <a:p>
+            <a:r>
+              <a:rPr kumimoji="1" lang="ja-JP" altLang="en-US" sz="1000" dirty="0"/>
+              <a:t>調整</a:t>
+            </a:r>
+          </a:p>
+        </p:txBody>
+      </p:sp>
+    </p:spTree>
+    <p:extLst>
+      <p:ext uri="{BB962C8B-B14F-4D97-AF65-F5344CB8AC3E}">
+        <p14:creationId xmlns:p14="http://schemas.microsoft.com/office/powerpoint/2010/main" val="2685954254"/>
+      </p:ext>
+    </p:extLst>
+  </p:cSld>
+  <p:clrMapOvr>
+    <a:masterClrMapping/>
+  </p:clrMapOvr>
+</p:sld>
+</file>
+
+<file path=ppt/slides/slide3.xml><?xml version="1.0" encoding="utf-8"?>
+<p:sld xmlns:a="http://schemas.openxmlformats.org/drawingml/2006/main" xmlns:r="http://schemas.openxmlformats.org/officeDocument/2006/relationships" xmlns:p="http://schemas.openxmlformats.org/presentationml/2006/main">
+  <p:cSld>
+    <p:spTree>
+      <p:nvGrpSpPr>
+        <p:cNvPr id="1" name=""/>
+        <p:cNvGrpSpPr/>
+        <p:nvPr/>
+      </p:nvGrpSpPr>
+      <p:grpSpPr>
+        <a:xfrm>
+          <a:off x="0" y="0"/>
+          <a:ext cx="0" cy="0"/>
+          <a:chOff x="0" y="0"/>
+          <a:chExt cx="0" cy="0"/>
+        </a:xfrm>
+      </p:grpSpPr>
+      <p:graphicFrame>
+        <p:nvGraphicFramePr>
+          <p:cNvPr id="4" name="表 5">
+            <a:extLst>
+              <a:ext uri="{FF2B5EF4-FFF2-40B4-BE49-F238E27FC236}">
+                <a16:creationId xmlns:a16="http://schemas.microsoft.com/office/drawing/2014/main" id="{2ADE0E58-5B1F-C835-4C60-8621B851BDD5}"/>
+              </a:ext>
+            </a:extLst>
+          </p:cNvPr>
+          <p:cNvGraphicFramePr>
+            <a:graphicFrameLocks noGrp="1"/>
+          </p:cNvGraphicFramePr>
+          <p:nvPr>
+            <p:extLst>
+              <p:ext uri="{D42A27DB-BD31-4B8C-83A1-F6EECF244321}">
+                <p14:modId xmlns:p14="http://schemas.microsoft.com/office/powerpoint/2010/main" val="3316966908"/>
+              </p:ext>
+            </p:extLst>
+          </p:nvPr>
+        </p:nvGraphicFramePr>
+        <p:xfrm>
+          <a:off x="318053" y="984857"/>
+          <a:ext cx="4510599" cy="2337391"/>
+        </p:xfrm>
+        <a:graphic>
+          <a:graphicData uri="http://schemas.openxmlformats.org/drawingml/2006/table">
+            <a:tbl>
+              <a:tblPr>
+                <a:tableStyleId>{5C22544A-7EE6-4342-B048-85BDC9FD1C3A}</a:tableStyleId>
+              </a:tblPr>
+              <a:tblGrid>
+                <a:gridCol w="1725450">
+                  <a:extLst>
+                    <a:ext uri="{9D8B030D-6E8A-4147-A177-3AD203B41FA5}">
+                      <a16:colId xmlns:a16="http://schemas.microsoft.com/office/drawing/2014/main" val="1831953829"/>
+                    </a:ext>
+                  </a:extLst>
+                </a:gridCol>
+                <a:gridCol w="928383">
+                  <a:extLst>
+                    <a:ext uri="{9D8B030D-6E8A-4147-A177-3AD203B41FA5}">
+                      <a16:colId xmlns:a16="http://schemas.microsoft.com/office/drawing/2014/main" val="3705856040"/>
+                    </a:ext>
+                  </a:extLst>
+                </a:gridCol>
+                <a:gridCol w="928383">
+                  <a:extLst>
+                    <a:ext uri="{9D8B030D-6E8A-4147-A177-3AD203B41FA5}">
+                      <a16:colId xmlns:a16="http://schemas.microsoft.com/office/drawing/2014/main" val="359584382"/>
+                    </a:ext>
+                  </a:extLst>
+                </a:gridCol>
+                <a:gridCol w="928383">
+                  <a:extLst>
+                    <a:ext uri="{9D8B030D-6E8A-4147-A177-3AD203B41FA5}">
+                      <a16:colId xmlns:a16="http://schemas.microsoft.com/office/drawing/2014/main" val="3720535646"/>
+                    </a:ext>
+                  </a:extLst>
+                </a:gridCol>
+              </a:tblGrid>
+              <a:tr h="494086">
+                <a:tc>
+                  <a:txBody>
+                    <a:bodyPr/>
+                    <a:lstStyle/>
+                    <a:p>
+                      <a:pPr algn="ctr"/>
+                      <a:r>
+                        <a:rPr kumimoji="1" lang="ja-JP" altLang="en-US" dirty="0">
+                          <a:solidFill>
+                            <a:schemeClr val="bg1"/>
+                          </a:solidFill>
+                        </a:rPr>
+                        <a:t>スケジュール</a:t>
+                      </a:r>
+                    </a:p>
+                  </a:txBody>
+                  <a:tcPr>
+                    <a:lnL w="12700" cmpd="sng">
+                      <a:noFill/>
+                    </a:lnL>
+                    <a:lnR w="12700" cmpd="sng">
+                      <a:noFill/>
+                    </a:lnR>
+                    <a:lnT w="12700" cmpd="sng">
+                      <a:noFill/>
+                    </a:lnT>
+                    <a:lnB w="12700" cmpd="sng">
+                      <a:noFill/>
+                    </a:lnB>
+                    <a:lnTlToBr w="12700" cmpd="sng">
+                      <a:noFill/>
+                      <a:prstDash val="solid"/>
+                    </a:lnTlToBr>
+                    <a:lnBlToTr w="12700" cmpd="sng">
+                      <a:noFill/>
+                      <a:prstDash val="solid"/>
+                    </a:lnBlToTr>
+                    <a:solidFill>
+                      <a:srgbClr val="003366"/>
+                    </a:solidFill>
+                  </a:tcPr>
+                </a:tc>
+                <a:tc>
+                  <a:txBody>
+                    <a:bodyPr/>
+                    <a:lstStyle/>
+                    <a:p>
+                      <a:pPr algn="ctr"/>
+                      <a:r>
+                        <a:rPr kumimoji="1" lang="en-US" altLang="ja-JP" dirty="0"/>
+                        <a:t>9</a:t>
+                      </a:r>
+                      <a:r>
+                        <a:rPr kumimoji="1" lang="ja-JP" altLang="en-US" dirty="0"/>
+                        <a:t>月</a:t>
+                      </a:r>
+                    </a:p>
+                  </a:txBody>
+                  <a:tcPr>
+                    <a:lnL w="12700" cmpd="sng">
+                      <a:noFill/>
+                    </a:lnL>
+                    <a:lnR w="12700" cmpd="sng">
+                      <a:noFill/>
+                    </a:lnR>
+                    <a:lnT w="12700" cap="flat" cmpd="sng" algn="ctr">
+                      <a:solidFill>
+                        <a:schemeClr val="tx1">
+                          <a:lumMod val="50000"/>
+                          <a:lumOff val="50000"/>
+                        </a:schemeClr>
+                      </a:solidFill>
+                      <a:prstDash val="solid"/>
+                      <a:round/>
+                      <a:headEnd type="none" w="med" len="med"/>
+                      <a:tailEnd type="none" w="med" len="med"/>
+                    </a:lnT>
+                    <a:lnB w="12700" cap="flat" cmpd="sng" algn="ctr">
+                      <a:solidFill>
+                        <a:schemeClr val="tx1">
+                          <a:lumMod val="50000"/>
+                          <a:lumOff val="50000"/>
+                        </a:schemeClr>
+                      </a:solidFill>
+                      <a:prstDash val="solid"/>
+                      <a:round/>
+                      <a:headEnd type="none" w="med" len="med"/>
+                      <a:tailEnd type="none" w="med" len="med"/>
+                    </a:lnB>
+                    <a:lnTlToBr w="12700" cmpd="sng">
+                      <a:noFill/>
+                      <a:prstDash val="solid"/>
+                    </a:lnTlToBr>
+                    <a:lnBlToTr w="12700" cmpd="sng">
+                      <a:noFill/>
+                      <a:prstDash val="solid"/>
+                    </a:lnBlToTr>
+                    <a:solidFill>
+                      <a:srgbClr val="E78A35"/>
+                    </a:solidFill>
+                  </a:tcPr>
+                </a:tc>
+                <a:tc>
+                  <a:txBody>
+                    <a:bodyPr/>
+                    <a:lstStyle/>
+                    <a:p>
+                      <a:pPr algn="ctr"/>
+                      <a:r>
+                        <a:rPr kumimoji="1" lang="en-US" altLang="ja-JP" dirty="0"/>
+                        <a:t>10</a:t>
+                      </a:r>
+                      <a:r>
+                        <a:rPr kumimoji="1" lang="ja-JP" altLang="en-US" dirty="0"/>
+                        <a:t>月</a:t>
+                      </a:r>
+                    </a:p>
+                  </a:txBody>
+                  <a:tcPr>
+                    <a:lnL w="12700" cmpd="sng">
+                      <a:noFill/>
+                    </a:lnL>
+                    <a:lnR w="12700" cmpd="sng">
+                      <a:noFill/>
+                    </a:lnR>
+                    <a:lnT w="12700" cap="flat" cmpd="sng" algn="ctr">
+                      <a:solidFill>
+                        <a:schemeClr val="tx1">
+                          <a:lumMod val="50000"/>
+                          <a:lumOff val="50000"/>
+                        </a:schemeClr>
+                      </a:solidFill>
+                      <a:prstDash val="solid"/>
+                      <a:round/>
+                      <a:headEnd type="none" w="med" len="med"/>
+                      <a:tailEnd type="none" w="med" len="med"/>
+                    </a:lnT>
+                    <a:lnB w="12700" cap="flat" cmpd="sng" algn="ctr">
+                      <a:solidFill>
+                        <a:schemeClr val="tx1">
+                          <a:lumMod val="50000"/>
+                          <a:lumOff val="50000"/>
+                        </a:schemeClr>
+                      </a:solidFill>
+                      <a:prstDash val="solid"/>
+                      <a:round/>
+                      <a:headEnd type="none" w="med" len="med"/>
+                      <a:tailEnd type="none" w="med" len="med"/>
+                    </a:lnB>
+                    <a:lnTlToBr w="12700" cmpd="sng">
+                      <a:noFill/>
+                      <a:prstDash val="solid"/>
+                    </a:lnTlToBr>
+                    <a:lnBlToTr w="12700" cmpd="sng">
+                      <a:noFill/>
+                      <a:prstDash val="solid"/>
+                    </a:lnBlToTr>
+                    <a:solidFill>
+                      <a:srgbClr val="E78A35"/>
+                    </a:solidFill>
+                  </a:tcPr>
+                </a:tc>
+                <a:tc>
+                  <a:txBody>
+                    <a:bodyPr/>
+                    <a:lstStyle/>
+                    <a:p>
+                      <a:pPr algn="ctr"/>
+                      <a:r>
+                        <a:rPr kumimoji="1" lang="en-US" altLang="ja-JP" dirty="0"/>
+                        <a:t>11</a:t>
+                      </a:r>
+                      <a:r>
+                        <a:rPr kumimoji="1" lang="ja-JP" altLang="en-US" dirty="0"/>
+                        <a:t>月</a:t>
+                      </a:r>
+                    </a:p>
+                  </a:txBody>
+                  <a:tcPr>
+                    <a:lnL w="12700" cmpd="sng">
+                      <a:noFill/>
+                    </a:lnL>
+                    <a:lnR w="12700" cmpd="sng">
+                      <a:noFill/>
+                    </a:lnR>
+                    <a:lnT w="12700" cap="flat" cmpd="sng" algn="ctr">
+                      <a:solidFill>
+                        <a:schemeClr val="tx1">
+                          <a:lumMod val="50000"/>
+                          <a:lumOff val="50000"/>
+                        </a:schemeClr>
+                      </a:solidFill>
+                      <a:prstDash val="solid"/>
+                      <a:round/>
+                      <a:headEnd type="none" w="med" len="med"/>
+                      <a:tailEnd type="none" w="med" len="med"/>
+                    </a:lnT>
+                    <a:lnB w="12700" cap="flat" cmpd="sng" algn="ctr">
+                      <a:solidFill>
+                        <a:schemeClr val="tx1">
+                          <a:lumMod val="50000"/>
+                          <a:lumOff val="50000"/>
+                        </a:schemeClr>
+                      </a:solidFill>
+                      <a:prstDash val="solid"/>
+                      <a:round/>
+                      <a:headEnd type="none" w="med" len="med"/>
+                      <a:tailEnd type="none" w="med" len="med"/>
+                    </a:lnB>
+                    <a:lnTlToBr w="12700" cmpd="sng">
+                      <a:noFill/>
+                      <a:prstDash val="solid"/>
+                    </a:lnTlToBr>
+                    <a:lnBlToTr w="12700" cmpd="sng">
+                      <a:noFill/>
+                      <a:prstDash val="solid"/>
+                    </a:lnBlToTr>
+                    <a:solidFill>
+                      <a:srgbClr val="E78A35"/>
+                    </a:solidFill>
+                  </a:tcPr>
+                </a:tc>
+                <a:extLst>
+                  <a:ext uri="{0D108BD9-81ED-4DB2-BD59-A6C34878D82A}">
+                    <a16:rowId xmlns:a16="http://schemas.microsoft.com/office/drawing/2014/main" val="2787763738"/>
+                  </a:ext>
+                </a:extLst>
+              </a:tr>
+              <a:tr h="614435">
+                <a:tc>
+                  <a:txBody>
+                    <a:bodyPr/>
+                    <a:lstStyle/>
+                    <a:p>
+                      <a:pPr algn="ctr"/>
+                      <a:r>
+                        <a:rPr kumimoji="1" lang="ja-JP" altLang="en-US" dirty="0">
+                          <a:solidFill>
+                            <a:schemeClr val="bg1"/>
+                          </a:solidFill>
+                        </a:rPr>
+                        <a:t>基板設計</a:t>
+                      </a:r>
+                    </a:p>
+                  </a:txBody>
+                  <a:tcPr>
+                    <a:lnL w="12700" cmpd="sng">
+                      <a:noFill/>
+                    </a:lnL>
+                    <a:lnR w="12700" cap="flat" cmpd="sng" algn="ctr">
+                      <a:solidFill>
+                        <a:schemeClr val="tx1">
+                          <a:lumMod val="50000"/>
+                          <a:lumOff val="50000"/>
+                        </a:schemeClr>
+                      </a:solidFill>
+                      <a:prstDash val="solid"/>
+                      <a:round/>
+                      <a:headEnd type="none" w="med" len="med"/>
+                      <a:tailEnd type="none" w="med" len="med"/>
+                    </a:lnR>
+                    <a:lnT w="12700" cmpd="sng">
+                      <a:noFill/>
+                    </a:lnT>
+                    <a:lnB w="12700" cmpd="sng">
+                      <a:noFill/>
+                    </a:lnB>
+                    <a:lnTlToBr w="12700" cmpd="sng">
+                      <a:noFill/>
+                      <a:prstDash val="solid"/>
+                    </a:lnTlToBr>
+                    <a:lnBlToTr w="12700" cmpd="sng">
+                      <a:noFill/>
+                      <a:prstDash val="solid"/>
+                    </a:lnBlToTr>
+                    <a:solidFill>
+                      <a:srgbClr val="EBAE15"/>
+                    </a:solidFill>
+                  </a:tcPr>
+                </a:tc>
+                <a:tc>
+                  <a:txBody>
+                    <a:bodyPr/>
+                    <a:lstStyle/>
+                    <a:p>
+                      <a:endParaRPr kumimoji="1" lang="ja-JP" altLang="en-US" dirty="0"/>
+                    </a:p>
+                  </a:txBody>
+                  <a:tcPr>
+                    <a:lnL w="12700" cap="flat" cmpd="sng" algn="ctr">
+                      <a:solidFill>
+                        <a:schemeClr val="tx1">
+                          <a:lumMod val="50000"/>
+                          <a:lumOff val="50000"/>
+                        </a:schemeClr>
+                      </a:solidFill>
+                      <a:prstDash val="solid"/>
+                      <a:round/>
+                      <a:headEnd type="none" w="med" len="med"/>
+                      <a:tailEnd type="none" w="med" len="med"/>
+                    </a:lnL>
+                    <a:lnR w="12700" cap="flat" cmpd="sng" algn="ctr">
+                      <a:solidFill>
+                        <a:schemeClr val="tx1">
+                          <a:lumMod val="50000"/>
+                          <a:lumOff val="50000"/>
+                        </a:schemeClr>
+                      </a:solidFill>
+                      <a:prstDash val="solid"/>
+                      <a:round/>
+                      <a:headEnd type="none" w="med" len="med"/>
+                      <a:tailEnd type="none" w="med" len="med"/>
+                    </a:lnR>
+                    <a:lnT w="12700" cap="flat" cmpd="sng" algn="ctr">
+                      <a:solidFill>
+                        <a:schemeClr val="tx1">
+                          <a:lumMod val="50000"/>
+                          <a:lumOff val="50000"/>
+                        </a:schemeClr>
+                      </a:solidFill>
+                      <a:prstDash val="solid"/>
+                      <a:round/>
+                      <a:headEnd type="none" w="med" len="med"/>
+                      <a:tailEnd type="none" w="med" len="med"/>
+                    </a:lnT>
+                    <a:lnB w="12700" cap="flat" cmpd="sng" algn="ctr">
+                      <a:solidFill>
+                        <a:schemeClr val="tx1">
+                          <a:lumMod val="50000"/>
+                          <a:lumOff val="50000"/>
+                        </a:schemeClr>
+                      </a:solidFill>
+                      <a:prstDash val="solid"/>
+                      <a:round/>
+                      <a:headEnd type="none" w="med" len="med"/>
+                      <a:tailEnd type="none" w="med" len="med"/>
+                    </a:lnB>
+                    <a:lnTlToBr w="12700" cmpd="sng">
+                      <a:noFill/>
+                      <a:prstDash val="solid"/>
+                    </a:lnTlToBr>
+                    <a:lnBlToTr w="12700" cmpd="sng">
+                      <a:noFill/>
+                      <a:prstDash val="solid"/>
+                    </a:lnBlToTr>
+                    <a:solidFill>
+                      <a:schemeClr val="bg1"/>
+                    </a:solidFill>
+                  </a:tcPr>
+                </a:tc>
+                <a:tc>
+                  <a:txBody>
+                    <a:bodyPr/>
+                    <a:lstStyle/>
+                    <a:p>
+                      <a:endParaRPr kumimoji="1" lang="ja-JP" altLang="en-US" dirty="0"/>
+                    </a:p>
+                  </a:txBody>
+                  <a:tcPr>
+                    <a:lnL w="12700" cap="flat" cmpd="sng" algn="ctr">
+                      <a:solidFill>
+                        <a:schemeClr val="tx1">
+                          <a:lumMod val="50000"/>
+                          <a:lumOff val="50000"/>
+                        </a:schemeClr>
+                      </a:solidFill>
+                      <a:prstDash val="solid"/>
+                      <a:round/>
+                      <a:headEnd type="none" w="med" len="med"/>
+                      <a:tailEnd type="none" w="med" len="med"/>
+                    </a:lnL>
+                    <a:lnR w="12700" cap="flat" cmpd="sng" algn="ctr">
+                      <a:solidFill>
+                        <a:schemeClr val="tx1">
+                          <a:lumMod val="50000"/>
+                          <a:lumOff val="50000"/>
+                        </a:schemeClr>
+                      </a:solidFill>
+                      <a:prstDash val="solid"/>
+                      <a:round/>
+                      <a:headEnd type="none" w="med" len="med"/>
+                      <a:tailEnd type="none" w="med" len="med"/>
+                    </a:lnR>
+                    <a:lnT w="12700" cap="flat" cmpd="sng" algn="ctr">
+                      <a:solidFill>
+                        <a:schemeClr val="tx1">
+                          <a:lumMod val="50000"/>
+                          <a:lumOff val="50000"/>
+                        </a:schemeClr>
+                      </a:solidFill>
+                      <a:prstDash val="solid"/>
+                      <a:round/>
+                      <a:headEnd type="none" w="med" len="med"/>
+                      <a:tailEnd type="none" w="med" len="med"/>
+                    </a:lnT>
+                    <a:lnB w="12700" cap="flat" cmpd="sng" algn="ctr">
+                      <a:solidFill>
+                        <a:schemeClr val="tx1">
+                          <a:lumMod val="50000"/>
+                          <a:lumOff val="50000"/>
+                        </a:schemeClr>
+                      </a:solidFill>
+                      <a:prstDash val="solid"/>
+                      <a:round/>
+                      <a:headEnd type="none" w="med" len="med"/>
+                      <a:tailEnd type="none" w="med" len="med"/>
+                    </a:lnB>
+                    <a:lnTlToBr w="12700" cmpd="sng">
+                      <a:noFill/>
+                      <a:prstDash val="solid"/>
+                    </a:lnTlToBr>
+                    <a:lnBlToTr w="12700" cmpd="sng">
+                      <a:noFill/>
+                      <a:prstDash val="solid"/>
+                    </a:lnBlToTr>
+                    <a:solidFill>
+                      <a:schemeClr val="bg1"/>
+                    </a:solidFill>
+                  </a:tcPr>
+                </a:tc>
+                <a:tc>
+                  <a:txBody>
+                    <a:bodyPr/>
+                    <a:lstStyle/>
+                    <a:p>
+                      <a:endParaRPr kumimoji="1" lang="ja-JP" altLang="en-US" dirty="0"/>
+                    </a:p>
+                  </a:txBody>
+                  <a:tcPr>
+                    <a:lnL w="12700" cap="flat" cmpd="sng" algn="ctr">
+                      <a:solidFill>
+                        <a:schemeClr val="tx1">
+                          <a:lumMod val="50000"/>
+                          <a:lumOff val="50000"/>
+                        </a:schemeClr>
+                      </a:solidFill>
+                      <a:prstDash val="solid"/>
+                      <a:round/>
+                      <a:headEnd type="none" w="med" len="med"/>
+                      <a:tailEnd type="none" w="med" len="med"/>
+                    </a:lnL>
+                    <a:lnR w="12700" cap="flat" cmpd="sng" algn="ctr">
+                      <a:solidFill>
+                        <a:schemeClr val="tx1">
+                          <a:lumMod val="50000"/>
+                          <a:lumOff val="50000"/>
+                        </a:schemeClr>
+                      </a:solidFill>
+                      <a:prstDash val="solid"/>
+                      <a:round/>
+                      <a:headEnd type="none" w="med" len="med"/>
+                      <a:tailEnd type="none" w="med" len="med"/>
+                    </a:lnR>
+                    <a:lnT w="12700" cap="flat" cmpd="sng" algn="ctr">
+                      <a:solidFill>
+                        <a:schemeClr val="tx1">
+                          <a:lumMod val="50000"/>
+                          <a:lumOff val="50000"/>
+                        </a:schemeClr>
+                      </a:solidFill>
+                      <a:prstDash val="solid"/>
+                      <a:round/>
+                      <a:headEnd type="none" w="med" len="med"/>
+                      <a:tailEnd type="none" w="med" len="med"/>
+                    </a:lnT>
+                    <a:lnB w="12700" cap="flat" cmpd="sng" algn="ctr">
+                      <a:solidFill>
+                        <a:schemeClr val="tx1">
+                          <a:lumMod val="50000"/>
+                          <a:lumOff val="50000"/>
+                        </a:schemeClr>
+                      </a:solidFill>
+                      <a:prstDash val="solid"/>
+                      <a:round/>
+                      <a:headEnd type="none" w="med" len="med"/>
+                      <a:tailEnd type="none" w="med" len="med"/>
+                    </a:lnB>
+                    <a:lnTlToBr w="12700" cmpd="sng">
+                      <a:noFill/>
+                      <a:prstDash val="solid"/>
+                    </a:lnTlToBr>
+                    <a:lnBlToTr w="12700" cmpd="sng">
+                      <a:noFill/>
+                      <a:prstDash val="solid"/>
+                    </a:lnBlToTr>
+                    <a:solidFill>
+                      <a:schemeClr val="bg1"/>
+                    </a:solidFill>
+                  </a:tcPr>
+                </a:tc>
+                <a:extLst>
+                  <a:ext uri="{0D108BD9-81ED-4DB2-BD59-A6C34878D82A}">
+                    <a16:rowId xmlns:a16="http://schemas.microsoft.com/office/drawing/2014/main" val="1339874035"/>
+                  </a:ext>
+                </a:extLst>
+              </a:tr>
+              <a:tr h="614435">
+                <a:tc>
+                  <a:txBody>
+                    <a:bodyPr/>
+                    <a:lstStyle/>
+                    <a:p>
+                      <a:pPr algn="ctr"/>
+                      <a:r>
+                        <a:rPr kumimoji="1" lang="ja-JP" altLang="en-US" dirty="0">
+                          <a:solidFill>
+                            <a:schemeClr val="bg1"/>
+                          </a:solidFill>
+                        </a:rPr>
+                        <a:t>機体設計</a:t>
+                      </a:r>
+                    </a:p>
+                  </a:txBody>
+                  <a:tcPr>
+                    <a:lnL w="12700" cmpd="sng">
+                      <a:noFill/>
+                    </a:lnL>
+                    <a:lnR w="12700" cap="flat" cmpd="sng" algn="ctr">
+                      <a:solidFill>
+                        <a:schemeClr val="tx1">
+                          <a:lumMod val="50000"/>
+                          <a:lumOff val="50000"/>
+                        </a:schemeClr>
+                      </a:solidFill>
+                      <a:prstDash val="solid"/>
+                      <a:round/>
+                      <a:headEnd type="none" w="med" len="med"/>
+                      <a:tailEnd type="none" w="med" len="med"/>
+                    </a:lnR>
+                    <a:lnT w="12700" cmpd="sng">
+                      <a:noFill/>
+                    </a:lnT>
+                    <a:lnB w="12700" cmpd="sng">
+                      <a:noFill/>
+                    </a:lnB>
+                    <a:lnTlToBr w="12700" cmpd="sng">
+                      <a:noFill/>
+                      <a:prstDash val="solid"/>
+                    </a:lnTlToBr>
+                    <a:lnBlToTr w="12700" cmpd="sng">
+                      <a:noFill/>
+                      <a:prstDash val="solid"/>
+                    </a:lnBlToTr>
+                    <a:solidFill>
+                      <a:srgbClr val="006699"/>
+                    </a:solidFill>
+                  </a:tcPr>
+                </a:tc>
+                <a:tc>
+                  <a:txBody>
+                    <a:bodyPr/>
+                    <a:lstStyle/>
+                    <a:p>
+                      <a:endParaRPr kumimoji="1" lang="ja-JP" altLang="en-US" dirty="0"/>
+                    </a:p>
+                  </a:txBody>
+                  <a:tcPr>
+                    <a:lnL w="12700" cap="flat" cmpd="sng" algn="ctr">
+                      <a:solidFill>
+                        <a:schemeClr val="tx1">
+                          <a:lumMod val="50000"/>
+                          <a:lumOff val="50000"/>
+                        </a:schemeClr>
+                      </a:solidFill>
+                      <a:prstDash val="solid"/>
+                      <a:round/>
+                      <a:headEnd type="none" w="med" len="med"/>
+                      <a:tailEnd type="none" w="med" len="med"/>
+                    </a:lnL>
+                    <a:lnR w="12700" cap="flat" cmpd="sng" algn="ctr">
+                      <a:solidFill>
+                        <a:schemeClr val="tx1">
+                          <a:lumMod val="50000"/>
+                          <a:lumOff val="50000"/>
+                        </a:schemeClr>
+                      </a:solidFill>
+                      <a:prstDash val="solid"/>
+                      <a:round/>
+                      <a:headEnd type="none" w="med" len="med"/>
+                      <a:tailEnd type="none" w="med" len="med"/>
+                    </a:lnR>
+                    <a:lnT w="12700" cap="flat" cmpd="sng" algn="ctr">
+                      <a:solidFill>
+                        <a:schemeClr val="tx1">
+                          <a:lumMod val="50000"/>
+                          <a:lumOff val="50000"/>
+                        </a:schemeClr>
+                      </a:solidFill>
+                      <a:prstDash val="solid"/>
+                      <a:round/>
+                      <a:headEnd type="none" w="med" len="med"/>
+                      <a:tailEnd type="none" w="med" len="med"/>
+                    </a:lnT>
+                    <a:lnB w="12700" cap="flat" cmpd="sng" algn="ctr">
+                      <a:solidFill>
+                        <a:schemeClr val="tx1">
+                          <a:lumMod val="50000"/>
+                          <a:lumOff val="50000"/>
+                        </a:schemeClr>
+                      </a:solidFill>
+                      <a:prstDash val="solid"/>
+                      <a:round/>
+                      <a:headEnd type="none" w="med" len="med"/>
+                      <a:tailEnd type="none" w="med" len="med"/>
+                    </a:lnB>
+                    <a:lnTlToBr w="12700" cmpd="sng">
+                      <a:noFill/>
+                      <a:prstDash val="solid"/>
+                    </a:lnTlToBr>
+                    <a:lnBlToTr w="12700" cmpd="sng">
+                      <a:noFill/>
+                      <a:prstDash val="solid"/>
+                    </a:lnBlToTr>
+                    <a:solidFill>
+                      <a:schemeClr val="bg1"/>
+                    </a:solidFill>
+                  </a:tcPr>
+                </a:tc>
+                <a:tc>
+                  <a:txBody>
+                    <a:bodyPr/>
+                    <a:lstStyle/>
+                    <a:p>
+                      <a:endParaRPr kumimoji="1" lang="ja-JP" altLang="en-US" dirty="0"/>
+                    </a:p>
+                  </a:txBody>
+                  <a:tcPr>
+                    <a:lnL w="12700" cap="flat" cmpd="sng" algn="ctr">
+                      <a:solidFill>
+                        <a:schemeClr val="tx1">
+                          <a:lumMod val="50000"/>
+                          <a:lumOff val="50000"/>
+                        </a:schemeClr>
+                      </a:solidFill>
+                      <a:prstDash val="solid"/>
+                      <a:round/>
+                      <a:headEnd type="none" w="med" len="med"/>
+                      <a:tailEnd type="none" w="med" len="med"/>
+                    </a:lnL>
+                    <a:lnR w="12700" cap="flat" cmpd="sng" algn="ctr">
+                      <a:solidFill>
+                        <a:schemeClr val="tx1">
+                          <a:lumMod val="50000"/>
+                          <a:lumOff val="50000"/>
+                        </a:schemeClr>
+                      </a:solidFill>
+                      <a:prstDash val="solid"/>
+                      <a:round/>
+                      <a:headEnd type="none" w="med" len="med"/>
+                      <a:tailEnd type="none" w="med" len="med"/>
+                    </a:lnR>
+                    <a:lnT w="12700" cap="flat" cmpd="sng" algn="ctr">
+                      <a:solidFill>
+                        <a:schemeClr val="tx1">
+                          <a:lumMod val="50000"/>
+                          <a:lumOff val="50000"/>
+                        </a:schemeClr>
+                      </a:solidFill>
+                      <a:prstDash val="solid"/>
+                      <a:round/>
+                      <a:headEnd type="none" w="med" len="med"/>
+                      <a:tailEnd type="none" w="med" len="med"/>
+                    </a:lnT>
+                    <a:lnB w="12700" cap="flat" cmpd="sng" algn="ctr">
+                      <a:solidFill>
+                        <a:schemeClr val="tx1">
+                          <a:lumMod val="50000"/>
+                          <a:lumOff val="50000"/>
+                        </a:schemeClr>
+                      </a:solidFill>
+                      <a:prstDash val="solid"/>
+                      <a:round/>
+                      <a:headEnd type="none" w="med" len="med"/>
+                      <a:tailEnd type="none" w="med" len="med"/>
+                    </a:lnB>
+                    <a:lnTlToBr w="12700" cmpd="sng">
+                      <a:noFill/>
+                      <a:prstDash val="solid"/>
+                    </a:lnTlToBr>
+                    <a:lnBlToTr w="12700" cmpd="sng">
+                      <a:noFill/>
+                      <a:prstDash val="solid"/>
+                    </a:lnBlToTr>
+                    <a:solidFill>
+                      <a:schemeClr val="bg1"/>
+                    </a:solidFill>
+                  </a:tcPr>
+                </a:tc>
+                <a:tc>
+                  <a:txBody>
+                    <a:bodyPr/>
+                    <a:lstStyle/>
+                    <a:p>
+                      <a:endParaRPr kumimoji="1" lang="ja-JP" altLang="en-US" dirty="0"/>
+                    </a:p>
+                  </a:txBody>
+                  <a:tcPr>
+                    <a:lnL w="12700" cap="flat" cmpd="sng" algn="ctr">
+                      <a:solidFill>
+                        <a:schemeClr val="tx1">
+                          <a:lumMod val="50000"/>
+                          <a:lumOff val="50000"/>
+                        </a:schemeClr>
+                      </a:solidFill>
+                      <a:prstDash val="solid"/>
+                      <a:round/>
+                      <a:headEnd type="none" w="med" len="med"/>
+                      <a:tailEnd type="none" w="med" len="med"/>
+                    </a:lnL>
+                    <a:lnR w="12700" cap="flat" cmpd="sng" algn="ctr">
+                      <a:solidFill>
+                        <a:schemeClr val="tx1">
+                          <a:lumMod val="50000"/>
+                          <a:lumOff val="50000"/>
+                        </a:schemeClr>
+                      </a:solidFill>
+                      <a:prstDash val="solid"/>
+                      <a:round/>
+                      <a:headEnd type="none" w="med" len="med"/>
+                      <a:tailEnd type="none" w="med" len="med"/>
+                    </a:lnR>
+                    <a:lnT w="12700" cap="flat" cmpd="sng" algn="ctr">
+                      <a:solidFill>
+                        <a:schemeClr val="tx1">
+                          <a:lumMod val="50000"/>
+                          <a:lumOff val="50000"/>
+                        </a:schemeClr>
+                      </a:solidFill>
+                      <a:prstDash val="solid"/>
+                      <a:round/>
+                      <a:headEnd type="none" w="med" len="med"/>
+                      <a:tailEnd type="none" w="med" len="med"/>
+                    </a:lnT>
+                    <a:lnB w="12700" cap="flat" cmpd="sng" algn="ctr">
+                      <a:solidFill>
+                        <a:schemeClr val="tx1">
+                          <a:lumMod val="50000"/>
+                          <a:lumOff val="50000"/>
+                        </a:schemeClr>
+                      </a:solidFill>
+                      <a:prstDash val="solid"/>
+                      <a:round/>
+                      <a:headEnd type="none" w="med" len="med"/>
+                      <a:tailEnd type="none" w="med" len="med"/>
+                    </a:lnB>
+                    <a:lnTlToBr w="12700" cmpd="sng">
+                      <a:noFill/>
+                      <a:prstDash val="solid"/>
+                    </a:lnTlToBr>
+                    <a:lnBlToTr w="12700" cmpd="sng">
+                      <a:noFill/>
+                      <a:prstDash val="solid"/>
+                    </a:lnBlToTr>
+                    <a:solidFill>
+                      <a:schemeClr val="bg1"/>
+                    </a:solidFill>
+                  </a:tcPr>
+                </a:tc>
+                <a:extLst>
+                  <a:ext uri="{0D108BD9-81ED-4DB2-BD59-A6C34878D82A}">
+                    <a16:rowId xmlns:a16="http://schemas.microsoft.com/office/drawing/2014/main" val="1387061734"/>
+                  </a:ext>
+                </a:extLst>
+              </a:tr>
+              <a:tr h="614435">
+                <a:tc>
+                  <a:txBody>
+                    <a:bodyPr/>
+                    <a:lstStyle/>
+                    <a:p>
+                      <a:pPr algn="ctr"/>
+                      <a:r>
+                        <a:rPr kumimoji="1" lang="ja-JP" altLang="en-US" dirty="0">
+                          <a:solidFill>
+                            <a:schemeClr val="bg1"/>
+                          </a:solidFill>
+                        </a:rPr>
+                        <a:t>プログラム</a:t>
+                      </a:r>
+                    </a:p>
+                  </a:txBody>
+                  <a:tcPr>
+                    <a:lnL w="12700" cmpd="sng">
+                      <a:noFill/>
+                    </a:lnL>
+                    <a:lnR w="12700" cap="flat" cmpd="sng" algn="ctr">
+                      <a:solidFill>
+                        <a:schemeClr val="tx1">
+                          <a:lumMod val="50000"/>
+                          <a:lumOff val="50000"/>
+                        </a:schemeClr>
+                      </a:solidFill>
+                      <a:prstDash val="solid"/>
+                      <a:round/>
+                      <a:headEnd type="none" w="med" len="med"/>
+                      <a:tailEnd type="none" w="med" len="med"/>
+                    </a:lnR>
+                    <a:lnT w="12700" cmpd="sng">
+                      <a:noFill/>
+                    </a:lnT>
+                    <a:lnB w="12700" cmpd="sng">
+                      <a:noFill/>
+                    </a:lnB>
+                    <a:lnTlToBr w="12700" cmpd="sng">
+                      <a:noFill/>
+                      <a:prstDash val="solid"/>
+                    </a:lnTlToBr>
+                    <a:lnBlToTr w="12700" cmpd="sng">
+                      <a:noFill/>
+                      <a:prstDash val="solid"/>
+                    </a:lnBlToTr>
+                    <a:solidFill>
+                      <a:srgbClr val="AA0AB2"/>
+                    </a:solidFill>
+                  </a:tcPr>
+                </a:tc>
+                <a:tc>
+                  <a:txBody>
+                    <a:bodyPr/>
+                    <a:lstStyle/>
+                    <a:p>
+                      <a:endParaRPr kumimoji="1" lang="ja-JP" altLang="en-US" dirty="0"/>
+                    </a:p>
+                  </a:txBody>
+                  <a:tcPr>
+                    <a:lnL w="12700" cap="flat" cmpd="sng" algn="ctr">
+                      <a:solidFill>
+                        <a:schemeClr val="tx1">
+                          <a:lumMod val="50000"/>
+                          <a:lumOff val="50000"/>
+                        </a:schemeClr>
+                      </a:solidFill>
+                      <a:prstDash val="solid"/>
+                      <a:round/>
+                      <a:headEnd type="none" w="med" len="med"/>
+                      <a:tailEnd type="none" w="med" len="med"/>
+                    </a:lnL>
+                    <a:lnR w="12700" cap="flat" cmpd="sng" algn="ctr">
+                      <a:solidFill>
+                        <a:schemeClr val="tx1">
+                          <a:lumMod val="50000"/>
+                          <a:lumOff val="50000"/>
+                        </a:schemeClr>
+                      </a:solidFill>
+                      <a:prstDash val="solid"/>
+                      <a:round/>
+                      <a:headEnd type="none" w="med" len="med"/>
+                      <a:tailEnd type="none" w="med" len="med"/>
+                    </a:lnR>
+                    <a:lnT w="12700" cap="flat" cmpd="sng" algn="ctr">
+                      <a:solidFill>
+                        <a:schemeClr val="tx1">
+                          <a:lumMod val="50000"/>
+                          <a:lumOff val="50000"/>
+                        </a:schemeClr>
+                      </a:solidFill>
+                      <a:prstDash val="solid"/>
+                      <a:round/>
+                      <a:headEnd type="none" w="med" len="med"/>
+                      <a:tailEnd type="none" w="med" len="med"/>
+                    </a:lnT>
+                    <a:lnB w="12700" cap="flat" cmpd="sng" algn="ctr">
+                      <a:solidFill>
+                        <a:schemeClr val="tx1">
+                          <a:lumMod val="50000"/>
+                          <a:lumOff val="50000"/>
+                        </a:schemeClr>
+                      </a:solidFill>
+                      <a:prstDash val="solid"/>
+                      <a:round/>
+                      <a:headEnd type="none" w="med" len="med"/>
+                      <a:tailEnd type="none" w="med" len="med"/>
+                    </a:lnB>
+                    <a:lnTlToBr w="12700" cmpd="sng">
+                      <a:noFill/>
+                      <a:prstDash val="solid"/>
+                    </a:lnTlToBr>
+                    <a:lnBlToTr w="12700" cmpd="sng">
+                      <a:noFill/>
+                      <a:prstDash val="solid"/>
+                    </a:lnBlToTr>
+                    <a:solidFill>
+                      <a:schemeClr val="bg1"/>
+                    </a:solidFill>
+                  </a:tcPr>
+                </a:tc>
+                <a:tc>
+                  <a:txBody>
+                    <a:bodyPr/>
+                    <a:lstStyle/>
+                    <a:p>
+                      <a:endParaRPr kumimoji="1" lang="ja-JP" altLang="en-US" dirty="0"/>
+                    </a:p>
+                  </a:txBody>
+                  <a:tcPr>
+                    <a:lnL w="12700" cap="flat" cmpd="sng" algn="ctr">
+                      <a:solidFill>
+                        <a:schemeClr val="tx1">
+                          <a:lumMod val="50000"/>
+                          <a:lumOff val="50000"/>
+                        </a:schemeClr>
+                      </a:solidFill>
+                      <a:prstDash val="solid"/>
+                      <a:round/>
+                      <a:headEnd type="none" w="med" len="med"/>
+                      <a:tailEnd type="none" w="med" len="med"/>
+                    </a:lnL>
+                    <a:lnR w="12700" cap="flat" cmpd="sng" algn="ctr">
+                      <a:solidFill>
+                        <a:schemeClr val="tx1">
+                          <a:lumMod val="50000"/>
+                          <a:lumOff val="50000"/>
+                        </a:schemeClr>
+                      </a:solidFill>
+                      <a:prstDash val="solid"/>
+                      <a:round/>
+                      <a:headEnd type="none" w="med" len="med"/>
+                      <a:tailEnd type="none" w="med" len="med"/>
+                    </a:lnR>
+                    <a:lnT w="12700" cap="flat" cmpd="sng" algn="ctr">
+                      <a:solidFill>
+                        <a:schemeClr val="tx1">
+                          <a:lumMod val="50000"/>
+                          <a:lumOff val="50000"/>
+                        </a:schemeClr>
+                      </a:solidFill>
+                      <a:prstDash val="solid"/>
+                      <a:round/>
+                      <a:headEnd type="none" w="med" len="med"/>
+                      <a:tailEnd type="none" w="med" len="med"/>
+                    </a:lnT>
+                    <a:lnB w="12700" cap="flat" cmpd="sng" algn="ctr">
+                      <a:solidFill>
+                        <a:schemeClr val="tx1">
+                          <a:lumMod val="50000"/>
+                          <a:lumOff val="50000"/>
+                        </a:schemeClr>
+                      </a:solidFill>
+                      <a:prstDash val="solid"/>
+                      <a:round/>
+                      <a:headEnd type="none" w="med" len="med"/>
+                      <a:tailEnd type="none" w="med" len="med"/>
+                    </a:lnB>
+                    <a:lnTlToBr w="12700" cmpd="sng">
+                      <a:noFill/>
+                      <a:prstDash val="solid"/>
+                    </a:lnTlToBr>
+                    <a:lnBlToTr w="12700" cmpd="sng">
+                      <a:noFill/>
+                      <a:prstDash val="solid"/>
+                    </a:lnBlToTr>
+                    <a:solidFill>
+                      <a:schemeClr val="bg1"/>
+                    </a:solidFill>
+                  </a:tcPr>
+                </a:tc>
+                <a:tc>
+                  <a:txBody>
+                    <a:bodyPr/>
+                    <a:lstStyle/>
+                    <a:p>
+                      <a:endParaRPr kumimoji="1" lang="ja-JP" altLang="en-US" dirty="0"/>
+                    </a:p>
+                  </a:txBody>
+                  <a:tcPr>
+                    <a:lnL w="12700" cap="flat" cmpd="sng" algn="ctr">
+                      <a:solidFill>
+                        <a:schemeClr val="tx1">
+                          <a:lumMod val="50000"/>
+                          <a:lumOff val="50000"/>
+                        </a:schemeClr>
+                      </a:solidFill>
+                      <a:prstDash val="solid"/>
+                      <a:round/>
+                      <a:headEnd type="none" w="med" len="med"/>
+                      <a:tailEnd type="none" w="med" len="med"/>
+                    </a:lnL>
+                    <a:lnR w="12700" cap="flat" cmpd="sng" algn="ctr">
+                      <a:solidFill>
+                        <a:schemeClr val="tx1">
+                          <a:lumMod val="50000"/>
+                          <a:lumOff val="50000"/>
+                        </a:schemeClr>
+                      </a:solidFill>
+                      <a:prstDash val="solid"/>
+                      <a:round/>
+                      <a:headEnd type="none" w="med" len="med"/>
+                      <a:tailEnd type="none" w="med" len="med"/>
+                    </a:lnR>
+                    <a:lnT w="12700" cap="flat" cmpd="sng" algn="ctr">
+                      <a:solidFill>
+                        <a:schemeClr val="tx1">
+                          <a:lumMod val="50000"/>
+                          <a:lumOff val="50000"/>
+                        </a:schemeClr>
+                      </a:solidFill>
+                      <a:prstDash val="solid"/>
+                      <a:round/>
+                      <a:headEnd type="none" w="med" len="med"/>
+                      <a:tailEnd type="none" w="med" len="med"/>
+                    </a:lnT>
+                    <a:lnB w="12700" cap="flat" cmpd="sng" algn="ctr">
+                      <a:solidFill>
+                        <a:schemeClr val="tx1">
+                          <a:lumMod val="50000"/>
+                          <a:lumOff val="50000"/>
+                        </a:schemeClr>
+                      </a:solidFill>
+                      <a:prstDash val="solid"/>
+                      <a:round/>
+                      <a:headEnd type="none" w="med" len="med"/>
+                      <a:tailEnd type="none" w="med" len="med"/>
+                    </a:lnB>
+                    <a:lnTlToBr w="12700" cmpd="sng">
+                      <a:noFill/>
+                      <a:prstDash val="solid"/>
+                    </a:lnTlToBr>
+                    <a:lnBlToTr w="12700" cmpd="sng">
+                      <a:noFill/>
+                      <a:prstDash val="solid"/>
+                    </a:lnBlToTr>
+                    <a:solidFill>
+                      <a:schemeClr val="bg1"/>
+                    </a:solidFill>
+                  </a:tcPr>
+                </a:tc>
+                <a:extLst>
+                  <a:ext uri="{0D108BD9-81ED-4DB2-BD59-A6C34878D82A}">
+                    <a16:rowId xmlns:a16="http://schemas.microsoft.com/office/drawing/2014/main" val="2975965372"/>
+                  </a:ext>
+                </a:extLst>
+              </a:tr>
+            </a:tbl>
+          </a:graphicData>
+        </a:graphic>
+      </p:graphicFrame>
+      <p:cxnSp>
+        <p:nvCxnSpPr>
+          <p:cNvPr id="5" name="直線コネクタ 4">
+            <a:extLst>
+              <a:ext uri="{FF2B5EF4-FFF2-40B4-BE49-F238E27FC236}">
+                <a16:creationId xmlns:a16="http://schemas.microsoft.com/office/drawing/2014/main" id="{BC8AA9C8-2F74-30EB-235E-62414E168746}"/>
+              </a:ext>
+            </a:extLst>
+          </p:cNvPr>
+          <p:cNvCxnSpPr>
+            <a:cxnSpLocks/>
+          </p:cNvCxnSpPr>
+          <p:nvPr/>
+        </p:nvCxnSpPr>
+        <p:spPr>
+          <a:xfrm>
+            <a:off x="2168983" y="2214702"/>
+            <a:ext cx="552450" cy="0"/>
+          </a:xfrm>
+          <a:prstGeom prst="line">
+            <a:avLst/>
+          </a:prstGeom>
+          <a:ln w="25400">
+            <a:solidFill>
+              <a:srgbClr val="006699"/>
+            </a:solidFill>
+            <a:headEnd type="oval"/>
+            <a:tailEnd type="oval"/>
+          </a:ln>
+        </p:spPr>
+        <p:style>
+          <a:lnRef idx="1">
+            <a:schemeClr val="accent1"/>
+          </a:lnRef>
+          <a:fillRef idx="0">
+            <a:schemeClr val="accent1"/>
+          </a:fillRef>
+          <a:effectRef idx="0">
+            <a:schemeClr val="accent1"/>
+          </a:effectRef>
+          <a:fontRef idx="minor">
+            <a:schemeClr val="tx1"/>
+          </a:fontRef>
+        </p:style>
+      </p:cxnSp>
+      <p:sp>
+        <p:nvSpPr>
+          <p:cNvPr id="6" name="テキスト ボックス 5">
+            <a:extLst>
+              <a:ext uri="{FF2B5EF4-FFF2-40B4-BE49-F238E27FC236}">
+                <a16:creationId xmlns:a16="http://schemas.microsoft.com/office/drawing/2014/main" id="{0AC17DE3-EFDC-B56F-4871-FFE35339D437}"/>
+              </a:ext>
+            </a:extLst>
+          </p:cNvPr>
+          <p:cNvSpPr txBox="1"/>
+          <p:nvPr/>
+        </p:nvSpPr>
+        <p:spPr>
+          <a:xfrm>
+            <a:off x="2106119" y="2230924"/>
+            <a:ext cx="579314" cy="400110"/>
+          </a:xfrm>
+          <a:prstGeom prst="rect">
+            <a:avLst/>
+          </a:prstGeom>
+          <a:noFill/>
+        </p:spPr>
+        <p:txBody>
+          <a:bodyPr wrap="square" rtlCol="0">
+            <a:spAutoFit/>
+          </a:bodyPr>
+          <a:lstStyle/>
+          <a:p>
+            <a:pPr algn="ctr"/>
+            <a:r>
+              <a:rPr lang="ja-JP" altLang="en-US" sz="1000" dirty="0"/>
+              <a:t>データ</a:t>
+            </a:r>
+            <a:endParaRPr lang="en-US" altLang="ja-JP" sz="1000" dirty="0"/>
+          </a:p>
+          <a:p>
+            <a:pPr algn="ctr"/>
+            <a:r>
+              <a:rPr lang="ja-JP" altLang="en-US" sz="1000" dirty="0"/>
+              <a:t>作成</a:t>
+            </a:r>
+            <a:endParaRPr kumimoji="1" lang="ja-JP" altLang="en-US" sz="1000" dirty="0"/>
+          </a:p>
+        </p:txBody>
+      </p:sp>
+      <p:cxnSp>
+        <p:nvCxnSpPr>
+          <p:cNvPr id="7" name="直線コネクタ 6">
+            <a:extLst>
+              <a:ext uri="{FF2B5EF4-FFF2-40B4-BE49-F238E27FC236}">
+                <a16:creationId xmlns:a16="http://schemas.microsoft.com/office/drawing/2014/main" id="{3006E8FA-0F77-580D-25A6-5194618C0D6F}"/>
+              </a:ext>
+            </a:extLst>
+          </p:cNvPr>
+          <p:cNvCxnSpPr>
+            <a:cxnSpLocks/>
+          </p:cNvCxnSpPr>
+          <p:nvPr/>
+        </p:nvCxnSpPr>
+        <p:spPr>
+          <a:xfrm>
+            <a:off x="2168983" y="2807970"/>
+            <a:ext cx="928547" cy="0"/>
+          </a:xfrm>
+          <a:prstGeom prst="line">
+            <a:avLst/>
+          </a:prstGeom>
+          <a:ln w="25400">
+            <a:solidFill>
+              <a:srgbClr val="AA0AB2"/>
+            </a:solidFill>
+            <a:headEnd type="oval"/>
+            <a:tailEnd type="oval"/>
+          </a:ln>
+        </p:spPr>
+        <p:style>
+          <a:lnRef idx="1">
+            <a:schemeClr val="accent1"/>
+          </a:lnRef>
+          <a:fillRef idx="0">
+            <a:schemeClr val="accent1"/>
+          </a:fillRef>
+          <a:effectRef idx="0">
+            <a:schemeClr val="accent1"/>
+          </a:effectRef>
+          <a:fontRef idx="minor">
+            <a:schemeClr val="tx1"/>
+          </a:fontRef>
+        </p:style>
+      </p:cxnSp>
+      <p:sp>
+        <p:nvSpPr>
+          <p:cNvPr id="9" name="テキスト ボックス 8">
+            <a:extLst>
+              <a:ext uri="{FF2B5EF4-FFF2-40B4-BE49-F238E27FC236}">
+                <a16:creationId xmlns:a16="http://schemas.microsoft.com/office/drawing/2014/main" id="{A9102FE2-E2AD-EDF8-6918-1D15BD69C441}"/>
+              </a:ext>
+            </a:extLst>
+          </p:cNvPr>
+          <p:cNvSpPr txBox="1"/>
+          <p:nvPr/>
+        </p:nvSpPr>
+        <p:spPr>
+          <a:xfrm>
+            <a:off x="2901607" y="1655629"/>
+            <a:ext cx="704211" cy="246221"/>
+          </a:xfrm>
+          <a:prstGeom prst="rect">
+            <a:avLst/>
+          </a:prstGeom>
+          <a:noFill/>
+        </p:spPr>
+        <p:txBody>
+          <a:bodyPr wrap="square" rtlCol="0">
+            <a:spAutoFit/>
+          </a:bodyPr>
+          <a:lstStyle/>
+          <a:p>
+            <a:r>
+              <a:rPr kumimoji="1" lang="ja-JP" altLang="en-US" sz="1000" dirty="0"/>
+              <a:t>基板発注</a:t>
+            </a:r>
+            <a:endParaRPr kumimoji="1" lang="en-US" altLang="ja-JP" sz="1000" dirty="0"/>
+          </a:p>
+        </p:txBody>
+      </p:sp>
+      <p:cxnSp>
+        <p:nvCxnSpPr>
+          <p:cNvPr id="11" name="直線コネクタ 10">
+            <a:extLst>
+              <a:ext uri="{FF2B5EF4-FFF2-40B4-BE49-F238E27FC236}">
+                <a16:creationId xmlns:a16="http://schemas.microsoft.com/office/drawing/2014/main" id="{94C13B72-2CAD-5FC4-E029-86437020E3F3}"/>
+              </a:ext>
+            </a:extLst>
+          </p:cNvPr>
+          <p:cNvCxnSpPr>
+            <a:cxnSpLocks/>
+          </p:cNvCxnSpPr>
+          <p:nvPr/>
+        </p:nvCxnSpPr>
+        <p:spPr>
+          <a:xfrm>
+            <a:off x="2168983" y="1586316"/>
+            <a:ext cx="552450" cy="0"/>
+          </a:xfrm>
+          <a:prstGeom prst="line">
+            <a:avLst/>
+          </a:prstGeom>
+          <a:ln w="25400">
+            <a:solidFill>
+              <a:srgbClr val="EBAE15"/>
+            </a:solidFill>
+            <a:headEnd type="oval"/>
+            <a:tailEnd type="oval"/>
+          </a:ln>
+        </p:spPr>
+        <p:style>
+          <a:lnRef idx="1">
+            <a:schemeClr val="accent1"/>
+          </a:lnRef>
+          <a:fillRef idx="0">
+            <a:schemeClr val="accent1"/>
+          </a:fillRef>
+          <a:effectRef idx="0">
+            <a:schemeClr val="accent1"/>
+          </a:effectRef>
+          <a:fontRef idx="minor">
+            <a:schemeClr val="tx1"/>
+          </a:fontRef>
+        </p:style>
+      </p:cxnSp>
+      <p:sp>
+        <p:nvSpPr>
+          <p:cNvPr id="12" name="テキスト ボックス 11">
+            <a:extLst>
+              <a:ext uri="{FF2B5EF4-FFF2-40B4-BE49-F238E27FC236}">
+                <a16:creationId xmlns:a16="http://schemas.microsoft.com/office/drawing/2014/main" id="{2521A29F-76F1-54F9-627D-2D773E5D99C1}"/>
+              </a:ext>
+            </a:extLst>
+          </p:cNvPr>
+          <p:cNvSpPr txBox="1"/>
+          <p:nvPr/>
+        </p:nvSpPr>
+        <p:spPr>
+          <a:xfrm>
+            <a:off x="2095738" y="1600930"/>
+            <a:ext cx="600075" cy="400110"/>
+          </a:xfrm>
+          <a:prstGeom prst="rect">
+            <a:avLst/>
+          </a:prstGeom>
+          <a:noFill/>
+        </p:spPr>
+        <p:txBody>
+          <a:bodyPr wrap="square" rtlCol="0">
+            <a:spAutoFit/>
+          </a:bodyPr>
+          <a:lstStyle/>
+          <a:p>
+            <a:pPr algn="ctr"/>
+            <a:r>
+              <a:rPr lang="ja-JP" altLang="en-US" sz="1000" dirty="0"/>
+              <a:t>データ</a:t>
+            </a:r>
+            <a:endParaRPr lang="en-US" altLang="ja-JP" sz="1000" dirty="0"/>
+          </a:p>
+          <a:p>
+            <a:pPr algn="ctr"/>
+            <a:r>
+              <a:rPr lang="ja-JP" altLang="en-US" sz="1000" dirty="0"/>
+              <a:t>作成</a:t>
+            </a:r>
+            <a:endParaRPr kumimoji="1" lang="ja-JP" altLang="en-US" sz="1000" dirty="0"/>
+          </a:p>
+        </p:txBody>
+      </p:sp>
+      <p:sp>
+        <p:nvSpPr>
+          <p:cNvPr id="13" name="楕円 12">
+            <a:extLst>
+              <a:ext uri="{FF2B5EF4-FFF2-40B4-BE49-F238E27FC236}">
+                <a16:creationId xmlns:a16="http://schemas.microsoft.com/office/drawing/2014/main" id="{2D95AED9-EF85-F16A-7D62-4D305D54751E}"/>
+              </a:ext>
+            </a:extLst>
+          </p:cNvPr>
+          <p:cNvSpPr/>
+          <p:nvPr/>
+        </p:nvSpPr>
+        <p:spPr>
+          <a:xfrm>
+            <a:off x="2685433" y="1740897"/>
+            <a:ext cx="72000" cy="72000"/>
+          </a:xfrm>
+          <a:prstGeom prst="ellipse">
+            <a:avLst/>
+          </a:prstGeom>
+          <a:solidFill>
+            <a:srgbClr val="EBAE15"/>
+          </a:solidFill>
+          <a:ln w="3175">
+            <a:solidFill>
+              <a:srgbClr val="EBAE15"/>
+            </a:solidFill>
+          </a:ln>
+        </p:spPr>
+        <p:style>
+          <a:lnRef idx="2">
+            <a:schemeClr val="accent1">
+              <a:shade val="50000"/>
+            </a:schemeClr>
+          </a:lnRef>
+          <a:fillRef idx="1">
+            <a:schemeClr val="accent1"/>
+          </a:fillRef>
+          <a:effectRef idx="0">
+            <a:schemeClr val="accent1"/>
+          </a:effectRef>
+          <a:fontRef idx="minor">
+            <a:schemeClr val="lt1"/>
+          </a:fontRef>
+        </p:style>
+        <p:txBody>
+          <a:bodyPr rtlCol="0" anchor="ctr"/>
+          <a:lstStyle/>
+          <a:p>
+            <a:pPr algn="ctr"/>
+            <a:endParaRPr kumimoji="1" lang="ja-JP" altLang="en-US" dirty="0"/>
+          </a:p>
+        </p:txBody>
+      </p:sp>
+      <p:cxnSp>
+        <p:nvCxnSpPr>
+          <p:cNvPr id="14" name="直線コネクタ 13">
+            <a:extLst>
+              <a:ext uri="{FF2B5EF4-FFF2-40B4-BE49-F238E27FC236}">
+                <a16:creationId xmlns:a16="http://schemas.microsoft.com/office/drawing/2014/main" id="{32AA8D83-BE47-3FB7-C1F7-713549379803}"/>
+              </a:ext>
+            </a:extLst>
+          </p:cNvPr>
+          <p:cNvCxnSpPr>
+            <a:cxnSpLocks/>
+          </p:cNvCxnSpPr>
+          <p:nvPr/>
+        </p:nvCxnSpPr>
+        <p:spPr>
+          <a:xfrm>
+            <a:off x="2721433" y="1963307"/>
+            <a:ext cx="376097" cy="0"/>
+          </a:xfrm>
+          <a:prstGeom prst="line">
+            <a:avLst/>
+          </a:prstGeom>
+          <a:ln w="25400">
+            <a:solidFill>
+              <a:srgbClr val="EBAE15"/>
+            </a:solidFill>
+            <a:headEnd type="oval"/>
+            <a:tailEnd type="oval"/>
+          </a:ln>
+        </p:spPr>
+        <p:style>
+          <a:lnRef idx="1">
+            <a:schemeClr val="accent1"/>
+          </a:lnRef>
+          <a:fillRef idx="0">
+            <a:schemeClr val="accent1"/>
+          </a:fillRef>
+          <a:effectRef idx="0">
+            <a:schemeClr val="accent1"/>
+          </a:effectRef>
+          <a:fontRef idx="minor">
+            <a:schemeClr val="tx1"/>
+          </a:fontRef>
+        </p:style>
+      </p:cxnSp>
+      <p:sp>
+        <p:nvSpPr>
+          <p:cNvPr id="15" name="テキスト ボックス 14">
+            <a:extLst>
+              <a:ext uri="{FF2B5EF4-FFF2-40B4-BE49-F238E27FC236}">
+                <a16:creationId xmlns:a16="http://schemas.microsoft.com/office/drawing/2014/main" id="{D8FA4CDD-FC26-28F2-D6BB-B8C0C4442053}"/>
+              </a:ext>
+            </a:extLst>
+          </p:cNvPr>
+          <p:cNvSpPr txBox="1"/>
+          <p:nvPr/>
+        </p:nvSpPr>
+        <p:spPr>
+          <a:xfrm>
+            <a:off x="3097530" y="1855558"/>
+            <a:ext cx="951352" cy="246221"/>
+          </a:xfrm>
+          <a:prstGeom prst="rect">
+            <a:avLst/>
+          </a:prstGeom>
+          <a:noFill/>
+        </p:spPr>
+        <p:txBody>
+          <a:bodyPr wrap="square" rtlCol="0">
+            <a:spAutoFit/>
+          </a:bodyPr>
+          <a:lstStyle/>
+          <a:p>
+            <a:r>
+              <a:rPr lang="ja-JP" altLang="en-US" sz="1000" dirty="0"/>
+              <a:t>動作チェック</a:t>
+            </a:r>
+            <a:endParaRPr kumimoji="1" lang="en-US" altLang="ja-JP" sz="1000" dirty="0"/>
+          </a:p>
+        </p:txBody>
+      </p:sp>
+      <p:cxnSp>
+        <p:nvCxnSpPr>
+          <p:cNvPr id="16" name="直線コネクタ 15">
+            <a:extLst>
+              <a:ext uri="{FF2B5EF4-FFF2-40B4-BE49-F238E27FC236}">
+                <a16:creationId xmlns:a16="http://schemas.microsoft.com/office/drawing/2014/main" id="{E502C137-8347-BC67-E684-F7CA6EF01E7D}"/>
+              </a:ext>
+            </a:extLst>
+          </p:cNvPr>
+          <p:cNvCxnSpPr>
+            <a:cxnSpLocks/>
+          </p:cNvCxnSpPr>
+          <p:nvPr/>
+        </p:nvCxnSpPr>
+        <p:spPr>
+          <a:xfrm flipV="1">
+            <a:off x="3099435" y="1599768"/>
+            <a:ext cx="1260000" cy="1162"/>
+          </a:xfrm>
+          <a:prstGeom prst="line">
+            <a:avLst/>
+          </a:prstGeom>
+          <a:ln w="25400">
+            <a:solidFill>
+              <a:srgbClr val="EBAE15"/>
+            </a:solidFill>
+            <a:headEnd type="oval"/>
+            <a:tailEnd type="oval"/>
+          </a:ln>
+        </p:spPr>
+        <p:style>
+          <a:lnRef idx="1">
+            <a:schemeClr val="accent1"/>
+          </a:lnRef>
+          <a:fillRef idx="0">
+            <a:schemeClr val="accent1"/>
+          </a:fillRef>
+          <a:effectRef idx="0">
+            <a:schemeClr val="accent1"/>
+          </a:effectRef>
+          <a:fontRef idx="minor">
+            <a:schemeClr val="tx1"/>
+          </a:fontRef>
+        </p:style>
+      </p:cxnSp>
+      <p:cxnSp>
+        <p:nvCxnSpPr>
+          <p:cNvPr id="17" name="直線コネクタ 16">
+            <a:extLst>
+              <a:ext uri="{FF2B5EF4-FFF2-40B4-BE49-F238E27FC236}">
+                <a16:creationId xmlns:a16="http://schemas.microsoft.com/office/drawing/2014/main" id="{06AFE922-FD00-01CD-85A9-8A3A6851EFAD}"/>
+              </a:ext>
+            </a:extLst>
+          </p:cNvPr>
+          <p:cNvCxnSpPr>
+            <a:cxnSpLocks/>
+          </p:cNvCxnSpPr>
+          <p:nvPr/>
+        </p:nvCxnSpPr>
+        <p:spPr>
+          <a:xfrm>
+            <a:off x="2721433" y="2406914"/>
+            <a:ext cx="378000" cy="0"/>
+          </a:xfrm>
+          <a:prstGeom prst="line">
+            <a:avLst/>
+          </a:prstGeom>
+          <a:ln w="25400">
+            <a:solidFill>
+              <a:srgbClr val="006699"/>
+            </a:solidFill>
+            <a:headEnd type="oval"/>
+            <a:tailEnd type="oval"/>
+          </a:ln>
+        </p:spPr>
+        <p:style>
+          <a:lnRef idx="1">
+            <a:schemeClr val="accent1"/>
+          </a:lnRef>
+          <a:fillRef idx="0">
+            <a:schemeClr val="accent1"/>
+          </a:fillRef>
+          <a:effectRef idx="0">
+            <a:schemeClr val="accent1"/>
+          </a:effectRef>
+          <a:fontRef idx="minor">
+            <a:schemeClr val="tx1"/>
+          </a:fontRef>
+        </p:style>
+      </p:cxnSp>
+      <p:sp>
+        <p:nvSpPr>
+          <p:cNvPr id="18" name="テキスト ボックス 17">
+            <a:extLst>
+              <a:ext uri="{FF2B5EF4-FFF2-40B4-BE49-F238E27FC236}">
+                <a16:creationId xmlns:a16="http://schemas.microsoft.com/office/drawing/2014/main" id="{89DF109F-CE5E-DA6D-CF7C-E915A86C2FED}"/>
+              </a:ext>
+            </a:extLst>
+          </p:cNvPr>
+          <p:cNvSpPr txBox="1"/>
+          <p:nvPr/>
+        </p:nvSpPr>
+        <p:spPr>
+          <a:xfrm>
+            <a:off x="2905010" y="2159711"/>
+            <a:ext cx="700808" cy="246221"/>
+          </a:xfrm>
+          <a:prstGeom prst="rect">
+            <a:avLst/>
+          </a:prstGeom>
+          <a:noFill/>
+        </p:spPr>
+        <p:txBody>
+          <a:bodyPr wrap="square" rtlCol="0">
+            <a:spAutoFit/>
+          </a:bodyPr>
+          <a:lstStyle/>
+          <a:p>
+            <a:r>
+              <a:rPr kumimoji="1" lang="ja-JP" altLang="en-US" sz="1000" dirty="0"/>
+              <a:t>組み立て</a:t>
+            </a:r>
+            <a:endParaRPr kumimoji="1" lang="en-US" altLang="ja-JP" sz="1000" dirty="0"/>
+          </a:p>
+        </p:txBody>
+      </p:sp>
+      <p:cxnSp>
+        <p:nvCxnSpPr>
+          <p:cNvPr id="19" name="直線コネクタ 18">
+            <a:extLst>
+              <a:ext uri="{FF2B5EF4-FFF2-40B4-BE49-F238E27FC236}">
+                <a16:creationId xmlns:a16="http://schemas.microsoft.com/office/drawing/2014/main" id="{29E32ACE-ACDE-3EF6-0F36-4B1EF195BBC1}"/>
+              </a:ext>
+            </a:extLst>
+          </p:cNvPr>
+          <p:cNvCxnSpPr>
+            <a:cxnSpLocks/>
+          </p:cNvCxnSpPr>
+          <p:nvPr/>
+        </p:nvCxnSpPr>
+        <p:spPr>
+          <a:xfrm>
+            <a:off x="3099434" y="2598745"/>
+            <a:ext cx="1260000" cy="0"/>
+          </a:xfrm>
+          <a:prstGeom prst="line">
+            <a:avLst/>
+          </a:prstGeom>
+          <a:ln w="25400">
+            <a:solidFill>
+              <a:srgbClr val="006699"/>
+            </a:solidFill>
+            <a:headEnd type="oval"/>
+            <a:tailEnd type="oval"/>
+          </a:ln>
+        </p:spPr>
+        <p:style>
+          <a:lnRef idx="1">
+            <a:schemeClr val="accent1"/>
+          </a:lnRef>
+          <a:fillRef idx="0">
+            <a:schemeClr val="accent1"/>
+          </a:fillRef>
+          <a:effectRef idx="0">
+            <a:schemeClr val="accent1"/>
+          </a:effectRef>
+          <a:fontRef idx="minor">
+            <a:schemeClr val="tx1"/>
+          </a:fontRef>
+        </p:style>
+      </p:cxnSp>
+      <p:cxnSp>
+        <p:nvCxnSpPr>
+          <p:cNvPr id="20" name="直線コネクタ 19">
+            <a:extLst>
+              <a:ext uri="{FF2B5EF4-FFF2-40B4-BE49-F238E27FC236}">
+                <a16:creationId xmlns:a16="http://schemas.microsoft.com/office/drawing/2014/main" id="{58E412D2-E146-E4A1-33B8-CF8321A946AB}"/>
+              </a:ext>
+            </a:extLst>
+          </p:cNvPr>
+          <p:cNvCxnSpPr>
+            <a:cxnSpLocks/>
+          </p:cNvCxnSpPr>
+          <p:nvPr/>
+        </p:nvCxnSpPr>
+        <p:spPr>
+          <a:xfrm>
+            <a:off x="3097530" y="3000418"/>
+            <a:ext cx="1260000" cy="0"/>
+          </a:xfrm>
+          <a:prstGeom prst="line">
+            <a:avLst/>
+          </a:prstGeom>
+          <a:ln w="25400">
+            <a:solidFill>
+              <a:srgbClr val="AA0AB2"/>
+            </a:solidFill>
+            <a:headEnd type="oval"/>
+            <a:tailEnd type="oval"/>
+          </a:ln>
+        </p:spPr>
+        <p:style>
+          <a:lnRef idx="1">
+            <a:schemeClr val="accent1"/>
+          </a:lnRef>
+          <a:fillRef idx="0">
+            <a:schemeClr val="accent1"/>
+          </a:fillRef>
+          <a:effectRef idx="0">
+            <a:schemeClr val="accent1"/>
+          </a:effectRef>
+          <a:fontRef idx="minor">
+            <a:schemeClr val="tx1"/>
+          </a:fontRef>
+        </p:style>
+      </p:cxnSp>
+      <p:sp>
+        <p:nvSpPr>
+          <p:cNvPr id="22" name="テキスト ボックス 21">
+            <a:extLst>
+              <a:ext uri="{FF2B5EF4-FFF2-40B4-BE49-F238E27FC236}">
+                <a16:creationId xmlns:a16="http://schemas.microsoft.com/office/drawing/2014/main" id="{D063A63F-5A71-F5F1-90FC-552AFD3A2EE7}"/>
+              </a:ext>
+            </a:extLst>
+          </p:cNvPr>
+          <p:cNvSpPr txBox="1"/>
+          <p:nvPr/>
+        </p:nvSpPr>
+        <p:spPr>
+          <a:xfrm>
+            <a:off x="2168982" y="2808916"/>
+            <a:ext cx="836929" cy="400110"/>
+          </a:xfrm>
+          <a:prstGeom prst="rect">
+            <a:avLst/>
+          </a:prstGeom>
+          <a:noFill/>
+        </p:spPr>
+        <p:txBody>
+          <a:bodyPr wrap="square" rtlCol="0">
+            <a:spAutoFit/>
+          </a:bodyPr>
+          <a:lstStyle/>
+          <a:p>
+            <a:pPr algn="ctr"/>
+            <a:r>
+              <a:rPr lang="ja-JP" altLang="en-US" sz="1000" dirty="0"/>
+              <a:t>プログラム</a:t>
+            </a:r>
+            <a:br>
+              <a:rPr lang="en-US" altLang="ja-JP" sz="1000" dirty="0"/>
+            </a:br>
+            <a:r>
+              <a:rPr lang="ja-JP" altLang="en-US" sz="1000" dirty="0"/>
+              <a:t>作成</a:t>
+            </a:r>
+            <a:endParaRPr kumimoji="1" lang="ja-JP" altLang="en-US" sz="1000" dirty="0"/>
+          </a:p>
+        </p:txBody>
+      </p:sp>
+      <p:sp>
+        <p:nvSpPr>
+          <p:cNvPr id="23" name="テキスト ボックス 22">
+            <a:extLst>
+              <a:ext uri="{FF2B5EF4-FFF2-40B4-BE49-F238E27FC236}">
+                <a16:creationId xmlns:a16="http://schemas.microsoft.com/office/drawing/2014/main" id="{5466FF6F-CAAC-C0D7-198A-6C4B180A02D6}"/>
+              </a:ext>
+            </a:extLst>
+          </p:cNvPr>
+          <p:cNvSpPr txBox="1"/>
+          <p:nvPr/>
+        </p:nvSpPr>
+        <p:spPr>
+          <a:xfrm>
+            <a:off x="4357530" y="2877307"/>
+            <a:ext cx="441765" cy="246221"/>
+          </a:xfrm>
+          <a:prstGeom prst="rect">
+            <a:avLst/>
+          </a:prstGeom>
+          <a:noFill/>
+        </p:spPr>
+        <p:txBody>
+          <a:bodyPr wrap="square" rtlCol="0">
+            <a:spAutoFit/>
+          </a:bodyPr>
+          <a:lstStyle/>
+          <a:p>
+            <a:r>
+              <a:rPr kumimoji="1" lang="ja-JP" altLang="en-US" sz="1000" dirty="0"/>
+              <a:t>調整</a:t>
+            </a:r>
+          </a:p>
+        </p:txBody>
+      </p:sp>
+      <p:sp>
+        <p:nvSpPr>
+          <p:cNvPr id="59" name="テキスト ボックス 58">
+            <a:extLst>
+              <a:ext uri="{FF2B5EF4-FFF2-40B4-BE49-F238E27FC236}">
+                <a16:creationId xmlns:a16="http://schemas.microsoft.com/office/drawing/2014/main" id="{CAD5EB85-8B7B-1C53-5B0C-11B9C821E6E7}"/>
+              </a:ext>
+            </a:extLst>
+          </p:cNvPr>
+          <p:cNvSpPr txBox="1"/>
+          <p:nvPr/>
+        </p:nvSpPr>
+        <p:spPr>
+          <a:xfrm>
+            <a:off x="4358960" y="2473094"/>
+            <a:ext cx="441765" cy="246221"/>
+          </a:xfrm>
+          <a:prstGeom prst="rect">
+            <a:avLst/>
+          </a:prstGeom>
+          <a:noFill/>
+        </p:spPr>
+        <p:txBody>
+          <a:bodyPr wrap="square" rtlCol="0">
+            <a:spAutoFit/>
+          </a:bodyPr>
+          <a:lstStyle/>
+          <a:p>
+            <a:r>
+              <a:rPr kumimoji="1" lang="ja-JP" altLang="en-US" sz="1000" dirty="0"/>
+              <a:t>調整</a:t>
+            </a:r>
+          </a:p>
+        </p:txBody>
+      </p:sp>
+      <p:sp>
+        <p:nvSpPr>
+          <p:cNvPr id="60" name="テキスト ボックス 59">
+            <a:extLst>
+              <a:ext uri="{FF2B5EF4-FFF2-40B4-BE49-F238E27FC236}">
+                <a16:creationId xmlns:a16="http://schemas.microsoft.com/office/drawing/2014/main" id="{25D32177-9860-724E-420C-1F8926BC4F38}"/>
+              </a:ext>
+            </a:extLst>
+          </p:cNvPr>
+          <p:cNvSpPr txBox="1"/>
+          <p:nvPr/>
+        </p:nvSpPr>
+        <p:spPr>
+          <a:xfrm>
+            <a:off x="4358959" y="1476622"/>
+            <a:ext cx="441765" cy="246221"/>
+          </a:xfrm>
+          <a:prstGeom prst="rect">
+            <a:avLst/>
+          </a:prstGeom>
+          <a:noFill/>
+        </p:spPr>
+        <p:txBody>
+          <a:bodyPr wrap="square" rtlCol="0">
+            <a:spAutoFit/>
+          </a:bodyPr>
+          <a:lstStyle/>
+          <a:p>
+            <a:r>
+              <a:rPr kumimoji="1" lang="ja-JP" altLang="en-US" sz="1000" dirty="0"/>
+              <a:t>調整</a:t>
+            </a:r>
+          </a:p>
+        </p:txBody>
+      </p:sp>
+    </p:spTree>
+    <p:extLst>
+      <p:ext uri="{BB962C8B-B14F-4D97-AF65-F5344CB8AC3E}">
+        <p14:creationId xmlns:p14="http://schemas.microsoft.com/office/powerpoint/2010/main" val="3387182983"/>
+      </p:ext>
+    </p:extLst>
+  </p:cSld>
+  <p:clrMapOvr>
+    <a:masterClrMapping/>
+  </p:clrMapOvr>
+</p:sld>
+</file>
+
+<file path=ppt/slides/slide4.xml><?xml version="1.0" encoding="utf-8"?>
+<p:sld xmlns:a="http://schemas.openxmlformats.org/drawingml/2006/main" xmlns:r="http://schemas.openxmlformats.org/officeDocument/2006/relationships" xmlns:p="http://schemas.openxmlformats.org/presentationml/2006/main">
+  <p:cSld>
+    <p:spTree>
+      <p:nvGrpSpPr>
+        <p:cNvPr id="1" name=""/>
+        <p:cNvGrpSpPr/>
+        <p:nvPr/>
+      </p:nvGrpSpPr>
+      <p:grpSpPr>
+        <a:xfrm>
+          <a:off x="0" y="0"/>
+          <a:ext cx="0" cy="0"/>
+          <a:chOff x="0" y="0"/>
+          <a:chExt cx="0" cy="0"/>
+        </a:xfrm>
+      </p:grpSpPr>
+      <p:graphicFrame>
+        <p:nvGraphicFramePr>
+          <p:cNvPr id="4" name="表 5">
+            <a:extLst>
+              <a:ext uri="{FF2B5EF4-FFF2-40B4-BE49-F238E27FC236}">
+                <a16:creationId xmlns:a16="http://schemas.microsoft.com/office/drawing/2014/main" id="{A844B2FC-2122-F52B-79FF-15FF2B96744D}"/>
+              </a:ext>
+            </a:extLst>
+          </p:cNvPr>
+          <p:cNvGraphicFramePr>
+            <a:graphicFrameLocks noGrp="1"/>
+          </p:cNvGraphicFramePr>
+          <p:nvPr>
+            <p:extLst>
+              <p:ext uri="{D42A27DB-BD31-4B8C-83A1-F6EECF244321}">
+                <p14:modId xmlns:p14="http://schemas.microsoft.com/office/powerpoint/2010/main" val="2869418290"/>
+              </p:ext>
+            </p:extLst>
+          </p:nvPr>
+        </p:nvGraphicFramePr>
+        <p:xfrm>
+          <a:off x="318053" y="984857"/>
+          <a:ext cx="4510599" cy="2337391"/>
+        </p:xfrm>
+        <a:graphic>
+          <a:graphicData uri="http://schemas.openxmlformats.org/drawingml/2006/table">
+            <a:tbl>
+              <a:tblPr>
+                <a:tableStyleId>{5C22544A-7EE6-4342-B048-85BDC9FD1C3A}</a:tableStyleId>
+              </a:tblPr>
+              <a:tblGrid>
+                <a:gridCol w="1725450">
+                  <a:extLst>
+                    <a:ext uri="{9D8B030D-6E8A-4147-A177-3AD203B41FA5}">
+                      <a16:colId xmlns:a16="http://schemas.microsoft.com/office/drawing/2014/main" val="1831953829"/>
+                    </a:ext>
+                  </a:extLst>
+                </a:gridCol>
+                <a:gridCol w="928383">
+                  <a:extLst>
+                    <a:ext uri="{9D8B030D-6E8A-4147-A177-3AD203B41FA5}">
+                      <a16:colId xmlns:a16="http://schemas.microsoft.com/office/drawing/2014/main" val="3705856040"/>
+                    </a:ext>
+                  </a:extLst>
+                </a:gridCol>
+                <a:gridCol w="928383">
+                  <a:extLst>
+                    <a:ext uri="{9D8B030D-6E8A-4147-A177-3AD203B41FA5}">
+                      <a16:colId xmlns:a16="http://schemas.microsoft.com/office/drawing/2014/main" val="359584382"/>
+                    </a:ext>
+                  </a:extLst>
+                </a:gridCol>
+                <a:gridCol w="928383">
+                  <a:extLst>
+                    <a:ext uri="{9D8B030D-6E8A-4147-A177-3AD203B41FA5}">
+                      <a16:colId xmlns:a16="http://schemas.microsoft.com/office/drawing/2014/main" val="3720535646"/>
+                    </a:ext>
+                  </a:extLst>
+                </a:gridCol>
+              </a:tblGrid>
+              <a:tr h="494086">
+                <a:tc>
+                  <a:txBody>
+                    <a:bodyPr/>
+                    <a:lstStyle/>
+                    <a:p>
+                      <a:pPr algn="ctr"/>
+                      <a:r>
+                        <a:rPr kumimoji="1" lang="ja-JP" altLang="en-US" dirty="0">
+                          <a:solidFill>
+                            <a:schemeClr val="bg1"/>
+                          </a:solidFill>
+                        </a:rPr>
+                        <a:t>スケジュール</a:t>
+                      </a:r>
+                    </a:p>
+                  </a:txBody>
+                  <a:tcPr>
+                    <a:lnL w="12700" cmpd="sng">
+                      <a:noFill/>
+                    </a:lnL>
+                    <a:lnR w="12700" cmpd="sng">
+                      <a:noFill/>
+                    </a:lnR>
+                    <a:lnT w="12700" cmpd="sng">
+                      <a:noFill/>
+                    </a:lnT>
+                    <a:lnB w="12700" cmpd="sng">
+                      <a:noFill/>
+                    </a:lnB>
+                    <a:lnTlToBr w="12700" cmpd="sng">
+                      <a:noFill/>
+                      <a:prstDash val="solid"/>
+                    </a:lnTlToBr>
+                    <a:lnBlToTr w="12700" cmpd="sng">
+                      <a:noFill/>
+                      <a:prstDash val="solid"/>
+                    </a:lnBlToTr>
+                    <a:solidFill>
+                      <a:srgbClr val="003366"/>
+                    </a:solidFill>
+                  </a:tcPr>
+                </a:tc>
+                <a:tc>
+                  <a:txBody>
+                    <a:bodyPr/>
+                    <a:lstStyle/>
+                    <a:p>
+                      <a:pPr algn="ctr"/>
+                      <a:r>
+                        <a:rPr kumimoji="1" lang="en-US" altLang="ja-JP" dirty="0"/>
+                        <a:t>11</a:t>
+                      </a:r>
+                      <a:r>
+                        <a:rPr kumimoji="1" lang="ja-JP" altLang="en-US" dirty="0"/>
+                        <a:t>月</a:t>
+                      </a:r>
+                    </a:p>
+                  </a:txBody>
+                  <a:tcPr>
+                    <a:lnL w="12700" cmpd="sng">
+                      <a:noFill/>
+                    </a:lnL>
+                    <a:lnR w="12700" cmpd="sng">
+                      <a:noFill/>
+                    </a:lnR>
+                    <a:lnT w="12700" cap="flat" cmpd="sng" algn="ctr">
+                      <a:solidFill>
+                        <a:schemeClr val="tx1">
+                          <a:lumMod val="50000"/>
+                          <a:lumOff val="50000"/>
+                        </a:schemeClr>
+                      </a:solidFill>
+                      <a:prstDash val="solid"/>
+                      <a:round/>
+                      <a:headEnd type="none" w="med" len="med"/>
+                      <a:tailEnd type="none" w="med" len="med"/>
+                    </a:lnT>
+                    <a:lnB w="12700" cap="flat" cmpd="sng" algn="ctr">
+                      <a:solidFill>
+                        <a:schemeClr val="tx1">
+                          <a:lumMod val="50000"/>
+                          <a:lumOff val="50000"/>
+                        </a:schemeClr>
+                      </a:solidFill>
+                      <a:prstDash val="solid"/>
+                      <a:round/>
+                      <a:headEnd type="none" w="med" len="med"/>
+                      <a:tailEnd type="none" w="med" len="med"/>
+                    </a:lnB>
+                    <a:lnTlToBr w="12700" cmpd="sng">
+                      <a:noFill/>
+                      <a:prstDash val="solid"/>
+                    </a:lnTlToBr>
+                    <a:lnBlToTr w="12700" cmpd="sng">
+                      <a:noFill/>
+                      <a:prstDash val="solid"/>
+                    </a:lnBlToTr>
+                    <a:solidFill>
+                      <a:srgbClr val="E78A35"/>
+                    </a:solidFill>
+                  </a:tcPr>
+                </a:tc>
+                <a:tc>
+                  <a:txBody>
+                    <a:bodyPr/>
+                    <a:lstStyle/>
+                    <a:p>
+                      <a:pPr algn="ctr"/>
+                      <a:r>
+                        <a:rPr kumimoji="1" lang="en-US" altLang="ja-JP" dirty="0"/>
+                        <a:t>12</a:t>
+                      </a:r>
+                      <a:r>
+                        <a:rPr kumimoji="1" lang="ja-JP" altLang="en-US" dirty="0"/>
+                        <a:t>月</a:t>
+                      </a:r>
+                    </a:p>
+                  </a:txBody>
+                  <a:tcPr>
+                    <a:lnL w="12700" cmpd="sng">
+                      <a:noFill/>
+                    </a:lnL>
+                    <a:lnR w="12700" cmpd="sng">
+                      <a:noFill/>
+                    </a:lnR>
+                    <a:lnT w="12700" cap="flat" cmpd="sng" algn="ctr">
+                      <a:solidFill>
+                        <a:schemeClr val="tx1">
+                          <a:lumMod val="50000"/>
+                          <a:lumOff val="50000"/>
+                        </a:schemeClr>
+                      </a:solidFill>
+                      <a:prstDash val="solid"/>
+                      <a:round/>
+                      <a:headEnd type="none" w="med" len="med"/>
+                      <a:tailEnd type="none" w="med" len="med"/>
+                    </a:lnT>
+                    <a:lnB w="12700" cap="flat" cmpd="sng" algn="ctr">
+                      <a:solidFill>
+                        <a:schemeClr val="tx1">
+                          <a:lumMod val="50000"/>
+                          <a:lumOff val="50000"/>
+                        </a:schemeClr>
+                      </a:solidFill>
+                      <a:prstDash val="solid"/>
+                      <a:round/>
+                      <a:headEnd type="none" w="med" len="med"/>
+                      <a:tailEnd type="none" w="med" len="med"/>
+                    </a:lnB>
+                    <a:lnTlToBr w="12700" cmpd="sng">
+                      <a:noFill/>
+                      <a:prstDash val="solid"/>
+                    </a:lnTlToBr>
+                    <a:lnBlToTr w="12700" cmpd="sng">
+                      <a:noFill/>
+                      <a:prstDash val="solid"/>
+                    </a:lnBlToTr>
+                    <a:solidFill>
+                      <a:srgbClr val="E78A35"/>
+                    </a:solidFill>
+                  </a:tcPr>
+                </a:tc>
+                <a:tc>
+                  <a:txBody>
+                    <a:bodyPr/>
+                    <a:lstStyle/>
+                    <a:p>
+                      <a:pPr algn="ctr"/>
+                      <a:r>
+                        <a:rPr kumimoji="1" lang="en-US" altLang="ja-JP" dirty="0"/>
+                        <a:t>1</a:t>
+                      </a:r>
+                      <a:r>
+                        <a:rPr kumimoji="1" lang="ja-JP" altLang="en-US" dirty="0"/>
+                        <a:t>月</a:t>
+                      </a:r>
+                    </a:p>
+                  </a:txBody>
+                  <a:tcPr>
+                    <a:lnL w="12700" cmpd="sng">
+                      <a:noFill/>
+                    </a:lnL>
+                    <a:lnR w="12700" cmpd="sng">
+                      <a:noFill/>
+                    </a:lnR>
+                    <a:lnT w="12700" cap="flat" cmpd="sng" algn="ctr">
+                      <a:solidFill>
+                        <a:schemeClr val="tx1">
+                          <a:lumMod val="50000"/>
+                          <a:lumOff val="50000"/>
+                        </a:schemeClr>
+                      </a:solidFill>
+                      <a:prstDash val="solid"/>
+                      <a:round/>
+                      <a:headEnd type="none" w="med" len="med"/>
+                      <a:tailEnd type="none" w="med" len="med"/>
+                    </a:lnT>
+                    <a:lnB w="12700" cap="flat" cmpd="sng" algn="ctr">
+                      <a:solidFill>
+                        <a:schemeClr val="tx1">
+                          <a:lumMod val="50000"/>
+                          <a:lumOff val="50000"/>
+                        </a:schemeClr>
+                      </a:solidFill>
+                      <a:prstDash val="solid"/>
+                      <a:round/>
+                      <a:headEnd type="none" w="med" len="med"/>
+                      <a:tailEnd type="none" w="med" len="med"/>
+                    </a:lnB>
+                    <a:lnTlToBr w="12700" cmpd="sng">
+                      <a:noFill/>
+                      <a:prstDash val="solid"/>
+                    </a:lnTlToBr>
+                    <a:lnBlToTr w="12700" cmpd="sng">
+                      <a:noFill/>
+                      <a:prstDash val="solid"/>
+                    </a:lnBlToTr>
+                    <a:solidFill>
+                      <a:srgbClr val="E78A35"/>
+                    </a:solidFill>
+                  </a:tcPr>
+                </a:tc>
+                <a:extLst>
+                  <a:ext uri="{0D108BD9-81ED-4DB2-BD59-A6C34878D82A}">
+                    <a16:rowId xmlns:a16="http://schemas.microsoft.com/office/drawing/2014/main" val="2787763738"/>
+                  </a:ext>
+                </a:extLst>
+              </a:tr>
+              <a:tr h="614435">
+                <a:tc>
+                  <a:txBody>
+                    <a:bodyPr/>
+                    <a:lstStyle/>
+                    <a:p>
+                      <a:pPr algn="ctr"/>
+                      <a:r>
+                        <a:rPr kumimoji="1" lang="ja-JP" altLang="en-US" dirty="0">
+                          <a:solidFill>
+                            <a:schemeClr val="bg1"/>
+                          </a:solidFill>
+                        </a:rPr>
+                        <a:t>基板設計</a:t>
+                      </a:r>
+                    </a:p>
+                  </a:txBody>
+                  <a:tcPr>
+                    <a:lnL w="12700" cmpd="sng">
+                      <a:noFill/>
+                    </a:lnL>
+                    <a:lnR w="12700" cap="flat" cmpd="sng" algn="ctr">
+                      <a:solidFill>
+                        <a:schemeClr val="tx1">
+                          <a:lumMod val="50000"/>
+                          <a:lumOff val="50000"/>
+                        </a:schemeClr>
+                      </a:solidFill>
+                      <a:prstDash val="solid"/>
+                      <a:round/>
+                      <a:headEnd type="none" w="med" len="med"/>
+                      <a:tailEnd type="none" w="med" len="med"/>
+                    </a:lnR>
+                    <a:lnT w="12700" cmpd="sng">
+                      <a:noFill/>
+                    </a:lnT>
+                    <a:lnB w="12700" cmpd="sng">
+                      <a:noFill/>
+                    </a:lnB>
+                    <a:lnTlToBr w="12700" cmpd="sng">
+                      <a:noFill/>
+                      <a:prstDash val="solid"/>
+                    </a:lnTlToBr>
+                    <a:lnBlToTr w="12700" cmpd="sng">
+                      <a:noFill/>
+                      <a:prstDash val="solid"/>
+                    </a:lnBlToTr>
+                    <a:solidFill>
+                      <a:srgbClr val="EBAE15"/>
+                    </a:solidFill>
+                  </a:tcPr>
+                </a:tc>
+                <a:tc>
+                  <a:txBody>
+                    <a:bodyPr/>
+                    <a:lstStyle/>
+                    <a:p>
+                      <a:endParaRPr kumimoji="1" lang="ja-JP" altLang="en-US" dirty="0"/>
+                    </a:p>
+                  </a:txBody>
+                  <a:tcPr>
+                    <a:lnL w="12700" cap="flat" cmpd="sng" algn="ctr">
+                      <a:solidFill>
+                        <a:schemeClr val="tx1">
+                          <a:lumMod val="50000"/>
+                          <a:lumOff val="50000"/>
+                        </a:schemeClr>
+                      </a:solidFill>
+                      <a:prstDash val="solid"/>
+                      <a:round/>
+                      <a:headEnd type="none" w="med" len="med"/>
+                      <a:tailEnd type="none" w="med" len="med"/>
+                    </a:lnL>
+                    <a:lnR w="12700" cap="flat" cmpd="sng" algn="ctr">
+                      <a:solidFill>
+                        <a:schemeClr val="tx1">
+                          <a:lumMod val="50000"/>
+                          <a:lumOff val="50000"/>
+                        </a:schemeClr>
+                      </a:solidFill>
+                      <a:prstDash val="solid"/>
+                      <a:round/>
+                      <a:headEnd type="none" w="med" len="med"/>
+                      <a:tailEnd type="none" w="med" len="med"/>
+                    </a:lnR>
+                    <a:lnT w="12700" cap="flat" cmpd="sng" algn="ctr">
+                      <a:solidFill>
+                        <a:schemeClr val="tx1">
+                          <a:lumMod val="50000"/>
+                          <a:lumOff val="50000"/>
+                        </a:schemeClr>
+                      </a:solidFill>
+                      <a:prstDash val="solid"/>
+                      <a:round/>
+                      <a:headEnd type="none" w="med" len="med"/>
+                      <a:tailEnd type="none" w="med" len="med"/>
+                    </a:lnT>
+                    <a:lnB w="12700" cap="flat" cmpd="sng" algn="ctr">
+                      <a:solidFill>
+                        <a:schemeClr val="tx1">
+                          <a:lumMod val="50000"/>
+                          <a:lumOff val="50000"/>
+                        </a:schemeClr>
+                      </a:solidFill>
+                      <a:prstDash val="solid"/>
+                      <a:round/>
+                      <a:headEnd type="none" w="med" len="med"/>
+                      <a:tailEnd type="none" w="med" len="med"/>
+                    </a:lnB>
+                    <a:lnTlToBr w="12700" cmpd="sng">
+                      <a:noFill/>
+                      <a:prstDash val="solid"/>
+                    </a:lnTlToBr>
+                    <a:lnBlToTr w="12700" cmpd="sng">
+                      <a:noFill/>
+                      <a:prstDash val="solid"/>
+                    </a:lnBlToTr>
+                    <a:solidFill>
+                      <a:schemeClr val="bg1"/>
+                    </a:solidFill>
+                  </a:tcPr>
+                </a:tc>
+                <a:tc>
+                  <a:txBody>
+                    <a:bodyPr/>
+                    <a:lstStyle/>
+                    <a:p>
+                      <a:endParaRPr kumimoji="1" lang="ja-JP" altLang="en-US" dirty="0"/>
+                    </a:p>
+                  </a:txBody>
+                  <a:tcPr>
+                    <a:lnL w="12700" cap="flat" cmpd="sng" algn="ctr">
+                      <a:solidFill>
+                        <a:schemeClr val="tx1">
+                          <a:lumMod val="50000"/>
+                          <a:lumOff val="50000"/>
+                        </a:schemeClr>
+                      </a:solidFill>
+                      <a:prstDash val="solid"/>
+                      <a:round/>
+                      <a:headEnd type="none" w="med" len="med"/>
+                      <a:tailEnd type="none" w="med" len="med"/>
+                    </a:lnL>
+                    <a:lnR w="12700" cap="flat" cmpd="sng" algn="ctr">
+                      <a:solidFill>
+                        <a:schemeClr val="tx1">
+                          <a:lumMod val="50000"/>
+                          <a:lumOff val="50000"/>
+                        </a:schemeClr>
+                      </a:solidFill>
+                      <a:prstDash val="solid"/>
+                      <a:round/>
+                      <a:headEnd type="none" w="med" len="med"/>
+                      <a:tailEnd type="none" w="med" len="med"/>
+                    </a:lnR>
+                    <a:lnT w="12700" cap="flat" cmpd="sng" algn="ctr">
+                      <a:solidFill>
+                        <a:schemeClr val="tx1">
+                          <a:lumMod val="50000"/>
+                          <a:lumOff val="50000"/>
+                        </a:schemeClr>
+                      </a:solidFill>
+                      <a:prstDash val="solid"/>
+                      <a:round/>
+                      <a:headEnd type="none" w="med" len="med"/>
+                      <a:tailEnd type="none" w="med" len="med"/>
+                    </a:lnT>
+                    <a:lnB w="12700" cap="flat" cmpd="sng" algn="ctr">
+                      <a:solidFill>
+                        <a:schemeClr val="tx1">
+                          <a:lumMod val="50000"/>
+                          <a:lumOff val="50000"/>
+                        </a:schemeClr>
+                      </a:solidFill>
+                      <a:prstDash val="solid"/>
+                      <a:round/>
+                      <a:headEnd type="none" w="med" len="med"/>
+                      <a:tailEnd type="none" w="med" len="med"/>
+                    </a:lnB>
+                    <a:lnTlToBr w="12700" cmpd="sng">
+                      <a:noFill/>
+                      <a:prstDash val="solid"/>
+                    </a:lnTlToBr>
+                    <a:lnBlToTr w="12700" cmpd="sng">
+                      <a:noFill/>
+                      <a:prstDash val="solid"/>
+                    </a:lnBlToTr>
+                    <a:solidFill>
+                      <a:schemeClr val="bg1"/>
+                    </a:solidFill>
+                  </a:tcPr>
+                </a:tc>
+                <a:tc>
+                  <a:txBody>
+                    <a:bodyPr/>
+                    <a:lstStyle/>
+                    <a:p>
+                      <a:endParaRPr kumimoji="1" lang="ja-JP" altLang="en-US" dirty="0"/>
+                    </a:p>
+                  </a:txBody>
+                  <a:tcPr>
+                    <a:lnL w="12700" cap="flat" cmpd="sng" algn="ctr">
+                      <a:solidFill>
+                        <a:schemeClr val="tx1">
+                          <a:lumMod val="50000"/>
+                          <a:lumOff val="50000"/>
+                        </a:schemeClr>
+                      </a:solidFill>
+                      <a:prstDash val="solid"/>
+                      <a:round/>
+                      <a:headEnd type="none" w="med" len="med"/>
+                      <a:tailEnd type="none" w="med" len="med"/>
+                    </a:lnL>
+                    <a:lnR w="12700" cap="flat" cmpd="sng" algn="ctr">
+                      <a:solidFill>
+                        <a:schemeClr val="tx1">
+                          <a:lumMod val="50000"/>
+                          <a:lumOff val="50000"/>
+                        </a:schemeClr>
+                      </a:solidFill>
+                      <a:prstDash val="solid"/>
+                      <a:round/>
+                      <a:headEnd type="none" w="med" len="med"/>
+                      <a:tailEnd type="none" w="med" len="med"/>
+                    </a:lnR>
+                    <a:lnT w="12700" cap="flat" cmpd="sng" algn="ctr">
+                      <a:solidFill>
+                        <a:schemeClr val="tx1">
+                          <a:lumMod val="50000"/>
+                          <a:lumOff val="50000"/>
+                        </a:schemeClr>
+                      </a:solidFill>
+                      <a:prstDash val="solid"/>
+                      <a:round/>
+                      <a:headEnd type="none" w="med" len="med"/>
+                      <a:tailEnd type="none" w="med" len="med"/>
+                    </a:lnT>
+                    <a:lnB w="12700" cap="flat" cmpd="sng" algn="ctr">
+                      <a:solidFill>
+                        <a:schemeClr val="tx1">
+                          <a:lumMod val="50000"/>
+                          <a:lumOff val="50000"/>
+                        </a:schemeClr>
+                      </a:solidFill>
+                      <a:prstDash val="solid"/>
+                      <a:round/>
+                      <a:headEnd type="none" w="med" len="med"/>
+                      <a:tailEnd type="none" w="med" len="med"/>
+                    </a:lnB>
+                    <a:lnTlToBr w="12700" cmpd="sng">
+                      <a:noFill/>
+                      <a:prstDash val="solid"/>
+                    </a:lnTlToBr>
+                    <a:lnBlToTr w="12700" cmpd="sng">
+                      <a:noFill/>
+                      <a:prstDash val="solid"/>
+                    </a:lnBlToTr>
+                    <a:solidFill>
+                      <a:schemeClr val="bg1"/>
+                    </a:solidFill>
+                  </a:tcPr>
+                </a:tc>
+                <a:extLst>
+                  <a:ext uri="{0D108BD9-81ED-4DB2-BD59-A6C34878D82A}">
+                    <a16:rowId xmlns:a16="http://schemas.microsoft.com/office/drawing/2014/main" val="1339874035"/>
+                  </a:ext>
+                </a:extLst>
+              </a:tr>
+              <a:tr h="614435">
+                <a:tc>
+                  <a:txBody>
+                    <a:bodyPr/>
+                    <a:lstStyle/>
+                    <a:p>
+                      <a:pPr algn="ctr"/>
+                      <a:r>
+                        <a:rPr kumimoji="1" lang="ja-JP" altLang="en-US" dirty="0">
+                          <a:solidFill>
+                            <a:schemeClr val="bg1"/>
+                          </a:solidFill>
+                        </a:rPr>
+                        <a:t>機体設計</a:t>
+                      </a:r>
+                    </a:p>
+                  </a:txBody>
+                  <a:tcPr>
+                    <a:lnL w="12700" cmpd="sng">
+                      <a:noFill/>
+                    </a:lnL>
+                    <a:lnR w="12700" cap="flat" cmpd="sng" algn="ctr">
+                      <a:solidFill>
+                        <a:schemeClr val="tx1">
+                          <a:lumMod val="50000"/>
+                          <a:lumOff val="50000"/>
+                        </a:schemeClr>
+                      </a:solidFill>
+                      <a:prstDash val="solid"/>
+                      <a:round/>
+                      <a:headEnd type="none" w="med" len="med"/>
+                      <a:tailEnd type="none" w="med" len="med"/>
+                    </a:lnR>
+                    <a:lnT w="12700" cmpd="sng">
+                      <a:noFill/>
+                    </a:lnT>
+                    <a:lnB w="12700" cmpd="sng">
+                      <a:noFill/>
+                    </a:lnB>
+                    <a:lnTlToBr w="12700" cmpd="sng">
+                      <a:noFill/>
+                      <a:prstDash val="solid"/>
+                    </a:lnTlToBr>
+                    <a:lnBlToTr w="12700" cmpd="sng">
+                      <a:noFill/>
+                      <a:prstDash val="solid"/>
+                    </a:lnBlToTr>
+                    <a:solidFill>
+                      <a:srgbClr val="006699"/>
+                    </a:solidFill>
+                  </a:tcPr>
+                </a:tc>
+                <a:tc>
+                  <a:txBody>
+                    <a:bodyPr/>
+                    <a:lstStyle/>
+                    <a:p>
+                      <a:endParaRPr kumimoji="1" lang="ja-JP" altLang="en-US" dirty="0"/>
+                    </a:p>
+                  </a:txBody>
+                  <a:tcPr>
+                    <a:lnL w="12700" cap="flat" cmpd="sng" algn="ctr">
+                      <a:solidFill>
+                        <a:schemeClr val="tx1">
+                          <a:lumMod val="50000"/>
+                          <a:lumOff val="50000"/>
+                        </a:schemeClr>
+                      </a:solidFill>
+                      <a:prstDash val="solid"/>
+                      <a:round/>
+                      <a:headEnd type="none" w="med" len="med"/>
+                      <a:tailEnd type="none" w="med" len="med"/>
+                    </a:lnL>
+                    <a:lnR w="12700" cap="flat" cmpd="sng" algn="ctr">
+                      <a:solidFill>
+                        <a:schemeClr val="tx1">
+                          <a:lumMod val="50000"/>
+                          <a:lumOff val="50000"/>
+                        </a:schemeClr>
+                      </a:solidFill>
+                      <a:prstDash val="solid"/>
+                      <a:round/>
+                      <a:headEnd type="none" w="med" len="med"/>
+                      <a:tailEnd type="none" w="med" len="med"/>
+                    </a:lnR>
+                    <a:lnT w="12700" cap="flat" cmpd="sng" algn="ctr">
+                      <a:solidFill>
+                        <a:schemeClr val="tx1">
+                          <a:lumMod val="50000"/>
+                          <a:lumOff val="50000"/>
+                        </a:schemeClr>
+                      </a:solidFill>
+                      <a:prstDash val="solid"/>
+                      <a:round/>
+                      <a:headEnd type="none" w="med" len="med"/>
+                      <a:tailEnd type="none" w="med" len="med"/>
+                    </a:lnT>
+                    <a:lnB w="12700" cap="flat" cmpd="sng" algn="ctr">
+                      <a:solidFill>
+                        <a:schemeClr val="tx1">
+                          <a:lumMod val="50000"/>
+                          <a:lumOff val="50000"/>
+                        </a:schemeClr>
+                      </a:solidFill>
+                      <a:prstDash val="solid"/>
+                      <a:round/>
+                      <a:headEnd type="none" w="med" len="med"/>
+                      <a:tailEnd type="none" w="med" len="med"/>
+                    </a:lnB>
+                    <a:lnTlToBr w="12700" cmpd="sng">
+                      <a:noFill/>
+                      <a:prstDash val="solid"/>
+                    </a:lnTlToBr>
+                    <a:lnBlToTr w="12700" cmpd="sng">
+                      <a:noFill/>
+                      <a:prstDash val="solid"/>
+                    </a:lnBlToTr>
+                    <a:solidFill>
+                      <a:schemeClr val="bg1"/>
+                    </a:solidFill>
+                  </a:tcPr>
+                </a:tc>
+                <a:tc>
+                  <a:txBody>
+                    <a:bodyPr/>
+                    <a:lstStyle/>
+                    <a:p>
+                      <a:endParaRPr kumimoji="1" lang="ja-JP" altLang="en-US" dirty="0"/>
+                    </a:p>
+                  </a:txBody>
+                  <a:tcPr>
+                    <a:lnL w="12700" cap="flat" cmpd="sng" algn="ctr">
+                      <a:solidFill>
+                        <a:schemeClr val="tx1">
+                          <a:lumMod val="50000"/>
+                          <a:lumOff val="50000"/>
+                        </a:schemeClr>
+                      </a:solidFill>
+                      <a:prstDash val="solid"/>
+                      <a:round/>
+                      <a:headEnd type="none" w="med" len="med"/>
+                      <a:tailEnd type="none" w="med" len="med"/>
+                    </a:lnL>
+                    <a:lnR w="12700" cap="flat" cmpd="sng" algn="ctr">
+                      <a:solidFill>
+                        <a:schemeClr val="tx1">
+                          <a:lumMod val="50000"/>
+                          <a:lumOff val="50000"/>
+                        </a:schemeClr>
+                      </a:solidFill>
+                      <a:prstDash val="solid"/>
+                      <a:round/>
+                      <a:headEnd type="none" w="med" len="med"/>
+                      <a:tailEnd type="none" w="med" len="med"/>
+                    </a:lnR>
+                    <a:lnT w="12700" cap="flat" cmpd="sng" algn="ctr">
+                      <a:solidFill>
+                        <a:schemeClr val="tx1">
+                          <a:lumMod val="50000"/>
+                          <a:lumOff val="50000"/>
+                        </a:schemeClr>
+                      </a:solidFill>
+                      <a:prstDash val="solid"/>
+                      <a:round/>
+                      <a:headEnd type="none" w="med" len="med"/>
+                      <a:tailEnd type="none" w="med" len="med"/>
+                    </a:lnT>
+                    <a:lnB w="12700" cap="flat" cmpd="sng" algn="ctr">
+                      <a:solidFill>
+                        <a:schemeClr val="tx1">
+                          <a:lumMod val="50000"/>
+                          <a:lumOff val="50000"/>
+                        </a:schemeClr>
+                      </a:solidFill>
+                      <a:prstDash val="solid"/>
+                      <a:round/>
+                      <a:headEnd type="none" w="med" len="med"/>
+                      <a:tailEnd type="none" w="med" len="med"/>
+                    </a:lnB>
+                    <a:lnTlToBr w="12700" cmpd="sng">
+                      <a:noFill/>
+                      <a:prstDash val="solid"/>
+                    </a:lnTlToBr>
+                    <a:lnBlToTr w="12700" cmpd="sng">
+                      <a:noFill/>
+                      <a:prstDash val="solid"/>
+                    </a:lnBlToTr>
+                    <a:solidFill>
+                      <a:schemeClr val="bg1"/>
+                    </a:solidFill>
+                  </a:tcPr>
+                </a:tc>
+                <a:tc>
+                  <a:txBody>
+                    <a:bodyPr/>
+                    <a:lstStyle/>
+                    <a:p>
+                      <a:endParaRPr kumimoji="1" lang="ja-JP" altLang="en-US" dirty="0"/>
+                    </a:p>
+                  </a:txBody>
+                  <a:tcPr>
+                    <a:lnL w="12700" cap="flat" cmpd="sng" algn="ctr">
+                      <a:solidFill>
+                        <a:schemeClr val="tx1">
+                          <a:lumMod val="50000"/>
+                          <a:lumOff val="50000"/>
+                        </a:schemeClr>
+                      </a:solidFill>
+                      <a:prstDash val="solid"/>
+                      <a:round/>
+                      <a:headEnd type="none" w="med" len="med"/>
+                      <a:tailEnd type="none" w="med" len="med"/>
+                    </a:lnL>
+                    <a:lnR w="12700" cap="flat" cmpd="sng" algn="ctr">
+                      <a:solidFill>
+                        <a:schemeClr val="tx1">
+                          <a:lumMod val="50000"/>
+                          <a:lumOff val="50000"/>
+                        </a:schemeClr>
+                      </a:solidFill>
+                      <a:prstDash val="solid"/>
+                      <a:round/>
+                      <a:headEnd type="none" w="med" len="med"/>
+                      <a:tailEnd type="none" w="med" len="med"/>
+                    </a:lnR>
+                    <a:lnT w="12700" cap="flat" cmpd="sng" algn="ctr">
+                      <a:solidFill>
+                        <a:schemeClr val="tx1">
+                          <a:lumMod val="50000"/>
+                          <a:lumOff val="50000"/>
+                        </a:schemeClr>
+                      </a:solidFill>
+                      <a:prstDash val="solid"/>
+                      <a:round/>
+                      <a:headEnd type="none" w="med" len="med"/>
+                      <a:tailEnd type="none" w="med" len="med"/>
+                    </a:lnT>
+                    <a:lnB w="12700" cap="flat" cmpd="sng" algn="ctr">
+                      <a:solidFill>
+                        <a:schemeClr val="tx1">
+                          <a:lumMod val="50000"/>
+                          <a:lumOff val="50000"/>
+                        </a:schemeClr>
+                      </a:solidFill>
+                      <a:prstDash val="solid"/>
+                      <a:round/>
+                      <a:headEnd type="none" w="med" len="med"/>
+                      <a:tailEnd type="none" w="med" len="med"/>
+                    </a:lnB>
+                    <a:lnTlToBr w="12700" cmpd="sng">
+                      <a:noFill/>
+                      <a:prstDash val="solid"/>
+                    </a:lnTlToBr>
+                    <a:lnBlToTr w="12700" cmpd="sng">
+                      <a:noFill/>
+                      <a:prstDash val="solid"/>
+                    </a:lnBlToTr>
+                    <a:solidFill>
+                      <a:schemeClr val="bg1"/>
+                    </a:solidFill>
+                  </a:tcPr>
+                </a:tc>
+                <a:extLst>
+                  <a:ext uri="{0D108BD9-81ED-4DB2-BD59-A6C34878D82A}">
+                    <a16:rowId xmlns:a16="http://schemas.microsoft.com/office/drawing/2014/main" val="1387061734"/>
+                  </a:ext>
+                </a:extLst>
+              </a:tr>
+              <a:tr h="614435">
+                <a:tc>
+                  <a:txBody>
+                    <a:bodyPr/>
+                    <a:lstStyle/>
+                    <a:p>
+                      <a:pPr algn="ctr"/>
+                      <a:r>
+                        <a:rPr kumimoji="1" lang="ja-JP" altLang="en-US" dirty="0">
+                          <a:solidFill>
+                            <a:schemeClr val="bg1"/>
+                          </a:solidFill>
+                        </a:rPr>
+                        <a:t>プログラム</a:t>
+                      </a:r>
+                    </a:p>
+                  </a:txBody>
+                  <a:tcPr>
+                    <a:lnL w="12700" cmpd="sng">
+                      <a:noFill/>
+                    </a:lnL>
+                    <a:lnR w="12700" cap="flat" cmpd="sng" algn="ctr">
+                      <a:solidFill>
+                        <a:schemeClr val="tx1">
+                          <a:lumMod val="50000"/>
+                          <a:lumOff val="50000"/>
+                        </a:schemeClr>
+                      </a:solidFill>
+                      <a:prstDash val="solid"/>
+                      <a:round/>
+                      <a:headEnd type="none" w="med" len="med"/>
+                      <a:tailEnd type="none" w="med" len="med"/>
+                    </a:lnR>
+                    <a:lnT w="12700" cmpd="sng">
+                      <a:noFill/>
+                    </a:lnT>
+                    <a:lnB w="12700" cmpd="sng">
+                      <a:noFill/>
+                    </a:lnB>
+                    <a:lnTlToBr w="12700" cmpd="sng">
+                      <a:noFill/>
+                      <a:prstDash val="solid"/>
+                    </a:lnTlToBr>
+                    <a:lnBlToTr w="12700" cmpd="sng">
+                      <a:noFill/>
+                      <a:prstDash val="solid"/>
+                    </a:lnBlToTr>
+                    <a:solidFill>
+                      <a:srgbClr val="AA0AB2"/>
+                    </a:solidFill>
+                  </a:tcPr>
+                </a:tc>
+                <a:tc>
+                  <a:txBody>
+                    <a:bodyPr/>
+                    <a:lstStyle/>
+                    <a:p>
+                      <a:endParaRPr kumimoji="1" lang="ja-JP" altLang="en-US" dirty="0"/>
+                    </a:p>
+                  </a:txBody>
+                  <a:tcPr>
+                    <a:lnL w="12700" cap="flat" cmpd="sng" algn="ctr">
+                      <a:solidFill>
+                        <a:schemeClr val="tx1">
+                          <a:lumMod val="50000"/>
+                          <a:lumOff val="50000"/>
+                        </a:schemeClr>
+                      </a:solidFill>
+                      <a:prstDash val="solid"/>
+                      <a:round/>
+                      <a:headEnd type="none" w="med" len="med"/>
+                      <a:tailEnd type="none" w="med" len="med"/>
+                    </a:lnL>
+                    <a:lnR w="12700" cap="flat" cmpd="sng" algn="ctr">
+                      <a:solidFill>
+                        <a:schemeClr val="tx1">
+                          <a:lumMod val="50000"/>
+                          <a:lumOff val="50000"/>
+                        </a:schemeClr>
+                      </a:solidFill>
+                      <a:prstDash val="solid"/>
+                      <a:round/>
+                      <a:headEnd type="none" w="med" len="med"/>
+                      <a:tailEnd type="none" w="med" len="med"/>
+                    </a:lnR>
+                    <a:lnT w="12700" cap="flat" cmpd="sng" algn="ctr">
+                      <a:solidFill>
+                        <a:schemeClr val="tx1">
+                          <a:lumMod val="50000"/>
+                          <a:lumOff val="50000"/>
+                        </a:schemeClr>
+                      </a:solidFill>
+                      <a:prstDash val="solid"/>
+                      <a:round/>
+                      <a:headEnd type="none" w="med" len="med"/>
+                      <a:tailEnd type="none" w="med" len="med"/>
+                    </a:lnT>
+                    <a:lnB w="12700" cap="flat" cmpd="sng" algn="ctr">
+                      <a:solidFill>
+                        <a:schemeClr val="tx1">
+                          <a:lumMod val="50000"/>
+                          <a:lumOff val="50000"/>
+                        </a:schemeClr>
+                      </a:solidFill>
+                      <a:prstDash val="solid"/>
+                      <a:round/>
+                      <a:headEnd type="none" w="med" len="med"/>
+                      <a:tailEnd type="none" w="med" len="med"/>
+                    </a:lnB>
+                    <a:lnTlToBr w="12700" cmpd="sng">
+                      <a:noFill/>
+                      <a:prstDash val="solid"/>
+                    </a:lnTlToBr>
+                    <a:lnBlToTr w="12700" cmpd="sng">
+                      <a:noFill/>
+                      <a:prstDash val="solid"/>
+                    </a:lnBlToTr>
+                    <a:solidFill>
+                      <a:schemeClr val="bg1"/>
+                    </a:solidFill>
+                  </a:tcPr>
+                </a:tc>
+                <a:tc>
+                  <a:txBody>
+                    <a:bodyPr/>
+                    <a:lstStyle/>
+                    <a:p>
+                      <a:endParaRPr kumimoji="1" lang="ja-JP" altLang="en-US" dirty="0"/>
+                    </a:p>
+                  </a:txBody>
+                  <a:tcPr>
+                    <a:lnL w="12700" cap="flat" cmpd="sng" algn="ctr">
+                      <a:solidFill>
+                        <a:schemeClr val="tx1">
+                          <a:lumMod val="50000"/>
+                          <a:lumOff val="50000"/>
+                        </a:schemeClr>
+                      </a:solidFill>
+                      <a:prstDash val="solid"/>
+                      <a:round/>
+                      <a:headEnd type="none" w="med" len="med"/>
+                      <a:tailEnd type="none" w="med" len="med"/>
+                    </a:lnL>
+                    <a:lnR w="12700" cap="flat" cmpd="sng" algn="ctr">
+                      <a:solidFill>
+                        <a:schemeClr val="tx1">
+                          <a:lumMod val="50000"/>
+                          <a:lumOff val="50000"/>
+                        </a:schemeClr>
+                      </a:solidFill>
+                      <a:prstDash val="solid"/>
+                      <a:round/>
+                      <a:headEnd type="none" w="med" len="med"/>
+                      <a:tailEnd type="none" w="med" len="med"/>
+                    </a:lnR>
+                    <a:lnT w="12700" cap="flat" cmpd="sng" algn="ctr">
+                      <a:solidFill>
+                        <a:schemeClr val="tx1">
+                          <a:lumMod val="50000"/>
+                          <a:lumOff val="50000"/>
+                        </a:schemeClr>
+                      </a:solidFill>
+                      <a:prstDash val="solid"/>
+                      <a:round/>
+                      <a:headEnd type="none" w="med" len="med"/>
+                      <a:tailEnd type="none" w="med" len="med"/>
+                    </a:lnT>
+                    <a:lnB w="12700" cap="flat" cmpd="sng" algn="ctr">
+                      <a:solidFill>
+                        <a:schemeClr val="tx1">
+                          <a:lumMod val="50000"/>
+                          <a:lumOff val="50000"/>
+                        </a:schemeClr>
+                      </a:solidFill>
+                      <a:prstDash val="solid"/>
+                      <a:round/>
+                      <a:headEnd type="none" w="med" len="med"/>
+                      <a:tailEnd type="none" w="med" len="med"/>
+                    </a:lnB>
+                    <a:lnTlToBr w="12700" cmpd="sng">
+                      <a:noFill/>
+                      <a:prstDash val="solid"/>
+                    </a:lnTlToBr>
+                    <a:lnBlToTr w="12700" cmpd="sng">
+                      <a:noFill/>
+                      <a:prstDash val="solid"/>
+                    </a:lnBlToTr>
+                    <a:solidFill>
+                      <a:schemeClr val="bg1"/>
+                    </a:solidFill>
+                  </a:tcPr>
+                </a:tc>
+                <a:tc>
+                  <a:txBody>
+                    <a:bodyPr/>
+                    <a:lstStyle/>
+                    <a:p>
+                      <a:endParaRPr kumimoji="1" lang="ja-JP" altLang="en-US" dirty="0"/>
+                    </a:p>
+                  </a:txBody>
+                  <a:tcPr>
+                    <a:lnL w="12700" cap="flat" cmpd="sng" algn="ctr">
+                      <a:solidFill>
+                        <a:schemeClr val="tx1">
+                          <a:lumMod val="50000"/>
+                          <a:lumOff val="50000"/>
+                        </a:schemeClr>
+                      </a:solidFill>
+                      <a:prstDash val="solid"/>
+                      <a:round/>
+                      <a:headEnd type="none" w="med" len="med"/>
+                      <a:tailEnd type="none" w="med" len="med"/>
+                    </a:lnL>
+                    <a:lnR w="12700" cap="flat" cmpd="sng" algn="ctr">
+                      <a:solidFill>
+                        <a:schemeClr val="tx1">
+                          <a:lumMod val="50000"/>
+                          <a:lumOff val="50000"/>
+                        </a:schemeClr>
+                      </a:solidFill>
+                      <a:prstDash val="solid"/>
+                      <a:round/>
+                      <a:headEnd type="none" w="med" len="med"/>
+                      <a:tailEnd type="none" w="med" len="med"/>
+                    </a:lnR>
+                    <a:lnT w="12700" cap="flat" cmpd="sng" algn="ctr">
+                      <a:solidFill>
+                        <a:schemeClr val="tx1">
+                          <a:lumMod val="50000"/>
+                          <a:lumOff val="50000"/>
+                        </a:schemeClr>
+                      </a:solidFill>
+                      <a:prstDash val="solid"/>
+                      <a:round/>
+                      <a:headEnd type="none" w="med" len="med"/>
+                      <a:tailEnd type="none" w="med" len="med"/>
+                    </a:lnT>
+                    <a:lnB w="12700" cap="flat" cmpd="sng" algn="ctr">
+                      <a:solidFill>
+                        <a:schemeClr val="tx1">
+                          <a:lumMod val="50000"/>
+                          <a:lumOff val="50000"/>
+                        </a:schemeClr>
+                      </a:solidFill>
+                      <a:prstDash val="solid"/>
+                      <a:round/>
+                      <a:headEnd type="none" w="med" len="med"/>
+                      <a:tailEnd type="none" w="med" len="med"/>
+                    </a:lnB>
+                    <a:lnTlToBr w="12700" cmpd="sng">
+                      <a:noFill/>
+                      <a:prstDash val="solid"/>
+                    </a:lnTlToBr>
+                    <a:lnBlToTr w="12700" cmpd="sng">
+                      <a:noFill/>
+                      <a:prstDash val="solid"/>
+                    </a:lnBlToTr>
+                    <a:solidFill>
+                      <a:schemeClr val="bg1"/>
+                    </a:solidFill>
+                  </a:tcPr>
+                </a:tc>
+                <a:extLst>
+                  <a:ext uri="{0D108BD9-81ED-4DB2-BD59-A6C34878D82A}">
+                    <a16:rowId xmlns:a16="http://schemas.microsoft.com/office/drawing/2014/main" val="2975965372"/>
+                  </a:ext>
+                </a:extLst>
+              </a:tr>
+            </a:tbl>
+          </a:graphicData>
+        </a:graphic>
+      </p:graphicFrame>
+      <p:cxnSp>
+        <p:nvCxnSpPr>
+          <p:cNvPr id="5" name="直線コネクタ 4">
+            <a:extLst>
+              <a:ext uri="{FF2B5EF4-FFF2-40B4-BE49-F238E27FC236}">
+                <a16:creationId xmlns:a16="http://schemas.microsoft.com/office/drawing/2014/main" id="{9A6164F8-D917-FCCF-6DE4-25561CAE6D52}"/>
+              </a:ext>
+            </a:extLst>
+          </p:cNvPr>
+          <p:cNvCxnSpPr>
+            <a:cxnSpLocks/>
+          </p:cNvCxnSpPr>
+          <p:nvPr/>
+        </p:nvCxnSpPr>
+        <p:spPr>
+          <a:xfrm>
+            <a:off x="2168983" y="2214702"/>
+            <a:ext cx="552450" cy="0"/>
+          </a:xfrm>
+          <a:prstGeom prst="line">
+            <a:avLst/>
+          </a:prstGeom>
+          <a:ln w="25400">
+            <a:solidFill>
+              <a:srgbClr val="006699"/>
+            </a:solidFill>
+            <a:headEnd type="oval"/>
+            <a:tailEnd type="oval"/>
+          </a:ln>
+        </p:spPr>
+        <p:style>
+          <a:lnRef idx="1">
+            <a:schemeClr val="accent1"/>
+          </a:lnRef>
+          <a:fillRef idx="0">
+            <a:schemeClr val="accent1"/>
+          </a:fillRef>
+          <a:effectRef idx="0">
+            <a:schemeClr val="accent1"/>
+          </a:effectRef>
+          <a:fontRef idx="minor">
+            <a:schemeClr val="tx1"/>
+          </a:fontRef>
+        </p:style>
+      </p:cxnSp>
+      <p:sp>
+        <p:nvSpPr>
+          <p:cNvPr id="6" name="テキスト ボックス 5">
+            <a:extLst>
+              <a:ext uri="{FF2B5EF4-FFF2-40B4-BE49-F238E27FC236}">
+                <a16:creationId xmlns:a16="http://schemas.microsoft.com/office/drawing/2014/main" id="{46EDFE20-D8EB-2547-D44E-FCB65813A9B5}"/>
+              </a:ext>
+            </a:extLst>
+          </p:cNvPr>
+          <p:cNvSpPr txBox="1"/>
+          <p:nvPr/>
+        </p:nvSpPr>
+        <p:spPr>
+          <a:xfrm>
+            <a:off x="2106119" y="2230924"/>
+            <a:ext cx="579314" cy="400110"/>
+          </a:xfrm>
+          <a:prstGeom prst="rect">
+            <a:avLst/>
+          </a:prstGeom>
+          <a:noFill/>
+        </p:spPr>
+        <p:txBody>
+          <a:bodyPr wrap="square" rtlCol="0">
+            <a:spAutoFit/>
+          </a:bodyPr>
+          <a:lstStyle/>
+          <a:p>
+            <a:pPr algn="ctr"/>
+            <a:r>
+              <a:rPr lang="ja-JP" altLang="en-US" sz="1000" dirty="0"/>
+              <a:t>データ</a:t>
+            </a:r>
+            <a:endParaRPr lang="en-US" altLang="ja-JP" sz="1000" dirty="0"/>
+          </a:p>
+          <a:p>
+            <a:pPr algn="ctr"/>
+            <a:r>
+              <a:rPr lang="ja-JP" altLang="en-US" sz="1000" dirty="0"/>
+              <a:t>作成</a:t>
+            </a:r>
+            <a:endParaRPr kumimoji="1" lang="ja-JP" altLang="en-US" sz="1000" dirty="0"/>
+          </a:p>
+        </p:txBody>
+      </p:sp>
+      <p:cxnSp>
+        <p:nvCxnSpPr>
+          <p:cNvPr id="7" name="直線コネクタ 6">
+            <a:extLst>
+              <a:ext uri="{FF2B5EF4-FFF2-40B4-BE49-F238E27FC236}">
+                <a16:creationId xmlns:a16="http://schemas.microsoft.com/office/drawing/2014/main" id="{443D0451-22F3-AEC7-1EE0-87B68AADDF49}"/>
+              </a:ext>
+            </a:extLst>
+          </p:cNvPr>
+          <p:cNvCxnSpPr>
+            <a:cxnSpLocks/>
+          </p:cNvCxnSpPr>
+          <p:nvPr/>
+        </p:nvCxnSpPr>
+        <p:spPr>
+          <a:xfrm>
+            <a:off x="2168983" y="2807970"/>
+            <a:ext cx="1945817" cy="946"/>
+          </a:xfrm>
+          <a:prstGeom prst="line">
+            <a:avLst/>
+          </a:prstGeom>
+          <a:ln w="25400">
+            <a:solidFill>
+              <a:srgbClr val="AA0AB2"/>
+            </a:solidFill>
+            <a:headEnd type="oval"/>
+            <a:tailEnd type="oval"/>
+          </a:ln>
+        </p:spPr>
+        <p:style>
+          <a:lnRef idx="1">
+            <a:schemeClr val="accent1"/>
+          </a:lnRef>
+          <a:fillRef idx="0">
+            <a:schemeClr val="accent1"/>
+          </a:fillRef>
+          <a:effectRef idx="0">
+            <a:schemeClr val="accent1"/>
+          </a:effectRef>
+          <a:fontRef idx="minor">
+            <a:schemeClr val="tx1"/>
+          </a:fontRef>
+        </p:style>
+      </p:cxnSp>
+      <p:sp>
+        <p:nvSpPr>
+          <p:cNvPr id="8" name="テキスト ボックス 7">
+            <a:extLst>
+              <a:ext uri="{FF2B5EF4-FFF2-40B4-BE49-F238E27FC236}">
+                <a16:creationId xmlns:a16="http://schemas.microsoft.com/office/drawing/2014/main" id="{F20EB2EA-F30A-8273-11F7-523BDA6DBE83}"/>
+              </a:ext>
+            </a:extLst>
+          </p:cNvPr>
+          <p:cNvSpPr txBox="1"/>
+          <p:nvPr/>
+        </p:nvSpPr>
+        <p:spPr>
+          <a:xfrm>
+            <a:off x="3061335" y="1654261"/>
+            <a:ext cx="704211" cy="246221"/>
+          </a:xfrm>
+          <a:prstGeom prst="rect">
+            <a:avLst/>
+          </a:prstGeom>
+          <a:noFill/>
+        </p:spPr>
+        <p:txBody>
+          <a:bodyPr wrap="square" rtlCol="0">
+            <a:spAutoFit/>
+          </a:bodyPr>
+          <a:lstStyle/>
+          <a:p>
+            <a:r>
+              <a:rPr kumimoji="1" lang="ja-JP" altLang="en-US" sz="1000" dirty="0"/>
+              <a:t>基板発注</a:t>
+            </a:r>
+            <a:endParaRPr kumimoji="1" lang="en-US" altLang="ja-JP" sz="1000" dirty="0"/>
+          </a:p>
+        </p:txBody>
+      </p:sp>
+      <p:cxnSp>
+        <p:nvCxnSpPr>
+          <p:cNvPr id="9" name="直線コネクタ 8">
+            <a:extLst>
+              <a:ext uri="{FF2B5EF4-FFF2-40B4-BE49-F238E27FC236}">
+                <a16:creationId xmlns:a16="http://schemas.microsoft.com/office/drawing/2014/main" id="{31605C9E-A23E-2670-DCCA-E2F30D1BA538}"/>
+              </a:ext>
+            </a:extLst>
+          </p:cNvPr>
+          <p:cNvCxnSpPr>
+            <a:cxnSpLocks/>
+          </p:cNvCxnSpPr>
+          <p:nvPr/>
+        </p:nvCxnSpPr>
+        <p:spPr>
+          <a:xfrm>
+            <a:off x="2168983" y="1586316"/>
+            <a:ext cx="894257" cy="0"/>
+          </a:xfrm>
+          <a:prstGeom prst="line">
+            <a:avLst/>
+          </a:prstGeom>
+          <a:ln w="25400">
+            <a:solidFill>
+              <a:srgbClr val="EBAE15"/>
+            </a:solidFill>
+            <a:headEnd type="oval"/>
+            <a:tailEnd type="oval"/>
+          </a:ln>
+        </p:spPr>
+        <p:style>
+          <a:lnRef idx="1">
+            <a:schemeClr val="accent1"/>
+          </a:lnRef>
+          <a:fillRef idx="0">
+            <a:schemeClr val="accent1"/>
+          </a:fillRef>
+          <a:effectRef idx="0">
+            <a:schemeClr val="accent1"/>
+          </a:effectRef>
+          <a:fontRef idx="minor">
+            <a:schemeClr val="tx1"/>
+          </a:fontRef>
+        </p:style>
+      </p:cxnSp>
+      <p:sp>
+        <p:nvSpPr>
+          <p:cNvPr id="10" name="テキスト ボックス 9">
+            <a:extLst>
+              <a:ext uri="{FF2B5EF4-FFF2-40B4-BE49-F238E27FC236}">
+                <a16:creationId xmlns:a16="http://schemas.microsoft.com/office/drawing/2014/main" id="{1CA96C72-472F-DE1B-2346-D236CCE8A580}"/>
+              </a:ext>
+            </a:extLst>
+          </p:cNvPr>
+          <p:cNvSpPr txBox="1"/>
+          <p:nvPr/>
+        </p:nvSpPr>
+        <p:spPr>
+          <a:xfrm>
+            <a:off x="2161678" y="1586316"/>
+            <a:ext cx="823348" cy="246221"/>
+          </a:xfrm>
+          <a:prstGeom prst="rect">
+            <a:avLst/>
+          </a:prstGeom>
+          <a:noFill/>
+        </p:spPr>
+        <p:txBody>
+          <a:bodyPr wrap="square" rtlCol="0">
+            <a:spAutoFit/>
+          </a:bodyPr>
+          <a:lstStyle/>
+          <a:p>
+            <a:pPr algn="ctr"/>
+            <a:r>
+              <a:rPr lang="ja-JP" altLang="en-US" sz="1000" dirty="0"/>
+              <a:t>データ作成</a:t>
+            </a:r>
+            <a:endParaRPr kumimoji="1" lang="ja-JP" altLang="en-US" sz="1000" dirty="0"/>
+          </a:p>
+        </p:txBody>
+      </p:sp>
+      <p:sp>
+        <p:nvSpPr>
+          <p:cNvPr id="11" name="楕円 10">
+            <a:extLst>
+              <a:ext uri="{FF2B5EF4-FFF2-40B4-BE49-F238E27FC236}">
+                <a16:creationId xmlns:a16="http://schemas.microsoft.com/office/drawing/2014/main" id="{83FDA986-EFFF-3006-A102-5B0AB85BDCE4}"/>
+              </a:ext>
+            </a:extLst>
+          </p:cNvPr>
+          <p:cNvSpPr/>
+          <p:nvPr/>
+        </p:nvSpPr>
+        <p:spPr>
+          <a:xfrm>
+            <a:off x="3027433" y="1740249"/>
+            <a:ext cx="72000" cy="72000"/>
+          </a:xfrm>
+          <a:prstGeom prst="ellipse">
+            <a:avLst/>
+          </a:prstGeom>
+          <a:solidFill>
+            <a:srgbClr val="EBAE15"/>
+          </a:solidFill>
+          <a:ln w="3175">
+            <a:solidFill>
+              <a:srgbClr val="EBAE15"/>
+            </a:solidFill>
+          </a:ln>
+        </p:spPr>
+        <p:style>
+          <a:lnRef idx="2">
+            <a:schemeClr val="accent1">
+              <a:shade val="50000"/>
+            </a:schemeClr>
+          </a:lnRef>
+          <a:fillRef idx="1">
+            <a:schemeClr val="accent1"/>
+          </a:fillRef>
+          <a:effectRef idx="0">
+            <a:schemeClr val="accent1"/>
+          </a:effectRef>
+          <a:fontRef idx="minor">
+            <a:schemeClr val="lt1"/>
+          </a:fontRef>
+        </p:style>
+        <p:txBody>
+          <a:bodyPr rtlCol="0" anchor="ctr"/>
+          <a:lstStyle/>
+          <a:p>
+            <a:pPr algn="ctr"/>
+            <a:endParaRPr kumimoji="1" lang="ja-JP" altLang="en-US" dirty="0"/>
+          </a:p>
+        </p:txBody>
+      </p:sp>
+      <p:cxnSp>
+        <p:nvCxnSpPr>
+          <p:cNvPr id="12" name="直線コネクタ 11">
+            <a:extLst>
+              <a:ext uri="{FF2B5EF4-FFF2-40B4-BE49-F238E27FC236}">
+                <a16:creationId xmlns:a16="http://schemas.microsoft.com/office/drawing/2014/main" id="{D0D739DB-CD8D-C234-CBAF-615C015BC6CC}"/>
+              </a:ext>
+            </a:extLst>
+          </p:cNvPr>
+          <p:cNvCxnSpPr>
+            <a:cxnSpLocks/>
+          </p:cNvCxnSpPr>
+          <p:nvPr/>
+        </p:nvCxnSpPr>
+        <p:spPr>
+          <a:xfrm>
+            <a:off x="3061335" y="1963307"/>
+            <a:ext cx="1053465" cy="0"/>
+          </a:xfrm>
+          <a:prstGeom prst="line">
+            <a:avLst/>
+          </a:prstGeom>
+          <a:ln w="25400">
+            <a:solidFill>
+              <a:srgbClr val="EBAE15"/>
+            </a:solidFill>
+            <a:headEnd type="oval"/>
+            <a:tailEnd type="oval"/>
+          </a:ln>
+        </p:spPr>
+        <p:style>
+          <a:lnRef idx="1">
+            <a:schemeClr val="accent1"/>
+          </a:lnRef>
+          <a:fillRef idx="0">
+            <a:schemeClr val="accent1"/>
+          </a:fillRef>
+          <a:effectRef idx="0">
+            <a:schemeClr val="accent1"/>
+          </a:effectRef>
+          <a:fontRef idx="minor">
+            <a:schemeClr val="tx1"/>
+          </a:fontRef>
+        </p:style>
+      </p:cxnSp>
+      <p:sp>
+        <p:nvSpPr>
+          <p:cNvPr id="13" name="テキスト ボックス 12">
+            <a:extLst>
+              <a:ext uri="{FF2B5EF4-FFF2-40B4-BE49-F238E27FC236}">
+                <a16:creationId xmlns:a16="http://schemas.microsoft.com/office/drawing/2014/main" id="{0BBDDC54-DE0F-51C2-A719-C351F3923BF7}"/>
+              </a:ext>
+            </a:extLst>
+          </p:cNvPr>
+          <p:cNvSpPr txBox="1"/>
+          <p:nvPr/>
+        </p:nvSpPr>
+        <p:spPr>
+          <a:xfrm>
+            <a:off x="3847943" y="1722843"/>
+            <a:ext cx="951352" cy="246221"/>
+          </a:xfrm>
+          <a:prstGeom prst="rect">
+            <a:avLst/>
+          </a:prstGeom>
+          <a:noFill/>
+        </p:spPr>
+        <p:txBody>
+          <a:bodyPr wrap="square" rtlCol="0">
+            <a:spAutoFit/>
+          </a:bodyPr>
+          <a:lstStyle/>
+          <a:p>
+            <a:r>
+              <a:rPr lang="ja-JP" altLang="en-US" sz="1000" dirty="0"/>
+              <a:t>動作チェック</a:t>
+            </a:r>
+            <a:endParaRPr kumimoji="1" lang="en-US" altLang="ja-JP" sz="1000" dirty="0"/>
+          </a:p>
+        </p:txBody>
+      </p:sp>
+      <p:cxnSp>
+        <p:nvCxnSpPr>
+          <p:cNvPr id="14" name="直線コネクタ 13">
+            <a:extLst>
+              <a:ext uri="{FF2B5EF4-FFF2-40B4-BE49-F238E27FC236}">
+                <a16:creationId xmlns:a16="http://schemas.microsoft.com/office/drawing/2014/main" id="{2ADE4858-F2DB-BD0A-FB77-7682E93EF9FD}"/>
+              </a:ext>
+            </a:extLst>
+          </p:cNvPr>
+          <p:cNvCxnSpPr>
+            <a:cxnSpLocks/>
+          </p:cNvCxnSpPr>
+          <p:nvPr/>
+        </p:nvCxnSpPr>
+        <p:spPr>
+          <a:xfrm>
+            <a:off x="4114800" y="1599768"/>
+            <a:ext cx="244635" cy="0"/>
+          </a:xfrm>
+          <a:prstGeom prst="line">
+            <a:avLst/>
+          </a:prstGeom>
+          <a:ln w="25400">
+            <a:solidFill>
+              <a:srgbClr val="EBAE15"/>
+            </a:solidFill>
+            <a:headEnd type="oval"/>
+            <a:tailEnd type="oval"/>
+          </a:ln>
+        </p:spPr>
+        <p:style>
+          <a:lnRef idx="1">
+            <a:schemeClr val="accent1"/>
+          </a:lnRef>
+          <a:fillRef idx="0">
+            <a:schemeClr val="accent1"/>
+          </a:fillRef>
+          <a:effectRef idx="0">
+            <a:schemeClr val="accent1"/>
+          </a:effectRef>
+          <a:fontRef idx="minor">
+            <a:schemeClr val="tx1"/>
+          </a:fontRef>
+        </p:style>
+      </p:cxnSp>
+      <p:cxnSp>
+        <p:nvCxnSpPr>
+          <p:cNvPr id="15" name="直線コネクタ 14">
+            <a:extLst>
+              <a:ext uri="{FF2B5EF4-FFF2-40B4-BE49-F238E27FC236}">
+                <a16:creationId xmlns:a16="http://schemas.microsoft.com/office/drawing/2014/main" id="{F0C60A8D-1E55-CC2F-BAD1-6FB8438FBFAA}"/>
+              </a:ext>
+            </a:extLst>
+          </p:cNvPr>
+          <p:cNvCxnSpPr>
+            <a:cxnSpLocks/>
+          </p:cNvCxnSpPr>
+          <p:nvPr/>
+        </p:nvCxnSpPr>
+        <p:spPr>
+          <a:xfrm>
+            <a:off x="2721433" y="2406914"/>
+            <a:ext cx="378000" cy="0"/>
+          </a:xfrm>
+          <a:prstGeom prst="line">
+            <a:avLst/>
+          </a:prstGeom>
+          <a:ln w="25400">
+            <a:solidFill>
+              <a:srgbClr val="006699"/>
+            </a:solidFill>
+            <a:headEnd type="oval"/>
+            <a:tailEnd type="oval"/>
+          </a:ln>
+        </p:spPr>
+        <p:style>
+          <a:lnRef idx="1">
+            <a:schemeClr val="accent1"/>
+          </a:lnRef>
+          <a:fillRef idx="0">
+            <a:schemeClr val="accent1"/>
+          </a:fillRef>
+          <a:effectRef idx="0">
+            <a:schemeClr val="accent1"/>
+          </a:effectRef>
+          <a:fontRef idx="minor">
+            <a:schemeClr val="tx1"/>
+          </a:fontRef>
+        </p:style>
+      </p:cxnSp>
+      <p:sp>
+        <p:nvSpPr>
+          <p:cNvPr id="16" name="テキスト ボックス 15">
+            <a:extLst>
+              <a:ext uri="{FF2B5EF4-FFF2-40B4-BE49-F238E27FC236}">
+                <a16:creationId xmlns:a16="http://schemas.microsoft.com/office/drawing/2014/main" id="{834253F4-F4E3-22B8-0CEA-E09E13786481}"/>
+              </a:ext>
+            </a:extLst>
+          </p:cNvPr>
+          <p:cNvSpPr txBox="1"/>
+          <p:nvPr/>
+        </p:nvSpPr>
+        <p:spPr>
+          <a:xfrm>
+            <a:off x="3099433" y="2282405"/>
+            <a:ext cx="700808" cy="246221"/>
+          </a:xfrm>
+          <a:prstGeom prst="rect">
+            <a:avLst/>
+          </a:prstGeom>
+          <a:noFill/>
+        </p:spPr>
+        <p:txBody>
+          <a:bodyPr wrap="square" rtlCol="0">
+            <a:spAutoFit/>
+          </a:bodyPr>
+          <a:lstStyle/>
+          <a:p>
+            <a:r>
+              <a:rPr kumimoji="1" lang="ja-JP" altLang="en-US" sz="1000" dirty="0"/>
+              <a:t>組み立て</a:t>
+            </a:r>
+            <a:endParaRPr kumimoji="1" lang="en-US" altLang="ja-JP" sz="1000" dirty="0"/>
+          </a:p>
+        </p:txBody>
+      </p:sp>
+      <p:cxnSp>
+        <p:nvCxnSpPr>
+          <p:cNvPr id="17" name="直線コネクタ 16">
+            <a:extLst>
+              <a:ext uri="{FF2B5EF4-FFF2-40B4-BE49-F238E27FC236}">
+                <a16:creationId xmlns:a16="http://schemas.microsoft.com/office/drawing/2014/main" id="{5FDDAB3E-B4D4-845D-ABC6-DB0F09E13370}"/>
+              </a:ext>
+            </a:extLst>
+          </p:cNvPr>
+          <p:cNvCxnSpPr>
+            <a:cxnSpLocks/>
+          </p:cNvCxnSpPr>
+          <p:nvPr/>
+        </p:nvCxnSpPr>
+        <p:spPr>
+          <a:xfrm>
+            <a:off x="3099434" y="2598745"/>
+            <a:ext cx="1260000" cy="0"/>
+          </a:xfrm>
+          <a:prstGeom prst="line">
+            <a:avLst/>
+          </a:prstGeom>
+          <a:ln w="25400">
+            <a:solidFill>
+              <a:srgbClr val="006699"/>
+            </a:solidFill>
+            <a:headEnd type="oval"/>
+            <a:tailEnd type="oval"/>
+          </a:ln>
+        </p:spPr>
+        <p:style>
+          <a:lnRef idx="1">
+            <a:schemeClr val="accent1"/>
+          </a:lnRef>
+          <a:fillRef idx="0">
+            <a:schemeClr val="accent1"/>
+          </a:fillRef>
+          <a:effectRef idx="0">
+            <a:schemeClr val="accent1"/>
+          </a:effectRef>
+          <a:fontRef idx="minor">
+            <a:schemeClr val="tx1"/>
+          </a:fontRef>
+        </p:style>
+      </p:cxnSp>
+      <p:cxnSp>
+        <p:nvCxnSpPr>
+          <p:cNvPr id="18" name="直線コネクタ 17">
+            <a:extLst>
+              <a:ext uri="{FF2B5EF4-FFF2-40B4-BE49-F238E27FC236}">
+                <a16:creationId xmlns:a16="http://schemas.microsoft.com/office/drawing/2014/main" id="{48672EC1-46CE-C080-1A0B-443281D697D9}"/>
+              </a:ext>
+            </a:extLst>
+          </p:cNvPr>
+          <p:cNvCxnSpPr>
+            <a:cxnSpLocks/>
+          </p:cNvCxnSpPr>
+          <p:nvPr/>
+        </p:nvCxnSpPr>
+        <p:spPr>
+          <a:xfrm>
+            <a:off x="4114800" y="3000418"/>
+            <a:ext cx="242730" cy="0"/>
+          </a:xfrm>
+          <a:prstGeom prst="line">
+            <a:avLst/>
+          </a:prstGeom>
+          <a:ln w="25400">
+            <a:solidFill>
+              <a:srgbClr val="AA0AB2"/>
+            </a:solidFill>
+            <a:headEnd type="oval"/>
+            <a:tailEnd type="oval"/>
+          </a:ln>
+        </p:spPr>
+        <p:style>
+          <a:lnRef idx="1">
+            <a:schemeClr val="accent1"/>
+          </a:lnRef>
+          <a:fillRef idx="0">
+            <a:schemeClr val="accent1"/>
+          </a:fillRef>
+          <a:effectRef idx="0">
+            <a:schemeClr val="accent1"/>
+          </a:effectRef>
+          <a:fontRef idx="minor">
+            <a:schemeClr val="tx1"/>
+          </a:fontRef>
+        </p:style>
+      </p:cxnSp>
+      <p:sp>
+        <p:nvSpPr>
+          <p:cNvPr id="19" name="テキスト ボックス 18">
+            <a:extLst>
+              <a:ext uri="{FF2B5EF4-FFF2-40B4-BE49-F238E27FC236}">
+                <a16:creationId xmlns:a16="http://schemas.microsoft.com/office/drawing/2014/main" id="{E2CCB8C6-A73D-8BDF-8AE3-07DD96D56E5F}"/>
+              </a:ext>
+            </a:extLst>
+          </p:cNvPr>
+          <p:cNvSpPr txBox="1"/>
+          <p:nvPr/>
+        </p:nvSpPr>
+        <p:spPr>
+          <a:xfrm>
+            <a:off x="2768275" y="2818647"/>
+            <a:ext cx="1317168" cy="246221"/>
+          </a:xfrm>
+          <a:prstGeom prst="rect">
+            <a:avLst/>
+          </a:prstGeom>
+          <a:noFill/>
+        </p:spPr>
+        <p:txBody>
+          <a:bodyPr wrap="square" rtlCol="0">
+            <a:spAutoFit/>
+          </a:bodyPr>
+          <a:lstStyle/>
+          <a:p>
+            <a:pPr algn="ctr"/>
+            <a:r>
+              <a:rPr lang="ja-JP" altLang="en-US" sz="1000" dirty="0"/>
+              <a:t>プログラム作成</a:t>
+            </a:r>
+            <a:endParaRPr kumimoji="1" lang="ja-JP" altLang="en-US" sz="1000" dirty="0"/>
+          </a:p>
+        </p:txBody>
+      </p:sp>
+      <p:sp>
+        <p:nvSpPr>
+          <p:cNvPr id="20" name="テキスト ボックス 19">
+            <a:extLst>
+              <a:ext uri="{FF2B5EF4-FFF2-40B4-BE49-F238E27FC236}">
+                <a16:creationId xmlns:a16="http://schemas.microsoft.com/office/drawing/2014/main" id="{E5FEC6F0-AFC6-C4E3-4AA7-3C6473458634}"/>
+              </a:ext>
+            </a:extLst>
+          </p:cNvPr>
+          <p:cNvSpPr txBox="1"/>
+          <p:nvPr/>
+        </p:nvSpPr>
+        <p:spPr>
+          <a:xfrm>
+            <a:off x="4357530" y="2877307"/>
+            <a:ext cx="441765" cy="246221"/>
+          </a:xfrm>
+          <a:prstGeom prst="rect">
+            <a:avLst/>
+          </a:prstGeom>
+          <a:noFill/>
+        </p:spPr>
+        <p:txBody>
+          <a:bodyPr wrap="square" rtlCol="0">
+            <a:spAutoFit/>
+          </a:bodyPr>
+          <a:lstStyle/>
+          <a:p>
+            <a:r>
+              <a:rPr kumimoji="1" lang="ja-JP" altLang="en-US" sz="1000" dirty="0"/>
+              <a:t>調整</a:t>
+            </a:r>
+          </a:p>
+        </p:txBody>
+      </p:sp>
+      <p:sp>
+        <p:nvSpPr>
+          <p:cNvPr id="21" name="テキスト ボックス 20">
+            <a:extLst>
+              <a:ext uri="{FF2B5EF4-FFF2-40B4-BE49-F238E27FC236}">
+                <a16:creationId xmlns:a16="http://schemas.microsoft.com/office/drawing/2014/main" id="{6F77A8BC-DC27-D5AC-D955-2F2758ABC635}"/>
+              </a:ext>
+            </a:extLst>
+          </p:cNvPr>
+          <p:cNvSpPr txBox="1"/>
+          <p:nvPr/>
+        </p:nvSpPr>
+        <p:spPr>
+          <a:xfrm>
+            <a:off x="4358960" y="2473094"/>
+            <a:ext cx="441765" cy="246221"/>
+          </a:xfrm>
+          <a:prstGeom prst="rect">
+            <a:avLst/>
+          </a:prstGeom>
+          <a:noFill/>
+        </p:spPr>
+        <p:txBody>
+          <a:bodyPr wrap="square" rtlCol="0">
+            <a:spAutoFit/>
+          </a:bodyPr>
+          <a:lstStyle/>
+          <a:p>
+            <a:r>
+              <a:rPr kumimoji="1" lang="ja-JP" altLang="en-US" sz="1000" dirty="0"/>
+              <a:t>調整</a:t>
+            </a:r>
+          </a:p>
+        </p:txBody>
+      </p:sp>
+      <p:sp>
+        <p:nvSpPr>
+          <p:cNvPr id="22" name="テキスト ボックス 21">
+            <a:extLst>
+              <a:ext uri="{FF2B5EF4-FFF2-40B4-BE49-F238E27FC236}">
+                <a16:creationId xmlns:a16="http://schemas.microsoft.com/office/drawing/2014/main" id="{0EE2DFE4-CE10-B133-85BB-E7C0A2584357}"/>
+              </a:ext>
+            </a:extLst>
+          </p:cNvPr>
+          <p:cNvSpPr txBox="1"/>
+          <p:nvPr/>
+        </p:nvSpPr>
+        <p:spPr>
+          <a:xfrm>
+            <a:off x="4358959" y="1476622"/>
+            <a:ext cx="441765" cy="246221"/>
+          </a:xfrm>
+          <a:prstGeom prst="rect">
+            <a:avLst/>
+          </a:prstGeom>
+          <a:noFill/>
+        </p:spPr>
+        <p:txBody>
+          <a:bodyPr wrap="square" rtlCol="0">
+            <a:spAutoFit/>
+          </a:bodyPr>
+          <a:lstStyle/>
+          <a:p>
+            <a:r>
+              <a:rPr kumimoji="1" lang="ja-JP" altLang="en-US" sz="1000" dirty="0"/>
+              <a:t>調整</a:t>
+            </a:r>
+          </a:p>
+        </p:txBody>
+      </p:sp>
+    </p:spTree>
+    <p:extLst>
+      <p:ext uri="{BB962C8B-B14F-4D97-AF65-F5344CB8AC3E}">
+        <p14:creationId xmlns:p14="http://schemas.microsoft.com/office/powerpoint/2010/main" val="4089277126"/>
       </p:ext>
     </p:extLst>
   </p:cSld>
